--- a/presentations/Petits_Financiers.pptx
+++ b/presentations/Petits_Financiers.pptx
@@ -15,9 +15,10 @@
     <p:sldId id="263" r:id="rId9"/>
     <p:sldId id="264" r:id="rId10"/>
     <p:sldId id="265" r:id="rId11"/>
+    <p:sldId id="266" r:id="rId12"/>
   </p:sldIdLst>
   <p:notesMasterIdLst>
-    <p:notesMasterId r:id="rId12"/>
+    <p:notesMasterId r:id="rId13"/>
   </p:notesMasterIdLst>
   <p:sldSz cx="12192000" cy="6858000"/>
   <p:notesSz cx="6858000" cy="12192000"/>
@@ -599,7 +600,7 @@
           <a:p>
             <a:r>
               <a:rPr lang="en-US" dirty="0"/>
-              <a:t/>
+              <a:t>A few tips for success and popular flavour variations.</a:t>
             </a:r>
             <a:endParaRPr lang="en-US" dirty="0"/>
           </a:p>
@@ -623,6 +624,94 @@
             <a:fld id="{F7021451-1387-4CA6-816F-3879F97B5CBC}" type="slidenum">
               <a:rPr lang="en-US"/>
               <a:t>10</a:t>
+            </a:fld>
+            <a:endParaRPr lang="en-US"/>
+          </a:p>
+        </p:txBody>
+      </p:sp>
+    </p:spTree>
+    <p:extLst>
+      <p:ext uri="{BB962C8B-B14F-4D97-AF65-F5344CB8AC3E}">
+        <p14:creationId xmlns:p14="http://schemas.microsoft.com/office/powerpoint/2010/main" val="1024086991"/>
+      </p:ext>
+    </p:extLst>
+  </p:cSld>
+  <p:clrMapOvr>
+    <a:masterClrMapping/>
+  </p:clrMapOvr>
+</p:notes>
+</file>
+
+<file path=ppt/notesSlides/notesSlide11.xml><?xml version="1.0" encoding="utf-8"?>
+<p:notes xmlns:a="http://schemas.openxmlformats.org/drawingml/2006/main" xmlns:r="http://schemas.openxmlformats.org/officeDocument/2006/relationships" xmlns:p="http://schemas.openxmlformats.org/presentationml/2006/main">
+  <p:cSld>
+    <p:spTree>
+      <p:nvGrpSpPr>
+        <p:cNvPr id="1" name=""/>
+        <p:cNvGrpSpPr/>
+        <p:nvPr/>
+      </p:nvGrpSpPr>
+      <p:grpSpPr>
+        <a:xfrm>
+          <a:off x="0" y="0"/>
+          <a:ext cx="0" cy="0"/>
+          <a:chOff x="0" y="0"/>
+          <a:chExt cx="0" cy="0"/>
+        </a:xfrm>
+      </p:grpSpPr>
+      <p:sp>
+        <p:nvSpPr>
+          <p:cNvPr id="2" name="Slide Image Placeholder 1"/>
+          <p:cNvSpPr>
+            <a:spLocks noGrp="1" noRot="1" noChangeAspect="1"/>
+          </p:cNvSpPr>
+          <p:nvPr>
+            <p:ph type="sldImg"/>
+          </p:nvPr>
+        </p:nvSpPr>
+        <p:spPr/>
+      </p:sp>
+      <p:sp>
+        <p:nvSpPr>
+          <p:cNvPr id="3" name="Notes Placeholder 2"/>
+          <p:cNvSpPr>
+            <a:spLocks noGrp="1"/>
+          </p:cNvSpPr>
+          <p:nvPr>
+            <p:ph type="body" idx="1"/>
+          </p:nvPr>
+        </p:nvSpPr>
+        <p:spPr/>
+        <p:txBody>
+          <a:bodyPr/>
+          <a:lstStyle/>
+          <a:p>
+            <a:r>
+              <a:rPr lang="en-US" dirty="0"/>
+              <a:t/>
+            </a:r>
+            <a:endParaRPr lang="en-US" dirty="0"/>
+          </a:p>
+        </p:txBody>
+      </p:sp>
+      <p:sp>
+        <p:nvSpPr>
+          <p:cNvPr id="4" name="Slide Number Placeholder 3"/>
+          <p:cNvSpPr>
+            <a:spLocks noGrp="1"/>
+          </p:cNvSpPr>
+          <p:nvPr>
+            <p:ph type="sldNum" sz="quarter" idx="10"/>
+          </p:nvPr>
+        </p:nvSpPr>
+        <p:spPr/>
+        <p:txBody>
+          <a:bodyPr/>
+          <a:lstStyle/>
+          <a:p>
+            <a:fld id="{F7021451-1387-4CA6-816F-3879F97B5CBC}" type="slidenum">
+              <a:rPr lang="en-US"/>
+              <a:t>11</a:t>
             </a:fld>
             <a:endParaRPr lang="en-US"/>
           </a:p>
@@ -775,7 +864,7 @@
           <a:p>
             <a:r>
               <a:rPr lang="en-US" dirty="0"/>
-              <a:t>Financiers are eaten at goûter (afternoon snack), with coffee or tea, as petits fours after a meal, and as gifts. They're best at room temperature on the day they're baked.</a:t>
+              <a:t>Financiers trace back to two places: Nancy in Lorraine, where the Visitation nuns made visitandines, and the Paris stock exchange district, where they got their gold-bar shape and name.</a:t>
             </a:r>
             <a:endParaRPr lang="en-US" dirty="0"/>
           </a:p>
@@ -863,7 +952,7 @@
           <a:p>
             <a:r>
               <a:rPr lang="en-US" dirty="0"/>
-              <a:t>This slide is the full printable recipe. The next slides go through the ingredients, tools and each step in detail.</a:t>
+              <a:t>Financiers are eaten at goûter (afternoon snack), with coffee or tea, as petits fours after a meal, and as gifts. They're best at room temperature on the day they're baked.</a:t>
             </a:r>
             <a:endParaRPr lang="en-US" dirty="0"/>
           </a:p>
@@ -951,7 +1040,7 @@
           <a:p>
             <a:r>
               <a:rPr lang="en-US" dirty="0"/>
-              <a:t>Financiers use almond flour, a little plain flour, powdered sugar, egg whites and brown butter. The brown butter is the key flavour.</a:t>
+              <a:t>This slide is the full printable recipe. The next slides go through the ingredients, tools and each step in detail.</a:t>
             </a:r>
             <a:endParaRPr lang="en-US" dirty="0"/>
           </a:p>
@@ -1039,7 +1128,7 @@
           <a:p>
             <a:r>
               <a:rPr lang="en-US" dirty="0"/>
-              <a:t>The only special tool is the rectangular financier mould. Everything else is basic: scale, saucepan, sieve, whisk and bowl, pastry brush, piping bag, spatula, cooling rack and an oven.</a:t>
+              <a:t>Financiers use almond flour, a little plain flour, powdered sugar, egg whites and brown butter. The brown butter is the key flavour.</a:t>
             </a:r>
             <a:endParaRPr lang="en-US" dirty="0"/>
           </a:p>
@@ -1127,7 +1216,7 @@
           <a:p>
             <a:r>
               <a:rPr lang="en-US" dirty="0"/>
-              <a:t>Step 1: Brown the butter. Melt the butter in a small pan over medium heat. Keep cooking 5–7 min, swirling, until it foams, smells nutty and turns golden-brown. Strain and let cool until just warm. Step 2: Prepare the oven &amp; moulds. Preheat to 200°C / 400°F. Brush the moulds with soft butter so the cakes release easily. Step 3: Mix the dry ingredients. Sift the almond flour, plain flour, powdered sugar and salt into a bowl to remove lumps. Step 4: Add the egg whites. Pour in the egg whites and stir with a whisk until smooth. Don't beat them to foam — just combine.</a:t>
+              <a:t>The only special tool is the rectangular financier mould. Everything else is basic: scale, saucepan, sieve, whisk and bowl, pastry brush, piping bag, spatula, cooling rack and an oven.</a:t>
             </a:r>
             <a:endParaRPr lang="en-US" dirty="0"/>
           </a:p>
@@ -1215,7 +1304,7 @@
           <a:p>
             <a:r>
               <a:rPr lang="en-US" dirty="0"/>
-              <a:t>Step 5: Add the brown butter. Slowly pour in the warm brown butter (and vanilla), whisking until the batter is glossy. Step 6: Rest the batter. Chill for 30 minutes (or up to overnight). This gives a better rise and texture. Step 7: Fill &amp; top. Spoon or pipe the batter into the moulds about ¾ full. Add flaked almonds or a raspberry if you like. Step 8: Bake &amp; cool. Bake 12–15 min until the edges are golden and the tops spring back. Cool 5 min, then unmould onto a rack.</a:t>
+              <a:t>Step 1: Brown the butter. Melt the butter in a small pan over medium heat. Keep cooking 5–7 min, swirling, until it foams, smells nutty and turns golden-brown. Strain and let cool until just warm. Step 2: Prepare the oven &amp; moulds. Preheat to 200°C / 400°F. Brush the moulds with soft butter so the cakes release easily. Step 3: Mix the dry ingredients. Sift the almond flour, plain flour, powdered sugar and salt into a bowl to remove lumps. Step 4: Add the egg whites. Pour in the egg whites and stir with a whisk until smooth. Don't beat them to foam — just combine.</a:t>
             </a:r>
             <a:endParaRPr lang="en-US" dirty="0"/>
           </a:p>
@@ -1303,7 +1392,7 @@
           <a:p>
             <a:r>
               <a:rPr lang="en-US" dirty="0"/>
-              <a:t>A few tips for success and popular flavour variations.</a:t>
+              <a:t>Step 5: Add the brown butter. Slowly pour in the warm brown butter (and vanilla), whisking until the batter is glossy. Step 6: Rest the batter. Chill for 30 minutes (or up to overnight). This gives a better rise and texture. Step 7: Fill &amp; top. Spoon or pipe the batter into the moulds about ¾ full. Add flaked almonds or a raspberry if you like. Step 8: Bake &amp; cool. Bake 12–15 min until the edges are golden and the tops spring back. Cool 5 min, then unmould onto a rack.</a:t>
             </a:r>
             <a:endParaRPr lang="en-US" dirty="0"/>
           </a:p>
@@ -1676,192 +1765,33 @@
           <a:chExt cx="0" cy="0"/>
         </a:xfrm>
       </p:grpSpPr>
-      <p:sp>
-        <p:nvSpPr>
-          <p:cNvPr id="2" name="Shape 0"/>
-          <p:cNvSpPr/>
-          <p:nvPr/>
-        </p:nvSpPr>
-        <p:spPr>
-          <a:xfrm>
-            <a:off x="7498080" y="2011680"/>
-            <a:ext cx="3291840" cy="1188720"/>
-          </a:xfrm>
-          <a:prstGeom prst="roundRect">
-            <a:avLst>
-              <a:gd name="adj" fmla="val 6154"/>
-            </a:avLst>
-          </a:prstGeom>
-          <a:solidFill>
-            <a:srgbClr val="C8963E"/>
-          </a:solidFill>
-          <a:ln w="19050">
-            <a:solidFill>
-              <a:srgbClr val="8A5A2B"/>
-            </a:solidFill>
-            <a:prstDash val="solid"/>
-          </a:ln>
-          <a:effectLst>
-            <a:outerShdw sx="100000" sy="100000" kx="0" ky="0" algn="bl" rotWithShape="0" blurRad="76200" dist="38100" dir="5400000">
-              <a:srgbClr val="000000">
-                <a:alpha val="35000"/>
-              </a:srgbClr>
-            </a:outerShdw>
-          </a:effectLst>
-        </p:spPr>
-      </p:sp>
-      <p:sp>
-        <p:nvSpPr>
-          <p:cNvPr id="3" name="Shape 1"/>
-          <p:cNvSpPr/>
-          <p:nvPr/>
-        </p:nvSpPr>
-        <p:spPr>
-          <a:xfrm>
-            <a:off x="7761427" y="2189988"/>
-            <a:ext cx="2765146" cy="416052"/>
-          </a:xfrm>
-          <a:prstGeom prst="roundRect">
-            <a:avLst>
-              <a:gd name="adj" fmla="val 10989"/>
-            </a:avLst>
-          </a:prstGeom>
-          <a:solidFill>
-            <a:srgbClr val="E0B566"/>
-          </a:solidFill>
-          <a:ln w="12700">
-            <a:solidFill>
-              <a:srgbClr val="E0B566"/>
-            </a:solidFill>
-            <a:prstDash val="solid"/>
-          </a:ln>
-        </p:spPr>
-      </p:sp>
-      <p:sp>
-        <p:nvSpPr>
-          <p:cNvPr id="4" name="Shape 2"/>
-          <p:cNvSpPr/>
-          <p:nvPr/>
-        </p:nvSpPr>
-        <p:spPr>
-          <a:xfrm>
-            <a:off x="8229600" y="3566160"/>
-            <a:ext cx="3291840" cy="1188720"/>
-          </a:xfrm>
-          <a:prstGeom prst="roundRect">
-            <a:avLst>
-              <a:gd name="adj" fmla="val 6154"/>
-            </a:avLst>
-          </a:prstGeom>
-          <a:solidFill>
-            <a:srgbClr val="C8963E"/>
-          </a:solidFill>
-          <a:ln w="19050">
-            <a:solidFill>
-              <a:srgbClr val="8A5A2B"/>
-            </a:solidFill>
-            <a:prstDash val="solid"/>
-          </a:ln>
-          <a:effectLst>
-            <a:outerShdw sx="100000" sy="100000" kx="0" ky="0" algn="bl" rotWithShape="0" blurRad="76200" dist="38100" dir="5400000">
-              <a:srgbClr val="000000">
-                <a:alpha val="35000"/>
-              </a:srgbClr>
-            </a:outerShdw>
-          </a:effectLst>
-        </p:spPr>
-      </p:sp>
-      <p:sp>
-        <p:nvSpPr>
-          <p:cNvPr id="5" name="Shape 3"/>
-          <p:cNvSpPr/>
-          <p:nvPr/>
-        </p:nvSpPr>
-        <p:spPr>
-          <a:xfrm>
-            <a:off x="8492947" y="3744468"/>
-            <a:ext cx="2765146" cy="416052"/>
-          </a:xfrm>
-          <a:prstGeom prst="roundRect">
-            <a:avLst>
-              <a:gd name="adj" fmla="val 10989"/>
-            </a:avLst>
-          </a:prstGeom>
-          <a:solidFill>
-            <a:srgbClr val="E0B566"/>
-          </a:solidFill>
-          <a:ln w="12700">
-            <a:solidFill>
-              <a:srgbClr val="E0B566"/>
-            </a:solidFill>
-            <a:prstDash val="solid"/>
-          </a:ln>
-        </p:spPr>
-      </p:sp>
-      <p:sp>
-        <p:nvSpPr>
-          <p:cNvPr id="6" name="Shape 4"/>
-          <p:cNvSpPr/>
-          <p:nvPr/>
-        </p:nvSpPr>
-        <p:spPr>
-          <a:xfrm>
-            <a:off x="6949440" y="4937760"/>
-            <a:ext cx="2743200" cy="1005840"/>
-          </a:xfrm>
-          <a:prstGeom prst="roundRect">
-            <a:avLst>
-              <a:gd name="adj" fmla="val 7273"/>
-            </a:avLst>
-          </a:prstGeom>
-          <a:solidFill>
-            <a:srgbClr val="C8963E"/>
-          </a:solidFill>
-          <a:ln w="19050">
-            <a:solidFill>
-              <a:srgbClr val="8A5A2B"/>
-            </a:solidFill>
-            <a:prstDash val="solid"/>
-          </a:ln>
-          <a:effectLst>
-            <a:outerShdw sx="100000" sy="100000" kx="0" ky="0" algn="bl" rotWithShape="0" blurRad="76200" dist="38100" dir="5400000">
-              <a:srgbClr val="000000">
-                <a:alpha val="35000"/>
-              </a:srgbClr>
-            </a:outerShdw>
-          </a:effectLst>
-        </p:spPr>
-      </p:sp>
-      <p:sp>
-        <p:nvSpPr>
-          <p:cNvPr id="7" name="Shape 5"/>
-          <p:cNvSpPr/>
-          <p:nvPr/>
-        </p:nvSpPr>
-        <p:spPr>
-          <a:xfrm>
-            <a:off x="7168896" y="5088636"/>
-            <a:ext cx="2304288" cy="352044"/>
-          </a:xfrm>
-          <a:prstGeom prst="roundRect">
-            <a:avLst>
-              <a:gd name="adj" fmla="val 12987"/>
-            </a:avLst>
-          </a:prstGeom>
-          <a:solidFill>
-            <a:srgbClr val="E0B566"/>
-          </a:solidFill>
-          <a:ln w="12700">
-            <a:solidFill>
-              <a:srgbClr val="E0B566"/>
-            </a:solidFill>
-            <a:prstDash val="solid"/>
-          </a:ln>
-        </p:spPr>
-      </p:sp>
-      <p:sp>
-        <p:nvSpPr>
-          <p:cNvPr id="8" name="Text 6"/>
+      <p:pic>
+        <p:nvPicPr>
+          <p:cNvPr id="2" name="Image 0" descr="a plate of financiers">    </p:cNvPr>
+          <p:cNvPicPr>
+            <a:picLocks noChangeAspect="1"/>
+          </p:cNvPicPr>
+          <p:nvPr/>
+        </p:nvPicPr>
+        <p:blipFill>
+          <a:blip r:embed="rId1"/>
+          <a:stretch>
+            <a:fillRect/>
+          </a:stretch>
+        </p:blipFill>
+        <p:spPr>
+          <a:xfrm>
+            <a:off x="7315200" y="0"/>
+            <a:ext cx="4876495" cy="6858000"/>
+          </a:xfrm>
+          <a:prstGeom prst="rect">
+            <a:avLst/>
+          </a:prstGeom>
+        </p:spPr>
+      </p:pic>
+      <p:sp>
+        <p:nvSpPr>
+          <p:cNvPr id="3" name="Text 0"/>
           <p:cNvSpPr txBox="1"/>
           <p:nvPr/>
         </p:nvSpPr>
@@ -1900,7 +1830,7 @@
       </p:sp>
       <p:sp>
         <p:nvSpPr>
-          <p:cNvPr id="9" name="Text 7"/>
+          <p:cNvPr id="4" name="Text 1"/>
           <p:cNvSpPr txBox="1"/>
           <p:nvPr/>
         </p:nvSpPr>
@@ -1939,7 +1869,7 @@
       </p:sp>
       <p:sp>
         <p:nvSpPr>
-          <p:cNvPr id="10" name="Text 8"/>
+          <p:cNvPr id="5" name="Text 2"/>
           <p:cNvSpPr txBox="1"/>
           <p:nvPr/>
         </p:nvSpPr>
@@ -1987,6 +1917,806 @@
 <file path=ppt/slides/slide10.xml><?xml version="1.0" encoding="utf-8"?>
 <p:sld xmlns:a="http://schemas.openxmlformats.org/drawingml/2006/main" xmlns:r="http://schemas.openxmlformats.org/officeDocument/2006/relationships" xmlns:p="http://schemas.openxmlformats.org/presentationml/2006/main">
   <p:cSld name="Slide 10">
+    <p:bg>
+      <p:bgPr>
+        <a:solidFill>
+          <a:srgbClr val="FFFFFF"/>
+        </a:solidFill>
+      </p:bgPr>
+    </p:bg>
+    <p:spTree>
+      <p:nvGrpSpPr>
+        <p:cNvPr id="1" name=""/>
+        <p:cNvGrpSpPr/>
+        <p:nvPr/>
+      </p:nvGrpSpPr>
+      <p:grpSpPr>
+        <a:xfrm>
+          <a:off x="0" y="0"/>
+          <a:ext cx="0" cy="0"/>
+          <a:chOff x="0" y="0"/>
+          <a:chExt cx="0" cy="0"/>
+        </a:xfrm>
+      </p:grpSpPr>
+      <p:sp>
+        <p:nvSpPr>
+          <p:cNvPr id="2" name="Text 0"/>
+          <p:cNvSpPr txBox="1"/>
+          <p:nvPr/>
+        </p:nvSpPr>
+        <p:spPr>
+          <a:xfrm>
+            <a:off x="548640" y="365760"/>
+            <a:ext cx="11064240" cy="731520"/>
+          </a:xfrm>
+          <a:prstGeom prst="rect">
+            <a:avLst/>
+          </a:prstGeom>
+          <a:noFill/>
+          <a:ln/>
+        </p:spPr>
+        <p:txBody>
+          <a:bodyPr wrap="square" lIns="0" tIns="0" rIns="0" bIns="0" rtlCol="0" anchor="ctr"/>
+          <a:lstStyle/>
+          <a:p>
+            <a:pPr indent="0" marL="0">
+              <a:buNone/>
+            </a:pPr>
+            <a:r>
+              <a:rPr lang="en-US" sz="3800" b="1" dirty="0">
+                <a:solidFill>
+                  <a:srgbClr val="3B2418"/>
+                </a:solidFill>
+                <a:latin typeface="Cambria" pitchFamily="34" charset="0"/>
+                <a:ea typeface="Cambria" pitchFamily="34" charset="-122"/>
+                <a:cs typeface="Cambria" pitchFamily="34" charset="-120"/>
+              </a:rPr>
+              <a:t>Tips &amp; Variations</a:t>
+            </a:r>
+            <a:endParaRPr lang="en-US" sz="3800" dirty="0"/>
+          </a:p>
+        </p:txBody>
+      </p:sp>
+      <p:sp>
+        <p:nvSpPr>
+          <p:cNvPr id="3" name="Shape 1"/>
+          <p:cNvSpPr/>
+          <p:nvPr/>
+        </p:nvSpPr>
+        <p:spPr>
+          <a:xfrm>
+            <a:off x="548640" y="1371600"/>
+            <a:ext cx="5303520" cy="4846320"/>
+          </a:xfrm>
+          <a:prstGeom prst="roundRect">
+            <a:avLst>
+              <a:gd name="adj" fmla="val 2264"/>
+            </a:avLst>
+          </a:prstGeom>
+          <a:solidFill>
+            <a:srgbClr val="F6EEE2"/>
+          </a:solidFill>
+          <a:ln w="12700">
+            <a:solidFill>
+              <a:srgbClr val="F6EEE2"/>
+            </a:solidFill>
+            <a:prstDash val="solid"/>
+          </a:ln>
+        </p:spPr>
+      </p:sp>
+      <p:sp>
+        <p:nvSpPr>
+          <p:cNvPr id="4" name="Shape 2"/>
+          <p:cNvSpPr/>
+          <p:nvPr/>
+        </p:nvSpPr>
+        <p:spPr>
+          <a:xfrm>
+            <a:off x="868680" y="1645920"/>
+            <a:ext cx="685800" cy="685800"/>
+          </a:xfrm>
+          <a:prstGeom prst="ellipse">
+            <a:avLst/>
+          </a:prstGeom>
+          <a:solidFill>
+            <a:srgbClr val="3B2418"/>
+          </a:solidFill>
+          <a:ln w="12700">
+            <a:solidFill>
+              <a:srgbClr val="3B2418"/>
+            </a:solidFill>
+            <a:prstDash val="solid"/>
+          </a:ln>
+        </p:spPr>
+      </p:sp>
+      <p:pic>
+        <p:nvPicPr>
+          <p:cNvPr id="5" name="Image 0" descr="preencoded.png">    </p:cNvPr>
+          <p:cNvPicPr>
+            <a:picLocks noChangeAspect="1"/>
+          </p:cNvPicPr>
+          <p:nvPr/>
+        </p:nvPicPr>
+        <p:blipFill>
+          <a:blip r:embed="rId1"/>
+          <a:stretch>
+            <a:fillRect/>
+          </a:stretch>
+        </p:blipFill>
+        <p:spPr>
+          <a:xfrm>
+            <a:off x="1040130" y="1817370"/>
+            <a:ext cx="342900" cy="342900"/>
+          </a:xfrm>
+          <a:prstGeom prst="rect">
+            <a:avLst/>
+          </a:prstGeom>
+        </p:spPr>
+      </p:pic>
+      <p:sp>
+        <p:nvSpPr>
+          <p:cNvPr id="6" name="Text 3"/>
+          <p:cNvSpPr txBox="1"/>
+          <p:nvPr/>
+        </p:nvSpPr>
+        <p:spPr>
+          <a:xfrm>
+            <a:off x="1737360" y="1645920"/>
+            <a:ext cx="3840480" cy="685800"/>
+          </a:xfrm>
+          <a:prstGeom prst="rect">
+            <a:avLst/>
+          </a:prstGeom>
+          <a:noFill/>
+          <a:ln/>
+        </p:spPr>
+        <p:txBody>
+          <a:bodyPr wrap="square" lIns="0" tIns="0" rIns="0" bIns="0" rtlCol="0" anchor="ctr"/>
+          <a:lstStyle/>
+          <a:p>
+            <a:pPr indent="0" marL="0">
+              <a:buNone/>
+            </a:pPr>
+            <a:r>
+              <a:rPr lang="en-US" sz="2200" b="1" dirty="0">
+                <a:solidFill>
+                  <a:srgbClr val="3B2418"/>
+                </a:solidFill>
+                <a:latin typeface="Cambria" pitchFamily="34" charset="0"/>
+                <a:ea typeface="Cambria" pitchFamily="34" charset="-122"/>
+                <a:cs typeface="Cambria" pitchFamily="34" charset="-120"/>
+              </a:rPr>
+              <a:t>Baker's tips</a:t>
+            </a:r>
+            <a:endParaRPr lang="en-US" sz="2200" dirty="0"/>
+          </a:p>
+        </p:txBody>
+      </p:sp>
+      <p:sp>
+        <p:nvSpPr>
+          <p:cNvPr id="7" name="Text 4"/>
+          <p:cNvSpPr txBox="1"/>
+          <p:nvPr/>
+        </p:nvSpPr>
+        <p:spPr>
+          <a:xfrm>
+            <a:off x="868680" y="2560320"/>
+            <a:ext cx="4663440" cy="3474720"/>
+          </a:xfrm>
+          <a:prstGeom prst="rect">
+            <a:avLst/>
+          </a:prstGeom>
+          <a:noFill/>
+          <a:ln/>
+        </p:spPr>
+        <p:txBody>
+          <a:bodyPr wrap="square" lIns="0" tIns="0" rIns="0" bIns="0" rtlCol="0" anchor="t"/>
+          <a:lstStyle/>
+          <a:p>
+            <a:pPr marL="342900" indent="-342900">
+              <a:spcAft>
+                <a:spcPts val="1000"/>
+              </a:spcAft>
+              <a:buSzPct val="100000"/>
+              <a:buChar char="•"/>
+            </a:pPr>
+            <a:r>
+              <a:rPr lang="en-US" sz="1500" dirty="0">
+                <a:solidFill>
+                  <a:srgbClr val="2A1D15"/>
+                </a:solidFill>
+                <a:latin typeface="Calibri" pitchFamily="34" charset="0"/>
+                <a:ea typeface="Calibri" pitchFamily="34" charset="-122"/>
+                <a:cs typeface="Calibri" pitchFamily="34" charset="-120"/>
+              </a:rPr>
+              <a:t>Watch the butter closely — it goes from brown to burnt in seconds.</a:t>
+            </a:r>
+            <a:endParaRPr lang="en-US" sz="1500" dirty="0"/>
+          </a:p>
+          <a:p>
+            <a:pPr marL="342900" indent="-342900">
+              <a:spcAft>
+                <a:spcPts val="1000"/>
+              </a:spcAft>
+              <a:buSzPct val="100000"/>
+              <a:buChar char="•"/>
+            </a:pPr>
+            <a:r>
+              <a:rPr lang="en-US" sz="1500" dirty="0">
+                <a:solidFill>
+                  <a:srgbClr val="2A1D15"/>
+                </a:solidFill>
+                <a:latin typeface="Calibri" pitchFamily="34" charset="0"/>
+                <a:ea typeface="Calibri" pitchFamily="34" charset="-122"/>
+                <a:cs typeface="Calibri" pitchFamily="34" charset="-120"/>
+              </a:rPr>
+              <a:t>Leftover yolks? Use them for crème brûlée or custard.</a:t>
+            </a:r>
+            <a:endParaRPr lang="en-US" sz="1500" dirty="0"/>
+          </a:p>
+          <a:p>
+            <a:pPr marL="342900" indent="-342900">
+              <a:spcAft>
+                <a:spcPts val="1000"/>
+              </a:spcAft>
+              <a:buSzPct val="100000"/>
+              <a:buChar char="•"/>
+            </a:pPr>
+            <a:r>
+              <a:rPr lang="en-US" sz="1500" dirty="0">
+                <a:solidFill>
+                  <a:srgbClr val="2A1D15"/>
+                </a:solidFill>
+                <a:latin typeface="Calibri" pitchFamily="34" charset="0"/>
+                <a:ea typeface="Calibri" pitchFamily="34" charset="-122"/>
+                <a:cs typeface="Calibri" pitchFamily="34" charset="-120"/>
+              </a:rPr>
+              <a:t>Don't overfill the moulds; the cakes puff up in the oven.</a:t>
+            </a:r>
+            <a:endParaRPr lang="en-US" sz="1500" dirty="0"/>
+          </a:p>
+          <a:p>
+            <a:pPr marL="342900" indent="-342900">
+              <a:spcAft>
+                <a:spcPts val="1000"/>
+              </a:spcAft>
+              <a:buSzPct val="100000"/>
+              <a:buChar char="•"/>
+            </a:pPr>
+            <a:r>
+              <a:rPr lang="en-US" sz="1500" dirty="0">
+                <a:solidFill>
+                  <a:srgbClr val="2A1D15"/>
+                </a:solidFill>
+                <a:latin typeface="Calibri" pitchFamily="34" charset="0"/>
+                <a:ea typeface="Calibri" pitchFamily="34" charset="-122"/>
+                <a:cs typeface="Calibri" pitchFamily="34" charset="-120"/>
+              </a:rPr>
+              <a:t>Store in an airtight box for 2–3 days, or freeze for a month.</a:t>
+            </a:r>
+            <a:endParaRPr lang="en-US" sz="1500" dirty="0"/>
+          </a:p>
+        </p:txBody>
+      </p:sp>
+      <p:sp>
+        <p:nvSpPr>
+          <p:cNvPr id="8" name="Shape 5"/>
+          <p:cNvSpPr/>
+          <p:nvPr/>
+        </p:nvSpPr>
+        <p:spPr>
+          <a:xfrm>
+            <a:off x="6309360" y="1463040"/>
+            <a:ext cx="822960" cy="822960"/>
+          </a:xfrm>
+          <a:prstGeom prst="ellipse">
+            <a:avLst/>
+          </a:prstGeom>
+          <a:solidFill>
+            <a:srgbClr val="C8963E"/>
+          </a:solidFill>
+          <a:ln w="12700">
+            <a:solidFill>
+              <a:srgbClr val="C8963E"/>
+            </a:solidFill>
+            <a:prstDash val="solid"/>
+          </a:ln>
+        </p:spPr>
+      </p:sp>
+      <p:pic>
+        <p:nvPicPr>
+          <p:cNvPr id="9" name="Image 1" descr="preencoded.png">    </p:cNvPr>
+          <p:cNvPicPr>
+            <a:picLocks noChangeAspect="1"/>
+          </p:cNvPicPr>
+          <p:nvPr/>
+        </p:nvPicPr>
+        <p:blipFill>
+          <a:blip r:embed="rId2"/>
+          <a:stretch>
+            <a:fillRect/>
+          </a:stretch>
+        </p:blipFill>
+        <p:spPr>
+          <a:xfrm>
+            <a:off x="6515100" y="1668780"/>
+            <a:ext cx="411480" cy="411480"/>
+          </a:xfrm>
+          <a:prstGeom prst="rect">
+            <a:avLst/>
+          </a:prstGeom>
+        </p:spPr>
+      </p:pic>
+      <p:sp>
+        <p:nvSpPr>
+          <p:cNvPr id="10" name="Text 6"/>
+          <p:cNvSpPr txBox="1"/>
+          <p:nvPr/>
+        </p:nvSpPr>
+        <p:spPr>
+          <a:xfrm>
+            <a:off x="7315200" y="1444752"/>
+            <a:ext cx="4297680" cy="411480"/>
+          </a:xfrm>
+          <a:prstGeom prst="rect">
+            <a:avLst/>
+          </a:prstGeom>
+          <a:noFill/>
+          <a:ln/>
+        </p:spPr>
+        <p:txBody>
+          <a:bodyPr wrap="square" lIns="0" tIns="0" rIns="0" bIns="0" rtlCol="0" anchor="ctr"/>
+          <a:lstStyle/>
+          <a:p>
+            <a:pPr indent="0" marL="0">
+              <a:buNone/>
+            </a:pPr>
+            <a:r>
+              <a:rPr lang="en-US" sz="1900" b="1" dirty="0">
+                <a:solidFill>
+                  <a:srgbClr val="3B2418"/>
+                </a:solidFill>
+                <a:latin typeface="Cambria" pitchFamily="34" charset="0"/>
+                <a:ea typeface="Cambria" pitchFamily="34" charset="-122"/>
+                <a:cs typeface="Cambria" pitchFamily="34" charset="-120"/>
+              </a:rPr>
+              <a:t>Raspberry</a:t>
+            </a:r>
+            <a:endParaRPr lang="en-US" sz="1900" dirty="0"/>
+          </a:p>
+        </p:txBody>
+      </p:sp>
+      <p:sp>
+        <p:nvSpPr>
+          <p:cNvPr id="11" name="Text 7"/>
+          <p:cNvSpPr txBox="1"/>
+          <p:nvPr/>
+        </p:nvSpPr>
+        <p:spPr>
+          <a:xfrm>
+            <a:off x="7315200" y="1847088"/>
+            <a:ext cx="4297680" cy="457200"/>
+          </a:xfrm>
+          <a:prstGeom prst="rect">
+            <a:avLst/>
+          </a:prstGeom>
+          <a:noFill/>
+          <a:ln/>
+        </p:spPr>
+        <p:txBody>
+          <a:bodyPr wrap="square" lIns="0" tIns="0" rIns="0" bIns="0" rtlCol="0" anchor="ctr"/>
+          <a:lstStyle/>
+          <a:p>
+            <a:pPr indent="0" marL="0">
+              <a:buNone/>
+            </a:pPr>
+            <a:r>
+              <a:rPr lang="en-US" sz="1400" dirty="0">
+                <a:solidFill>
+                  <a:srgbClr val="6E5A4B"/>
+                </a:solidFill>
+                <a:latin typeface="Calibri" pitchFamily="34" charset="0"/>
+                <a:ea typeface="Calibri" pitchFamily="34" charset="-122"/>
+                <a:cs typeface="Calibri" pitchFamily="34" charset="-120"/>
+              </a:rPr>
+              <a:t>A fresh raspberry pressed into each cake</a:t>
+            </a:r>
+            <a:endParaRPr lang="en-US" sz="1400" dirty="0"/>
+          </a:p>
+        </p:txBody>
+      </p:sp>
+      <p:sp>
+        <p:nvSpPr>
+          <p:cNvPr id="12" name="Shape 8"/>
+          <p:cNvSpPr/>
+          <p:nvPr/>
+        </p:nvSpPr>
+        <p:spPr>
+          <a:xfrm>
+            <a:off x="6309360" y="2697480"/>
+            <a:ext cx="822960" cy="822960"/>
+          </a:xfrm>
+          <a:prstGeom prst="ellipse">
+            <a:avLst/>
+          </a:prstGeom>
+          <a:solidFill>
+            <a:srgbClr val="C8963E"/>
+          </a:solidFill>
+          <a:ln w="12700">
+            <a:solidFill>
+              <a:srgbClr val="C8963E"/>
+            </a:solidFill>
+            <a:prstDash val="solid"/>
+          </a:ln>
+        </p:spPr>
+      </p:sp>
+      <p:pic>
+        <p:nvPicPr>
+          <p:cNvPr id="13" name="Image 2" descr="preencoded.png">    </p:cNvPr>
+          <p:cNvPicPr>
+            <a:picLocks noChangeAspect="1"/>
+          </p:cNvPicPr>
+          <p:nvPr/>
+        </p:nvPicPr>
+        <p:blipFill>
+          <a:blip r:embed="rId3"/>
+          <a:stretch>
+            <a:fillRect/>
+          </a:stretch>
+        </p:blipFill>
+        <p:spPr>
+          <a:xfrm>
+            <a:off x="6515100" y="2903220"/>
+            <a:ext cx="411480" cy="411480"/>
+          </a:xfrm>
+          <a:prstGeom prst="rect">
+            <a:avLst/>
+          </a:prstGeom>
+        </p:spPr>
+      </p:pic>
+      <p:sp>
+        <p:nvSpPr>
+          <p:cNvPr id="14" name="Text 9"/>
+          <p:cNvSpPr txBox="1"/>
+          <p:nvPr/>
+        </p:nvSpPr>
+        <p:spPr>
+          <a:xfrm>
+            <a:off x="7315200" y="2679192"/>
+            <a:ext cx="4297680" cy="411480"/>
+          </a:xfrm>
+          <a:prstGeom prst="rect">
+            <a:avLst/>
+          </a:prstGeom>
+          <a:noFill/>
+          <a:ln/>
+        </p:spPr>
+        <p:txBody>
+          <a:bodyPr wrap="square" lIns="0" tIns="0" rIns="0" bIns="0" rtlCol="0" anchor="ctr"/>
+          <a:lstStyle/>
+          <a:p>
+            <a:pPr indent="0" marL="0">
+              <a:buNone/>
+            </a:pPr>
+            <a:r>
+              <a:rPr lang="en-US" sz="1900" b="1" dirty="0">
+                <a:solidFill>
+                  <a:srgbClr val="3B2418"/>
+                </a:solidFill>
+                <a:latin typeface="Cambria" pitchFamily="34" charset="0"/>
+                <a:ea typeface="Cambria" pitchFamily="34" charset="-122"/>
+                <a:cs typeface="Cambria" pitchFamily="34" charset="-120"/>
+              </a:rPr>
+              <a:t>Chocolate</a:t>
+            </a:r>
+            <a:endParaRPr lang="en-US" sz="1900" dirty="0"/>
+          </a:p>
+        </p:txBody>
+      </p:sp>
+      <p:sp>
+        <p:nvSpPr>
+          <p:cNvPr id="15" name="Text 10"/>
+          <p:cNvSpPr txBox="1"/>
+          <p:nvPr/>
+        </p:nvSpPr>
+        <p:spPr>
+          <a:xfrm>
+            <a:off x="7315200" y="3081528"/>
+            <a:ext cx="4297680" cy="457200"/>
+          </a:xfrm>
+          <a:prstGeom prst="rect">
+            <a:avLst/>
+          </a:prstGeom>
+          <a:noFill/>
+          <a:ln/>
+        </p:spPr>
+        <p:txBody>
+          <a:bodyPr wrap="square" lIns="0" tIns="0" rIns="0" bIns="0" rtlCol="0" anchor="ctr"/>
+          <a:lstStyle/>
+          <a:p>
+            <a:pPr indent="0" marL="0">
+              <a:buNone/>
+            </a:pPr>
+            <a:r>
+              <a:rPr lang="en-US" sz="1400" dirty="0">
+                <a:solidFill>
+                  <a:srgbClr val="6E5A4B"/>
+                </a:solidFill>
+                <a:latin typeface="Calibri" pitchFamily="34" charset="0"/>
+                <a:ea typeface="Calibri" pitchFamily="34" charset="-122"/>
+                <a:cs typeface="Calibri" pitchFamily="34" charset="-120"/>
+              </a:rPr>
+              <a:t>Add cocoa powder or chocolate chips</a:t>
+            </a:r>
+            <a:endParaRPr lang="en-US" sz="1400" dirty="0"/>
+          </a:p>
+        </p:txBody>
+      </p:sp>
+      <p:sp>
+        <p:nvSpPr>
+          <p:cNvPr id="16" name="Shape 11"/>
+          <p:cNvSpPr/>
+          <p:nvPr/>
+        </p:nvSpPr>
+        <p:spPr>
+          <a:xfrm>
+            <a:off x="6309360" y="3931920"/>
+            <a:ext cx="822960" cy="822960"/>
+          </a:xfrm>
+          <a:prstGeom prst="ellipse">
+            <a:avLst/>
+          </a:prstGeom>
+          <a:solidFill>
+            <a:srgbClr val="C8963E"/>
+          </a:solidFill>
+          <a:ln w="12700">
+            <a:solidFill>
+              <a:srgbClr val="C8963E"/>
+            </a:solidFill>
+            <a:prstDash val="solid"/>
+          </a:ln>
+        </p:spPr>
+      </p:sp>
+      <p:pic>
+        <p:nvPicPr>
+          <p:cNvPr id="17" name="Image 3" descr="preencoded.png">    </p:cNvPr>
+          <p:cNvPicPr>
+            <a:picLocks noChangeAspect="1"/>
+          </p:cNvPicPr>
+          <p:nvPr/>
+        </p:nvPicPr>
+        <p:blipFill>
+          <a:blip r:embed="rId4"/>
+          <a:stretch>
+            <a:fillRect/>
+          </a:stretch>
+        </p:blipFill>
+        <p:spPr>
+          <a:xfrm>
+            <a:off x="6515100" y="4137660"/>
+            <a:ext cx="411480" cy="411480"/>
+          </a:xfrm>
+          <a:prstGeom prst="rect">
+            <a:avLst/>
+          </a:prstGeom>
+        </p:spPr>
+      </p:pic>
+      <p:sp>
+        <p:nvSpPr>
+          <p:cNvPr id="18" name="Text 12"/>
+          <p:cNvSpPr txBox="1"/>
+          <p:nvPr/>
+        </p:nvSpPr>
+        <p:spPr>
+          <a:xfrm>
+            <a:off x="7315200" y="3913632"/>
+            <a:ext cx="4297680" cy="411480"/>
+          </a:xfrm>
+          <a:prstGeom prst="rect">
+            <a:avLst/>
+          </a:prstGeom>
+          <a:noFill/>
+          <a:ln/>
+        </p:spPr>
+        <p:txBody>
+          <a:bodyPr wrap="square" lIns="0" tIns="0" rIns="0" bIns="0" rtlCol="0" anchor="ctr"/>
+          <a:lstStyle/>
+          <a:p>
+            <a:pPr indent="0" marL="0">
+              <a:buNone/>
+            </a:pPr>
+            <a:r>
+              <a:rPr lang="en-US" sz="1900" b="1" dirty="0">
+                <a:solidFill>
+                  <a:srgbClr val="3B2418"/>
+                </a:solidFill>
+                <a:latin typeface="Cambria" pitchFamily="34" charset="0"/>
+                <a:ea typeface="Cambria" pitchFamily="34" charset="-122"/>
+                <a:cs typeface="Cambria" pitchFamily="34" charset="-120"/>
+              </a:rPr>
+              <a:t>Pistachio or matcha</a:t>
+            </a:r>
+            <a:endParaRPr lang="en-US" sz="1900" dirty="0"/>
+          </a:p>
+        </p:txBody>
+      </p:sp>
+      <p:sp>
+        <p:nvSpPr>
+          <p:cNvPr id="19" name="Text 13"/>
+          <p:cNvSpPr txBox="1"/>
+          <p:nvPr/>
+        </p:nvSpPr>
+        <p:spPr>
+          <a:xfrm>
+            <a:off x="7315200" y="4315968"/>
+            <a:ext cx="4297680" cy="457200"/>
+          </a:xfrm>
+          <a:prstGeom prst="rect">
+            <a:avLst/>
+          </a:prstGeom>
+          <a:noFill/>
+          <a:ln/>
+        </p:spPr>
+        <p:txBody>
+          <a:bodyPr wrap="square" lIns="0" tIns="0" rIns="0" bIns="0" rtlCol="0" anchor="ctr"/>
+          <a:lstStyle/>
+          <a:p>
+            <a:pPr indent="0" marL="0">
+              <a:buNone/>
+            </a:pPr>
+            <a:r>
+              <a:rPr lang="en-US" sz="1400" dirty="0">
+                <a:solidFill>
+                  <a:srgbClr val="6E5A4B"/>
+                </a:solidFill>
+                <a:latin typeface="Calibri" pitchFamily="34" charset="0"/>
+                <a:ea typeface="Calibri" pitchFamily="34" charset="-122"/>
+                <a:cs typeface="Calibri" pitchFamily="34" charset="-120"/>
+              </a:rPr>
+              <a:t>Swap some almond flour for pistachio or add matcha</a:t>
+            </a:r>
+            <a:endParaRPr lang="en-US" sz="1400" dirty="0"/>
+          </a:p>
+        </p:txBody>
+      </p:sp>
+      <p:sp>
+        <p:nvSpPr>
+          <p:cNvPr id="20" name="Shape 14"/>
+          <p:cNvSpPr/>
+          <p:nvPr/>
+        </p:nvSpPr>
+        <p:spPr>
+          <a:xfrm>
+            <a:off x="6309360" y="5166360"/>
+            <a:ext cx="822960" cy="822960"/>
+          </a:xfrm>
+          <a:prstGeom prst="ellipse">
+            <a:avLst/>
+          </a:prstGeom>
+          <a:solidFill>
+            <a:srgbClr val="C8963E"/>
+          </a:solidFill>
+          <a:ln w="12700">
+            <a:solidFill>
+              <a:srgbClr val="C8963E"/>
+            </a:solidFill>
+            <a:prstDash val="solid"/>
+          </a:ln>
+        </p:spPr>
+      </p:sp>
+      <p:pic>
+        <p:nvPicPr>
+          <p:cNvPr id="21" name="Image 4" descr="preencoded.png">    </p:cNvPr>
+          <p:cNvPicPr>
+            <a:picLocks noChangeAspect="1"/>
+          </p:cNvPicPr>
+          <p:nvPr/>
+        </p:nvPicPr>
+        <p:blipFill>
+          <a:blip r:embed="rId5"/>
+          <a:stretch>
+            <a:fillRect/>
+          </a:stretch>
+        </p:blipFill>
+        <p:spPr>
+          <a:xfrm>
+            <a:off x="6515100" y="5372100"/>
+            <a:ext cx="411480" cy="411480"/>
+          </a:xfrm>
+          <a:prstGeom prst="rect">
+            <a:avLst/>
+          </a:prstGeom>
+        </p:spPr>
+      </p:pic>
+      <p:sp>
+        <p:nvSpPr>
+          <p:cNvPr id="22" name="Text 15"/>
+          <p:cNvSpPr txBox="1"/>
+          <p:nvPr/>
+        </p:nvSpPr>
+        <p:spPr>
+          <a:xfrm>
+            <a:off x="7315200" y="5148072"/>
+            <a:ext cx="4297680" cy="411480"/>
+          </a:xfrm>
+          <a:prstGeom prst="rect">
+            <a:avLst/>
+          </a:prstGeom>
+          <a:noFill/>
+          <a:ln/>
+        </p:spPr>
+        <p:txBody>
+          <a:bodyPr wrap="square" lIns="0" tIns="0" rIns="0" bIns="0" rtlCol="0" anchor="ctr"/>
+          <a:lstStyle/>
+          <a:p>
+            <a:pPr indent="0" marL="0">
+              <a:buNone/>
+            </a:pPr>
+            <a:r>
+              <a:rPr lang="en-US" sz="1900" b="1" dirty="0">
+                <a:solidFill>
+                  <a:srgbClr val="3B2418"/>
+                </a:solidFill>
+                <a:latin typeface="Cambria" pitchFamily="34" charset="0"/>
+                <a:ea typeface="Cambria" pitchFamily="34" charset="-122"/>
+                <a:cs typeface="Cambria" pitchFamily="34" charset="-120"/>
+              </a:rPr>
+              <a:t>Citrus</a:t>
+            </a:r>
+            <a:endParaRPr lang="en-US" sz="1900" dirty="0"/>
+          </a:p>
+        </p:txBody>
+      </p:sp>
+      <p:sp>
+        <p:nvSpPr>
+          <p:cNvPr id="23" name="Text 16"/>
+          <p:cNvSpPr txBox="1"/>
+          <p:nvPr/>
+        </p:nvSpPr>
+        <p:spPr>
+          <a:xfrm>
+            <a:off x="7315200" y="5550408"/>
+            <a:ext cx="4297680" cy="457200"/>
+          </a:xfrm>
+          <a:prstGeom prst="rect">
+            <a:avLst/>
+          </a:prstGeom>
+          <a:noFill/>
+          <a:ln/>
+        </p:spPr>
+        <p:txBody>
+          <a:bodyPr wrap="square" lIns="0" tIns="0" rIns="0" bIns="0" rtlCol="0" anchor="ctr"/>
+          <a:lstStyle/>
+          <a:p>
+            <a:pPr indent="0" marL="0">
+              <a:buNone/>
+            </a:pPr>
+            <a:r>
+              <a:rPr lang="en-US" sz="1400" dirty="0">
+                <a:solidFill>
+                  <a:srgbClr val="6E5A4B"/>
+                </a:solidFill>
+                <a:latin typeface="Calibri" pitchFamily="34" charset="0"/>
+                <a:ea typeface="Calibri" pitchFamily="34" charset="-122"/>
+                <a:cs typeface="Calibri" pitchFamily="34" charset="-120"/>
+              </a:rPr>
+              <a:t>Add lemon or orange zest to the batter</a:t>
+            </a:r>
+            <a:endParaRPr lang="en-US" sz="1400" dirty="0"/>
+          </a:p>
+        </p:txBody>
+      </p:sp>
+    </p:spTree>
+  </p:cSld>
+  <p:clrMapOvr>
+    <a:masterClrMapping/>
+  </p:clrMapOvr>
+</p:sld>
+</file>
+
+<file path=ppt/slides/slide11.xml><?xml version="1.0" encoding="utf-8"?>
+<p:sld xmlns:a="http://schemas.openxmlformats.org/drawingml/2006/main" xmlns:r="http://schemas.openxmlformats.org/officeDocument/2006/relationships" xmlns:p="http://schemas.openxmlformats.org/presentationml/2006/main">
+  <p:cSld name="Slide 11">
     <p:bg>
       <p:bgPr>
         <a:solidFill>
@@ -2008,131 +2738,62 @@
           <a:chExt cx="0" cy="0"/>
         </a:xfrm>
       </p:grpSpPr>
-      <p:sp>
-        <p:nvSpPr>
-          <p:cNvPr id="2" name="Shape 0"/>
+      <p:pic>
+        <p:nvPicPr>
+          <p:cNvPr id="2" name="Image 0" descr="financiers in a bakery window">    </p:cNvPr>
+          <p:cNvPicPr>
+            <a:picLocks noChangeAspect="1"/>
+          </p:cNvPicPr>
+          <p:nvPr/>
+        </p:nvPicPr>
+        <p:blipFill>
+          <a:blip r:embed="rId1"/>
+          <a:stretch>
+            <a:fillRect/>
+          </a:stretch>
+        </p:blipFill>
+        <p:spPr>
+          <a:xfrm>
+            <a:off x="0" y="0"/>
+            <a:ext cx="12191695" cy="6858000"/>
+          </a:xfrm>
+          <a:prstGeom prst="rect">
+            <a:avLst/>
+          </a:prstGeom>
+        </p:spPr>
+      </p:pic>
+      <p:sp>
+        <p:nvSpPr>
+          <p:cNvPr id="3" name="Shape 0"/>
           <p:cNvSpPr/>
           <p:nvPr/>
         </p:nvSpPr>
         <p:spPr>
           <a:xfrm>
-            <a:off x="4297680" y="1280160"/>
-            <a:ext cx="1645920" cy="640080"/>
-          </a:xfrm>
-          <a:prstGeom prst="roundRect">
-            <a:avLst>
-              <a:gd name="adj" fmla="val 11429"/>
-            </a:avLst>
+            <a:off x="0" y="0"/>
+            <a:ext cx="12191695" cy="6858000"/>
+          </a:xfrm>
+          <a:prstGeom prst="rect">
+            <a:avLst/>
           </a:prstGeom>
           <a:solidFill>
-            <a:srgbClr val="C8963E"/>
+            <a:srgbClr val="3B2418">
+              <a:alpha val="75000"/>
+            </a:srgbClr>
           </a:solidFill>
-          <a:ln w="19050">
+          <a:ln w="12700">
             <a:solidFill>
-              <a:srgbClr val="8A5A2B"/>
+              <a:srgbClr val="3B2418">
+                <a:alpha val="0"/>
+              </a:srgbClr>
             </a:solidFill>
             <a:prstDash val="solid"/>
           </a:ln>
-          <a:effectLst>
-            <a:outerShdw sx="100000" sy="100000" kx="0" ky="0" algn="bl" rotWithShape="0" blurRad="76200" dist="38100" dir="5400000">
-              <a:srgbClr val="000000">
-                <a:alpha val="35000"/>
-              </a:srgbClr>
-            </a:outerShdw>
-          </a:effectLst>
-        </p:spPr>
-      </p:sp>
-      <p:sp>
-        <p:nvSpPr>
-          <p:cNvPr id="3" name="Shape 1"/>
-          <p:cNvSpPr/>
-          <p:nvPr/>
-        </p:nvSpPr>
-        <p:spPr>
-          <a:xfrm>
-            <a:off x="4429354" y="1376172"/>
-            <a:ext cx="1382573" cy="224028"/>
-          </a:xfrm>
-          <a:prstGeom prst="roundRect">
-            <a:avLst>
-              <a:gd name="adj" fmla="val 20408"/>
-            </a:avLst>
-          </a:prstGeom>
-          <a:solidFill>
-            <a:srgbClr val="E0B566"/>
-          </a:solidFill>
-          <a:ln w="12700">
-            <a:solidFill>
-              <a:srgbClr val="E0B566"/>
-            </a:solidFill>
-            <a:prstDash val="solid"/>
-          </a:ln>
-        </p:spPr>
-      </p:sp>
-      <p:sp>
-        <p:nvSpPr>
-          <p:cNvPr id="4" name="Shape 2"/>
-          <p:cNvSpPr/>
-          <p:nvPr/>
-        </p:nvSpPr>
-        <p:spPr>
-          <a:xfrm>
-            <a:off x="6217920" y="1280160"/>
-            <a:ext cx="1645920" cy="640080"/>
-          </a:xfrm>
-          <a:prstGeom prst="roundRect">
-            <a:avLst>
-              <a:gd name="adj" fmla="val 11429"/>
-            </a:avLst>
-          </a:prstGeom>
-          <a:solidFill>
-            <a:srgbClr val="C8963E"/>
-          </a:solidFill>
-          <a:ln w="19050">
-            <a:solidFill>
-              <a:srgbClr val="8A5A2B"/>
-            </a:solidFill>
-            <a:prstDash val="solid"/>
-          </a:ln>
-          <a:effectLst>
-            <a:outerShdw sx="100000" sy="100000" kx="0" ky="0" algn="bl" rotWithShape="0" blurRad="76200" dist="38100" dir="5400000">
-              <a:srgbClr val="000000">
-                <a:alpha val="35000"/>
-              </a:srgbClr>
-            </a:outerShdw>
-          </a:effectLst>
-        </p:spPr>
-      </p:sp>
-      <p:sp>
-        <p:nvSpPr>
-          <p:cNvPr id="5" name="Shape 3"/>
-          <p:cNvSpPr/>
-          <p:nvPr/>
-        </p:nvSpPr>
-        <p:spPr>
-          <a:xfrm>
-            <a:off x="6349594" y="1376172"/>
-            <a:ext cx="1382573" cy="224028"/>
-          </a:xfrm>
-          <a:prstGeom prst="roundRect">
-            <a:avLst>
-              <a:gd name="adj" fmla="val 20408"/>
-            </a:avLst>
-          </a:prstGeom>
-          <a:solidFill>
-            <a:srgbClr val="E0B566"/>
-          </a:solidFill>
-          <a:ln w="12700">
-            <a:solidFill>
-              <a:srgbClr val="E0B566"/>
-            </a:solidFill>
-            <a:prstDash val="solid"/>
-          </a:ln>
-        </p:spPr>
-      </p:sp>
-      <p:sp>
-        <p:nvSpPr>
-          <p:cNvPr id="6" name="Text 4"/>
+        </p:spPr>
+      </p:sp>
+      <p:sp>
+        <p:nvSpPr>
+          <p:cNvPr id="4" name="Text 1"/>
           <p:cNvSpPr txBox="1"/>
           <p:nvPr/>
         </p:nvSpPr>
@@ -2171,7 +2832,7 @@
       </p:sp>
       <p:sp>
         <p:nvSpPr>
-          <p:cNvPr id="7" name="Text 5"/>
+          <p:cNvPr id="5" name="Text 2"/>
           <p:cNvSpPr txBox="1"/>
           <p:nvPr/>
         </p:nvSpPr>
@@ -2210,7 +2871,7 @@
       </p:sp>
       <p:sp>
         <p:nvSpPr>
-          <p:cNvPr id="8" name="Text 6"/>
+          <p:cNvPr id="6" name="Text 3"/>
           <p:cNvSpPr txBox="1"/>
           <p:nvPr/>
         </p:nvSpPr>
@@ -3097,6 +3758,398 @@
     <p:bg>
       <p:bgPr>
         <a:solidFill>
+          <a:srgbClr val="3B2418"/>
+        </a:solidFill>
+      </p:bgPr>
+    </p:bg>
+    <p:spTree>
+      <p:nvGrpSpPr>
+        <p:cNvPr id="1" name=""/>
+        <p:cNvGrpSpPr/>
+        <p:nvPr/>
+      </p:nvGrpSpPr>
+      <p:grpSpPr>
+        <a:xfrm>
+          <a:off x="0" y="0"/>
+          <a:ext cx="0" cy="0"/>
+          <a:chOff x="0" y="0"/>
+          <a:chExt cx="0" cy="0"/>
+        </a:xfrm>
+      </p:grpSpPr>
+      <p:sp>
+        <p:nvSpPr>
+          <p:cNvPr id="2" name="Text 0"/>
+          <p:cNvSpPr txBox="1"/>
+          <p:nvPr/>
+        </p:nvSpPr>
+        <p:spPr>
+          <a:xfrm>
+            <a:off x="548640" y="365760"/>
+            <a:ext cx="11064240" cy="731520"/>
+          </a:xfrm>
+          <a:prstGeom prst="rect">
+            <a:avLst/>
+          </a:prstGeom>
+          <a:noFill/>
+          <a:ln/>
+        </p:spPr>
+        <p:txBody>
+          <a:bodyPr wrap="square" lIns="0" tIns="0" rIns="0" bIns="0" rtlCol="0" anchor="ctr"/>
+          <a:lstStyle/>
+          <a:p>
+            <a:pPr indent="0" marL="0">
+              <a:buNone/>
+            </a:pPr>
+            <a:r>
+              <a:rPr lang="en-US" sz="3800" b="1" dirty="0">
+                <a:solidFill>
+                  <a:srgbClr val="FFFFFF"/>
+                </a:solidFill>
+                <a:latin typeface="Cambria" pitchFamily="34" charset="0"/>
+                <a:ea typeface="Cambria" pitchFamily="34" charset="-122"/>
+                <a:cs typeface="Cambria" pitchFamily="34" charset="-120"/>
+              </a:rPr>
+              <a:t>Where It Comes From</a:t>
+            </a:r>
+            <a:endParaRPr lang="en-US" sz="3800" dirty="0"/>
+          </a:p>
+        </p:txBody>
+      </p:sp>
+      <p:sp>
+        <p:nvSpPr>
+          <p:cNvPr id="3" name="Text 1"/>
+          <p:cNvSpPr txBox="1"/>
+          <p:nvPr/>
+        </p:nvSpPr>
+        <p:spPr>
+          <a:xfrm>
+            <a:off x="548640" y="1051560"/>
+            <a:ext cx="11064240" cy="411480"/>
+          </a:xfrm>
+          <a:prstGeom prst="rect">
+            <a:avLst/>
+          </a:prstGeom>
+          <a:noFill/>
+          <a:ln/>
+        </p:spPr>
+        <p:txBody>
+          <a:bodyPr wrap="square" lIns="0" tIns="0" rIns="0" bIns="0" rtlCol="0" anchor="ctr"/>
+          <a:lstStyle/>
+          <a:p>
+            <a:pPr indent="0" marL="0">
+              <a:buNone/>
+            </a:pPr>
+            <a:r>
+              <a:rPr lang="en-US" sz="1600" i="1" dirty="0">
+                <a:solidFill>
+                  <a:srgbClr val="C8963E"/>
+                </a:solidFill>
+                <a:latin typeface="Calibri" pitchFamily="34" charset="0"/>
+                <a:ea typeface="Calibri" pitchFamily="34" charset="-122"/>
+                <a:cs typeface="Calibri" pitchFamily="34" charset="-120"/>
+              </a:rPr>
+              <a:t>Two French cities shaped the financier</a:t>
+            </a:r>
+            <a:endParaRPr lang="en-US" sz="1600" dirty="0"/>
+          </a:p>
+        </p:txBody>
+      </p:sp>
+      <p:pic>
+        <p:nvPicPr>
+          <p:cNvPr id="4" name="Image 0" descr="Nancy, Lorraine (north-east France)">    </p:cNvPr>
+          <p:cNvPicPr>
+            <a:picLocks noChangeAspect="1"/>
+          </p:cNvPicPr>
+          <p:nvPr/>
+        </p:nvPicPr>
+        <p:blipFill>
+          <a:blip r:embed="rId1"/>
+          <a:stretch>
+            <a:fillRect/>
+          </a:stretch>
+        </p:blipFill>
+        <p:spPr>
+          <a:xfrm>
+            <a:off x="548640" y="1737360"/>
+            <a:ext cx="5394960" cy="3017520"/>
+          </a:xfrm>
+          <a:prstGeom prst="rect">
+            <a:avLst/>
+          </a:prstGeom>
+        </p:spPr>
+      </p:pic>
+      <p:sp>
+        <p:nvSpPr>
+          <p:cNvPr id="5" name="Text 2"/>
+          <p:cNvSpPr txBox="1"/>
+          <p:nvPr/>
+        </p:nvSpPr>
+        <p:spPr>
+          <a:xfrm>
+            <a:off x="548640" y="4828032"/>
+            <a:ext cx="5394960" cy="274320"/>
+          </a:xfrm>
+          <a:prstGeom prst="rect">
+            <a:avLst/>
+          </a:prstGeom>
+          <a:noFill/>
+          <a:ln/>
+        </p:spPr>
+        <p:txBody>
+          <a:bodyPr wrap="square" lIns="0" tIns="0" rIns="0" bIns="0" rtlCol="0" anchor="ctr"/>
+          <a:lstStyle/>
+          <a:p>
+            <a:pPr indent="0" marL="0">
+              <a:buNone/>
+            </a:pPr>
+            <a:r>
+              <a:rPr lang="en-US" sz="1100" i="1" dirty="0">
+                <a:solidFill>
+                  <a:srgbClr val="E8DCCB"/>
+                </a:solidFill>
+                <a:latin typeface="Calibri" pitchFamily="34" charset="0"/>
+                <a:ea typeface="Calibri" pitchFamily="34" charset="-122"/>
+                <a:cs typeface="Calibri" pitchFamily="34" charset="-120"/>
+              </a:rPr>
+              <a:t>Place Stanislas, Nancy</a:t>
+            </a:r>
+            <a:endParaRPr lang="en-US" sz="1100" dirty="0"/>
+          </a:p>
+        </p:txBody>
+      </p:sp>
+      <p:sp>
+        <p:nvSpPr>
+          <p:cNvPr id="6" name="Text 3"/>
+          <p:cNvSpPr txBox="1"/>
+          <p:nvPr/>
+        </p:nvSpPr>
+        <p:spPr>
+          <a:xfrm>
+            <a:off x="548640" y="5120640"/>
+            <a:ext cx="5394960" cy="411480"/>
+          </a:xfrm>
+          <a:prstGeom prst="rect">
+            <a:avLst/>
+          </a:prstGeom>
+          <a:noFill/>
+          <a:ln/>
+        </p:spPr>
+        <p:txBody>
+          <a:bodyPr wrap="square" lIns="0" tIns="0" rIns="0" bIns="0" rtlCol="0" anchor="ctr"/>
+          <a:lstStyle/>
+          <a:p>
+            <a:pPr indent="0" marL="0">
+              <a:buNone/>
+            </a:pPr>
+            <a:r>
+              <a:rPr lang="en-US" sz="2000" b="1" dirty="0">
+                <a:solidFill>
+                  <a:srgbClr val="C8963E"/>
+                </a:solidFill>
+                <a:latin typeface="Cambria" pitchFamily="34" charset="0"/>
+                <a:ea typeface="Cambria" pitchFamily="34" charset="-122"/>
+                <a:cs typeface="Cambria" pitchFamily="34" charset="-120"/>
+              </a:rPr>
+              <a:t>Nancy, Lorraine (north-east France)</a:t>
+            </a:r>
+            <a:endParaRPr lang="en-US" sz="2000" dirty="0"/>
+          </a:p>
+        </p:txBody>
+      </p:sp>
+      <p:sp>
+        <p:nvSpPr>
+          <p:cNvPr id="7" name="Text 4"/>
+          <p:cNvSpPr txBox="1"/>
+          <p:nvPr/>
+        </p:nvSpPr>
+        <p:spPr>
+          <a:xfrm>
+            <a:off x="548640" y="5577840"/>
+            <a:ext cx="5394960" cy="731520"/>
+          </a:xfrm>
+          <a:prstGeom prst="rect">
+            <a:avLst/>
+          </a:prstGeom>
+          <a:noFill/>
+          <a:ln/>
+        </p:spPr>
+        <p:txBody>
+          <a:bodyPr wrap="square" lIns="0" tIns="0" rIns="0" bIns="0" rtlCol="0" anchor="t"/>
+          <a:lstStyle/>
+          <a:p>
+            <a:pPr indent="0" marL="0">
+              <a:buNone/>
+            </a:pPr>
+            <a:r>
+              <a:rPr lang="en-US" sz="1400" dirty="0">
+                <a:solidFill>
+                  <a:srgbClr val="FFFFFF"/>
+                </a:solidFill>
+                <a:latin typeface="Calibri" pitchFamily="34" charset="0"/>
+                <a:ea typeface="Calibri" pitchFamily="34" charset="-122"/>
+                <a:cs typeface="Calibri" pitchFamily="34" charset="-120"/>
+              </a:rPr>
+              <a:t>Birthplace of the visitandine, the almond cake baked by Visitation nuns in the 1600s.</a:t>
+            </a:r>
+            <a:endParaRPr lang="en-US" sz="1400" dirty="0"/>
+          </a:p>
+        </p:txBody>
+      </p:sp>
+      <p:pic>
+        <p:nvPicPr>
+          <p:cNvPr id="8" name="Image 1" descr="Paris — the Bourse">    </p:cNvPr>
+          <p:cNvPicPr>
+            <a:picLocks noChangeAspect="1"/>
+          </p:cNvPicPr>
+          <p:nvPr/>
+        </p:nvPicPr>
+        <p:blipFill>
+          <a:blip r:embed="rId2"/>
+          <a:stretch>
+            <a:fillRect/>
+          </a:stretch>
+        </p:blipFill>
+        <p:spPr>
+          <a:xfrm>
+            <a:off x="6217920" y="1737360"/>
+            <a:ext cx="5394960" cy="3017520"/>
+          </a:xfrm>
+          <a:prstGeom prst="rect">
+            <a:avLst/>
+          </a:prstGeom>
+        </p:spPr>
+      </p:pic>
+      <p:sp>
+        <p:nvSpPr>
+          <p:cNvPr id="9" name="Text 5"/>
+          <p:cNvSpPr txBox="1"/>
+          <p:nvPr/>
+        </p:nvSpPr>
+        <p:spPr>
+          <a:xfrm>
+            <a:off x="6217920" y="4828032"/>
+            <a:ext cx="5394960" cy="274320"/>
+          </a:xfrm>
+          <a:prstGeom prst="rect">
+            <a:avLst/>
+          </a:prstGeom>
+          <a:noFill/>
+          <a:ln/>
+        </p:spPr>
+        <p:txBody>
+          <a:bodyPr wrap="square" lIns="0" tIns="0" rIns="0" bIns="0" rtlCol="0" anchor="ctr"/>
+          <a:lstStyle/>
+          <a:p>
+            <a:pPr indent="0" marL="0">
+              <a:buNone/>
+            </a:pPr>
+            <a:r>
+              <a:rPr lang="en-US" sz="1100" i="1" dirty="0">
+                <a:solidFill>
+                  <a:srgbClr val="E8DCCB"/>
+                </a:solidFill>
+                <a:latin typeface="Calibri" pitchFamily="34" charset="0"/>
+                <a:ea typeface="Calibri" pitchFamily="34" charset="-122"/>
+                <a:cs typeface="Calibri" pitchFamily="34" charset="-120"/>
+              </a:rPr>
+              <a:t>Palais Brongniart, the old Paris stock exchange</a:t>
+            </a:r>
+            <a:endParaRPr lang="en-US" sz="1100" dirty="0"/>
+          </a:p>
+        </p:txBody>
+      </p:sp>
+      <p:sp>
+        <p:nvSpPr>
+          <p:cNvPr id="10" name="Text 6"/>
+          <p:cNvSpPr txBox="1"/>
+          <p:nvPr/>
+        </p:nvSpPr>
+        <p:spPr>
+          <a:xfrm>
+            <a:off x="6217920" y="5120640"/>
+            <a:ext cx="5394960" cy="411480"/>
+          </a:xfrm>
+          <a:prstGeom prst="rect">
+            <a:avLst/>
+          </a:prstGeom>
+          <a:noFill/>
+          <a:ln/>
+        </p:spPr>
+        <p:txBody>
+          <a:bodyPr wrap="square" lIns="0" tIns="0" rIns="0" bIns="0" rtlCol="0" anchor="ctr"/>
+          <a:lstStyle/>
+          <a:p>
+            <a:pPr indent="0" marL="0">
+              <a:buNone/>
+            </a:pPr>
+            <a:r>
+              <a:rPr lang="en-US" sz="2000" b="1" dirty="0">
+                <a:solidFill>
+                  <a:srgbClr val="C8963E"/>
+                </a:solidFill>
+                <a:latin typeface="Cambria" pitchFamily="34" charset="0"/>
+                <a:ea typeface="Cambria" pitchFamily="34" charset="-122"/>
+                <a:cs typeface="Cambria" pitchFamily="34" charset="-120"/>
+              </a:rPr>
+              <a:t>Paris — the Bourse</a:t>
+            </a:r>
+            <a:endParaRPr lang="en-US" sz="2000" dirty="0"/>
+          </a:p>
+        </p:txBody>
+      </p:sp>
+      <p:sp>
+        <p:nvSpPr>
+          <p:cNvPr id="11" name="Text 7"/>
+          <p:cNvSpPr txBox="1"/>
+          <p:nvPr/>
+        </p:nvSpPr>
+        <p:spPr>
+          <a:xfrm>
+            <a:off x="6217920" y="5577840"/>
+            <a:ext cx="5394960" cy="731520"/>
+          </a:xfrm>
+          <a:prstGeom prst="rect">
+            <a:avLst/>
+          </a:prstGeom>
+          <a:noFill/>
+          <a:ln/>
+        </p:spPr>
+        <p:txBody>
+          <a:bodyPr wrap="square" lIns="0" tIns="0" rIns="0" bIns="0" rtlCol="0" anchor="t"/>
+          <a:lstStyle/>
+          <a:p>
+            <a:pPr indent="0" marL="0">
+              <a:buNone/>
+            </a:pPr>
+            <a:r>
+              <a:rPr lang="en-US" sz="1400" dirty="0">
+                <a:solidFill>
+                  <a:srgbClr val="FFFFFF"/>
+                </a:solidFill>
+                <a:latin typeface="Calibri" pitchFamily="34" charset="0"/>
+                <a:ea typeface="Calibri" pitchFamily="34" charset="-122"/>
+                <a:cs typeface="Calibri" pitchFamily="34" charset="-120"/>
+              </a:rPr>
+              <a:t>Where chef Lasne sold the gold-bar-shaped cakes to bankers around 1890.</a:t>
+            </a:r>
+            <a:endParaRPr lang="en-US" sz="1400" dirty="0"/>
+          </a:p>
+        </p:txBody>
+      </p:sp>
+    </p:spTree>
+  </p:cSld>
+  <p:clrMapOvr>
+    <a:masterClrMapping/>
+  </p:clrMapOvr>
+</p:sld>
+</file>
+
+<file path=ppt/slides/slide4.xml><?xml version="1.0" encoding="utf-8"?>
+<p:sld xmlns:a="http://schemas.openxmlformats.org/drawingml/2006/main" xmlns:r="http://schemas.openxmlformats.org/officeDocument/2006/relationships" xmlns:p="http://schemas.openxmlformats.org/presentationml/2006/main">
+  <p:cSld name="Slide 4">
+    <p:bg>
+      <p:bgPr>
+        <a:solidFill>
           <a:srgbClr val="FFFFFF"/>
         </a:solidFill>
       </p:bgPr>
@@ -3201,12 +4254,12 @@
         </p:nvSpPr>
         <p:spPr>
           <a:xfrm>
-            <a:off x="548640" y="1783080"/>
-            <a:ext cx="3520440" cy="2148840"/>
+            <a:off x="548640" y="1737360"/>
+            <a:ext cx="3520440" cy="1371600"/>
           </a:xfrm>
           <a:prstGeom prst="roundRect">
             <a:avLst>
-              <a:gd name="adj" fmla="val 5106"/>
+              <a:gd name="adj" fmla="val 8000"/>
             </a:avLst>
           </a:prstGeom>
           <a:solidFill>
@@ -3228,8 +4281,8 @@
         </p:nvSpPr>
         <p:spPr>
           <a:xfrm>
-            <a:off x="822960" y="2057400"/>
-            <a:ext cx="685800" cy="685800"/>
+            <a:off x="731520" y="1920240"/>
+            <a:ext cx="548640" cy="548640"/>
           </a:xfrm>
           <a:prstGeom prst="ellipse">
             <a:avLst/>
@@ -3261,8 +4314,8 @@
         </p:blipFill>
         <p:spPr>
           <a:xfrm>
-            <a:off x="994410" y="2228850"/>
-            <a:ext cx="342900" cy="342900"/>
+            <a:off x="868680" y="2057400"/>
+            <a:ext cx="274320" cy="274320"/>
           </a:xfrm>
           <a:prstGeom prst="rect">
             <a:avLst/>
@@ -3277,8 +4330,8 @@
         </p:nvSpPr>
         <p:spPr>
           <a:xfrm>
-            <a:off x="1691640" y="2057400"/>
-            <a:ext cx="2194560" cy="685800"/>
+            <a:off x="1417320" y="1920240"/>
+            <a:ext cx="2514600" cy="548640"/>
           </a:xfrm>
           <a:prstGeom prst="rect">
             <a:avLst/>
@@ -3294,7 +4347,7 @@
               <a:buNone/>
             </a:pPr>
             <a:r>
-              <a:rPr lang="en-US" sz="1900" b="1" dirty="0">
+              <a:rPr lang="en-US" sz="1700" b="1" dirty="0">
                 <a:solidFill>
                   <a:srgbClr val="3B2418"/>
                 </a:solidFill>
@@ -3304,7 +4357,7 @@
               </a:rPr>
               <a:t>Le goûter</a:t>
             </a:r>
-            <a:endParaRPr lang="en-US" sz="1900" dirty="0"/>
+            <a:endParaRPr lang="en-US" sz="1700" dirty="0"/>
           </a:p>
         </p:txBody>
       </p:sp>
@@ -3316,8 +4369,8 @@
         </p:nvSpPr>
         <p:spPr>
           <a:xfrm>
-            <a:off x="822960" y="2880360"/>
-            <a:ext cx="2971800" cy="914400"/>
+            <a:off x="731520" y="2514600"/>
+            <a:ext cx="3154680" cy="548640"/>
           </a:xfrm>
           <a:prstGeom prst="rect">
             <a:avLst/>
@@ -3333,7 +4386,7 @@
               <a:buNone/>
             </a:pPr>
             <a:r>
-              <a:rPr lang="en-US" sz="1400" dirty="0">
+              <a:rPr lang="en-US" sz="1200" dirty="0">
                 <a:solidFill>
                   <a:srgbClr val="2A1D15"/>
                 </a:solidFill>
@@ -3343,7 +4396,7 @@
               </a:rPr>
               <a:t>The 4 o'clock afternoon snack — especially popular with children after school.</a:t>
             </a:r>
-            <a:endParaRPr lang="en-US" sz="1400" dirty="0"/>
+            <a:endParaRPr lang="en-US" sz="1200" dirty="0"/>
           </a:p>
         </p:txBody>
       </p:sp>
@@ -3355,12 +4408,12 @@
         </p:nvSpPr>
         <p:spPr>
           <a:xfrm>
-            <a:off x="4325112" y="1783080"/>
-            <a:ext cx="3520440" cy="2148840"/>
+            <a:off x="4297680" y="1737360"/>
+            <a:ext cx="3520440" cy="1371600"/>
           </a:xfrm>
           <a:prstGeom prst="roundRect">
             <a:avLst>
-              <a:gd name="adj" fmla="val 5106"/>
+              <a:gd name="adj" fmla="val 8000"/>
             </a:avLst>
           </a:prstGeom>
           <a:solidFill>
@@ -3382,8 +4435,8 @@
         </p:nvSpPr>
         <p:spPr>
           <a:xfrm>
-            <a:off x="4599432" y="2057400"/>
-            <a:ext cx="685800" cy="685800"/>
+            <a:off x="4480560" y="1920240"/>
+            <a:ext cx="548640" cy="548640"/>
           </a:xfrm>
           <a:prstGeom prst="ellipse">
             <a:avLst/>
@@ -3415,8 +4468,8 @@
         </p:blipFill>
         <p:spPr>
           <a:xfrm>
-            <a:off x="4770882" y="2228850"/>
-            <a:ext cx="342900" cy="342900"/>
+            <a:off x="4617720" y="2057400"/>
+            <a:ext cx="274320" cy="274320"/>
           </a:xfrm>
           <a:prstGeom prst="rect">
             <a:avLst/>
@@ -3431,8 +4484,8 @@
         </p:nvSpPr>
         <p:spPr>
           <a:xfrm>
-            <a:off x="5468112" y="2057400"/>
-            <a:ext cx="2194560" cy="685800"/>
+            <a:off x="5166360" y="1920240"/>
+            <a:ext cx="2514600" cy="548640"/>
           </a:xfrm>
           <a:prstGeom prst="rect">
             <a:avLst/>
@@ -3448,7 +4501,7 @@
               <a:buNone/>
             </a:pPr>
             <a:r>
-              <a:rPr lang="en-US" sz="1900" b="1" dirty="0">
+              <a:rPr lang="en-US" sz="1700" b="1" dirty="0">
                 <a:solidFill>
                   <a:srgbClr val="3B2418"/>
                 </a:solidFill>
@@ -3458,7 +4511,7 @@
               </a:rPr>
               <a:t>With coffee or tea</a:t>
             </a:r>
-            <a:endParaRPr lang="en-US" sz="1900" dirty="0"/>
+            <a:endParaRPr lang="en-US" sz="1700" dirty="0"/>
           </a:p>
         </p:txBody>
       </p:sp>
@@ -3470,8 +4523,8 @@
         </p:nvSpPr>
         <p:spPr>
           <a:xfrm>
-            <a:off x="4599432" y="2880360"/>
-            <a:ext cx="2971800" cy="914400"/>
+            <a:off x="4480560" y="2514600"/>
+            <a:ext cx="3154680" cy="548640"/>
           </a:xfrm>
           <a:prstGeom prst="rect">
             <a:avLst/>
@@ -3487,7 +4540,7 @@
               <a:buNone/>
             </a:pPr>
             <a:r>
-              <a:rPr lang="en-US" sz="1400" dirty="0">
+              <a:rPr lang="en-US" sz="1200" dirty="0">
                 <a:solidFill>
                   <a:srgbClr val="2A1D15"/>
                 </a:solidFill>
@@ -3497,7 +4550,7 @@
               </a:rPr>
               <a:t>Served alongside an espresso or a cup of tea in cafés and at home.</a:t>
             </a:r>
-            <a:endParaRPr lang="en-US" sz="1400" dirty="0"/>
+            <a:endParaRPr lang="en-US" sz="1200" dirty="0"/>
           </a:p>
         </p:txBody>
       </p:sp>
@@ -3509,12 +4562,12 @@
         </p:nvSpPr>
         <p:spPr>
           <a:xfrm>
-            <a:off x="8101584" y="1783080"/>
-            <a:ext cx="3520440" cy="2148840"/>
+            <a:off x="548640" y="3291840"/>
+            <a:ext cx="3520440" cy="1371600"/>
           </a:xfrm>
           <a:prstGeom prst="roundRect">
             <a:avLst>
-              <a:gd name="adj" fmla="val 5106"/>
+              <a:gd name="adj" fmla="val 8000"/>
             </a:avLst>
           </a:prstGeom>
           <a:solidFill>
@@ -3536,8 +4589,8 @@
         </p:nvSpPr>
         <p:spPr>
           <a:xfrm>
-            <a:off x="8375904" y="2057400"/>
-            <a:ext cx="685800" cy="685800"/>
+            <a:off x="731520" y="3474720"/>
+            <a:ext cx="548640" cy="548640"/>
           </a:xfrm>
           <a:prstGeom prst="ellipse">
             <a:avLst/>
@@ -3569,8 +4622,8 @@
         </p:blipFill>
         <p:spPr>
           <a:xfrm>
-            <a:off x="8547354" y="2228850"/>
-            <a:ext cx="342900" cy="342900"/>
+            <a:off x="868680" y="3611880"/>
+            <a:ext cx="274320" cy="274320"/>
           </a:xfrm>
           <a:prstGeom prst="rect">
             <a:avLst/>
@@ -3585,8 +4638,8 @@
         </p:nvSpPr>
         <p:spPr>
           <a:xfrm>
-            <a:off x="9244584" y="2057400"/>
-            <a:ext cx="2194560" cy="685800"/>
+            <a:off x="1417320" y="3474720"/>
+            <a:ext cx="2514600" cy="548640"/>
           </a:xfrm>
           <a:prstGeom prst="rect">
             <a:avLst/>
@@ -3602,7 +4655,7 @@
               <a:buNone/>
             </a:pPr>
             <a:r>
-              <a:rPr lang="en-US" sz="1900" b="1" dirty="0">
+              <a:rPr lang="en-US" sz="1700" b="1" dirty="0">
                 <a:solidFill>
                   <a:srgbClr val="3B2418"/>
                 </a:solidFill>
@@ -3612,7 +4665,7 @@
               </a:rPr>
               <a:t>Petits fours</a:t>
             </a:r>
-            <a:endParaRPr lang="en-US" sz="1900" dirty="0"/>
+            <a:endParaRPr lang="en-US" sz="1700" dirty="0"/>
           </a:p>
         </p:txBody>
       </p:sp>
@@ -3624,8 +4677,8 @@
         </p:nvSpPr>
         <p:spPr>
           <a:xfrm>
-            <a:off x="8375904" y="2880360"/>
-            <a:ext cx="2971800" cy="914400"/>
+            <a:off x="731520" y="4069080"/>
+            <a:ext cx="3154680" cy="548640"/>
           </a:xfrm>
           <a:prstGeom prst="rect">
             <a:avLst/>
@@ -3641,7 +4694,7 @@
               <a:buNone/>
             </a:pPr>
             <a:r>
-              <a:rPr lang="en-US" sz="1400" dirty="0">
+              <a:rPr lang="en-US" sz="1200" dirty="0">
                 <a:solidFill>
                   <a:srgbClr val="2A1D15"/>
                 </a:solidFill>
@@ -3651,7 +4704,7 @@
               </a:rPr>
               <a:t>Part of the tray of mignardises (tiny sweets) served at the end of a restaurant meal.</a:t>
             </a:r>
-            <a:endParaRPr lang="en-US" sz="1400" dirty="0"/>
+            <a:endParaRPr lang="en-US" sz="1200" dirty="0"/>
           </a:p>
         </p:txBody>
       </p:sp>
@@ -3663,12 +4716,12 @@
         </p:nvSpPr>
         <p:spPr>
           <a:xfrm>
-            <a:off x="548640" y="4206240"/>
-            <a:ext cx="3520440" cy="2148840"/>
+            <a:off x="4297680" y="3291840"/>
+            <a:ext cx="3520440" cy="1371600"/>
           </a:xfrm>
           <a:prstGeom prst="roundRect">
             <a:avLst>
-              <a:gd name="adj" fmla="val 5106"/>
+              <a:gd name="adj" fmla="val 8000"/>
             </a:avLst>
           </a:prstGeom>
           <a:solidFill>
@@ -3690,8 +4743,8 @@
         </p:nvSpPr>
         <p:spPr>
           <a:xfrm>
-            <a:off x="822960" y="4480560"/>
-            <a:ext cx="685800" cy="685800"/>
+            <a:off x="4480560" y="3474720"/>
+            <a:ext cx="548640" cy="548640"/>
           </a:xfrm>
           <a:prstGeom prst="ellipse">
             <a:avLst/>
@@ -3723,8 +4776,8 @@
         </p:blipFill>
         <p:spPr>
           <a:xfrm>
-            <a:off x="994410" y="4652010"/>
-            <a:ext cx="342900" cy="342900"/>
+            <a:off x="4617720" y="3611880"/>
+            <a:ext cx="274320" cy="274320"/>
           </a:xfrm>
           <a:prstGeom prst="rect">
             <a:avLst/>
@@ -3739,8 +4792,8 @@
         </p:nvSpPr>
         <p:spPr>
           <a:xfrm>
-            <a:off x="1691640" y="4480560"/>
-            <a:ext cx="2194560" cy="685800"/>
+            <a:off x="5166360" y="3474720"/>
+            <a:ext cx="2514600" cy="548640"/>
           </a:xfrm>
           <a:prstGeom prst="rect">
             <a:avLst/>
@@ -3756,7 +4809,7 @@
               <a:buNone/>
             </a:pPr>
             <a:r>
-              <a:rPr lang="en-US" sz="1900" b="1" dirty="0">
+              <a:rPr lang="en-US" sz="1700" b="1" dirty="0">
                 <a:solidFill>
                   <a:srgbClr val="3B2418"/>
                 </a:solidFill>
@@ -3766,7 +4819,7 @@
               </a:rPr>
               <a:t>Gifts &amp; celebrations</a:t>
             </a:r>
-            <a:endParaRPr lang="en-US" sz="1900" dirty="0"/>
+            <a:endParaRPr lang="en-US" sz="1700" dirty="0"/>
           </a:p>
         </p:txBody>
       </p:sp>
@@ -3778,8 +4831,8 @@
         </p:nvSpPr>
         <p:spPr>
           <a:xfrm>
-            <a:off x="822960" y="5303520"/>
-            <a:ext cx="2971800" cy="914400"/>
+            <a:off x="4480560" y="4069080"/>
+            <a:ext cx="3154680" cy="548640"/>
           </a:xfrm>
           <a:prstGeom prst="rect">
             <a:avLst/>
@@ -3795,7 +4848,7 @@
               <a:buNone/>
             </a:pPr>
             <a:r>
-              <a:rPr lang="en-US" sz="1400" dirty="0">
+              <a:rPr lang="en-US" sz="1200" dirty="0">
                 <a:solidFill>
                   <a:srgbClr val="2A1D15"/>
                 </a:solidFill>
@@ -3805,7 +4858,7 @@
               </a:rPr>
               <a:t>Boxed as gifts, served at parties, weddings and buffets.</a:t>
             </a:r>
-            <a:endParaRPr lang="en-US" sz="1400" dirty="0"/>
+            <a:endParaRPr lang="en-US" sz="1200" dirty="0"/>
           </a:p>
         </p:txBody>
       </p:sp>
@@ -3817,12 +4870,12 @@
         </p:nvSpPr>
         <p:spPr>
           <a:xfrm>
-            <a:off x="4325112" y="4206240"/>
-            <a:ext cx="3520440" cy="2148840"/>
+            <a:off x="548640" y="4846320"/>
+            <a:ext cx="3520440" cy="1371600"/>
           </a:xfrm>
           <a:prstGeom prst="roundRect">
             <a:avLst>
-              <a:gd name="adj" fmla="val 5106"/>
+              <a:gd name="adj" fmla="val 8000"/>
             </a:avLst>
           </a:prstGeom>
           <a:solidFill>
@@ -3844,8 +4897,8 @@
         </p:nvSpPr>
         <p:spPr>
           <a:xfrm>
-            <a:off x="4599432" y="4480560"/>
-            <a:ext cx="685800" cy="685800"/>
+            <a:off x="731520" y="5029200"/>
+            <a:ext cx="548640" cy="548640"/>
           </a:xfrm>
           <a:prstGeom prst="ellipse">
             <a:avLst/>
@@ -3877,8 +4930,8 @@
         </p:blipFill>
         <p:spPr>
           <a:xfrm>
-            <a:off x="4770882" y="4652010"/>
-            <a:ext cx="342900" cy="342900"/>
+            <a:off x="868680" y="5166360"/>
+            <a:ext cx="274320" cy="274320"/>
           </a:xfrm>
           <a:prstGeom prst="rect">
             <a:avLst/>
@@ -3893,8 +4946,8 @@
         </p:nvSpPr>
         <p:spPr>
           <a:xfrm>
-            <a:off x="5468112" y="4480560"/>
-            <a:ext cx="2194560" cy="685800"/>
+            <a:off x="1417320" y="5029200"/>
+            <a:ext cx="2514600" cy="548640"/>
           </a:xfrm>
           <a:prstGeom prst="rect">
             <a:avLst/>
@@ -3910,7 +4963,7 @@
               <a:buNone/>
             </a:pPr>
             <a:r>
-              <a:rPr lang="en-US" sz="1900" b="1" dirty="0">
+              <a:rPr lang="en-US" sz="1700" b="1" dirty="0">
                 <a:solidFill>
                   <a:srgbClr val="3B2418"/>
                 </a:solidFill>
@@ -3920,7 +4973,7 @@
               </a:rPr>
               <a:t>On the go</a:t>
             </a:r>
-            <a:endParaRPr lang="en-US" sz="1900" dirty="0"/>
+            <a:endParaRPr lang="en-US" sz="1700" dirty="0"/>
           </a:p>
         </p:txBody>
       </p:sp>
@@ -3932,8 +4985,8 @@
         </p:nvSpPr>
         <p:spPr>
           <a:xfrm>
-            <a:off x="4599432" y="5303520"/>
-            <a:ext cx="2971800" cy="914400"/>
+            <a:off x="731520" y="5623560"/>
+            <a:ext cx="3154680" cy="548640"/>
           </a:xfrm>
           <a:prstGeom prst="rect">
             <a:avLst/>
@@ -3949,7 +5002,7 @@
               <a:buNone/>
             </a:pPr>
             <a:r>
-              <a:rPr lang="en-US" sz="1400" dirty="0">
+              <a:rPr lang="en-US" sz="1200" dirty="0">
                 <a:solidFill>
                   <a:srgbClr val="2A1D15"/>
                 </a:solidFill>
@@ -3959,7 +5012,7 @@
               </a:rPr>
               <a:t>Bought from a boulangerie and eaten by hand — no plate or fork needed.</a:t>
             </a:r>
-            <a:endParaRPr lang="en-US" sz="1400" dirty="0"/>
+            <a:endParaRPr lang="en-US" sz="1200" dirty="0"/>
           </a:p>
         </p:txBody>
       </p:sp>
@@ -3971,12 +5024,12 @@
         </p:nvSpPr>
         <p:spPr>
           <a:xfrm>
-            <a:off x="8101584" y="4206240"/>
-            <a:ext cx="3520440" cy="2148840"/>
+            <a:off x="4297680" y="4846320"/>
+            <a:ext cx="3520440" cy="1371600"/>
           </a:xfrm>
           <a:prstGeom prst="roundRect">
             <a:avLst>
-              <a:gd name="adj" fmla="val 5106"/>
+              <a:gd name="adj" fmla="val 8000"/>
             </a:avLst>
           </a:prstGeom>
           <a:solidFill>
@@ -3998,8 +5051,8 @@
         </p:nvSpPr>
         <p:spPr>
           <a:xfrm>
-            <a:off x="8375904" y="4480560"/>
-            <a:ext cx="685800" cy="685800"/>
+            <a:off x="4480560" y="5029200"/>
+            <a:ext cx="548640" cy="548640"/>
           </a:xfrm>
           <a:prstGeom prst="ellipse">
             <a:avLst/>
@@ -4031,8 +5084,8 @@
         </p:blipFill>
         <p:spPr>
           <a:xfrm>
-            <a:off x="8547354" y="4652010"/>
-            <a:ext cx="342900" cy="342900"/>
+            <a:off x="4617720" y="5166360"/>
+            <a:ext cx="274320" cy="274320"/>
           </a:xfrm>
           <a:prstGeom prst="rect">
             <a:avLst/>
@@ -4047,8 +5100,8 @@
         </p:nvSpPr>
         <p:spPr>
           <a:xfrm>
-            <a:off x="9244584" y="4480560"/>
-            <a:ext cx="2194560" cy="685800"/>
+            <a:off x="5166360" y="5029200"/>
+            <a:ext cx="2514600" cy="548640"/>
           </a:xfrm>
           <a:prstGeom prst="rect">
             <a:avLst/>
@@ -4064,7 +5117,7 @@
               <a:buNone/>
             </a:pPr>
             <a:r>
-              <a:rPr lang="en-US" sz="1900" b="1" dirty="0">
+              <a:rPr lang="en-US" sz="1700" b="1" dirty="0">
                 <a:solidFill>
                   <a:srgbClr val="3B2418"/>
                 </a:solidFill>
@@ -4074,7 +5127,7 @@
               </a:rPr>
               <a:t>How to serve</a:t>
             </a:r>
-            <a:endParaRPr lang="en-US" sz="1900" dirty="0"/>
+            <a:endParaRPr lang="en-US" sz="1700" dirty="0"/>
           </a:p>
         </p:txBody>
       </p:sp>
@@ -4086,8 +5139,8 @@
         </p:nvSpPr>
         <p:spPr>
           <a:xfrm>
-            <a:off x="8375904" y="5303520"/>
-            <a:ext cx="2971800" cy="914400"/>
+            <a:off x="4480560" y="5623560"/>
+            <a:ext cx="3154680" cy="548640"/>
           </a:xfrm>
           <a:prstGeom prst="rect">
             <a:avLst/>
@@ -4103,7 +5156,7 @@
               <a:buNone/>
             </a:pPr>
             <a:r>
-              <a:rPr lang="en-US" sz="1400" dirty="0">
+              <a:rPr lang="en-US" sz="1200" dirty="0">
                 <a:solidFill>
                   <a:srgbClr val="2A1D15"/>
                 </a:solidFill>
@@ -4113,7 +5166,70 @@
               </a:rPr>
               <a:t>At room temperature, ideally the day they're baked: crisp golden edges, soft moist centre.</a:t>
             </a:r>
-            <a:endParaRPr lang="en-US" sz="1400" dirty="0"/>
+            <a:endParaRPr lang="en-US" sz="1200" dirty="0"/>
+          </a:p>
+        </p:txBody>
+      </p:sp>
+      <p:pic>
+        <p:nvPicPr>
+          <p:cNvPr id="34" name="Image 6" descr="financiers with coffee">    </p:cNvPr>
+          <p:cNvPicPr>
+            <a:picLocks noChangeAspect="1"/>
+          </p:cNvPicPr>
+          <p:nvPr/>
+        </p:nvPicPr>
+        <p:blipFill>
+          <a:blip r:embed="rId7"/>
+          <a:stretch>
+            <a:fillRect/>
+          </a:stretch>
+        </p:blipFill>
+        <p:spPr>
+          <a:xfrm>
+            <a:off x="8001000" y="1737360"/>
+            <a:ext cx="3639312" cy="4297680"/>
+          </a:xfrm>
+          <a:prstGeom prst="rect">
+            <a:avLst/>
+          </a:prstGeom>
+        </p:spPr>
+      </p:pic>
+      <p:sp>
+        <p:nvSpPr>
+          <p:cNvPr id="35" name="Text 26"/>
+          <p:cNvSpPr txBox="1"/>
+          <p:nvPr/>
+        </p:nvSpPr>
+        <p:spPr>
+          <a:xfrm>
+            <a:off x="8001000" y="6108192"/>
+            <a:ext cx="3639312" cy="274320"/>
+          </a:xfrm>
+          <a:prstGeom prst="rect">
+            <a:avLst/>
+          </a:prstGeom>
+          <a:noFill/>
+          <a:ln/>
+        </p:spPr>
+        <p:txBody>
+          <a:bodyPr wrap="square" lIns="0" tIns="0" rIns="0" bIns="0" rtlCol="0" anchor="ctr"/>
+          <a:lstStyle/>
+          <a:p>
+            <a:pPr indent="0" marL="0">
+              <a:buNone/>
+            </a:pPr>
+            <a:r>
+              <a:rPr lang="en-US" sz="1100" i="1" dirty="0">
+                <a:solidFill>
+                  <a:srgbClr val="6E5A4B"/>
+                </a:solidFill>
+                <a:latin typeface="Calibri" pitchFamily="34" charset="0"/>
+                <a:ea typeface="Calibri" pitchFamily="34" charset="-122"/>
+                <a:cs typeface="Calibri" pitchFamily="34" charset="-120"/>
+              </a:rPr>
+              <a:t>Financiers with an afternoon coffee</a:t>
+            </a:r>
+            <a:endParaRPr lang="en-US" sz="1100" dirty="0"/>
           </a:p>
         </p:txBody>
       </p:sp>
@@ -4125,9 +5241,9 @@
 </p:sld>
 </file>
 
-<file path=ppt/slides/slide4.xml><?xml version="1.0" encoding="utf-8"?>
+<file path=ppt/slides/slide5.xml><?xml version="1.0" encoding="utf-8"?>
 <p:sld xmlns:a="http://schemas.openxmlformats.org/drawingml/2006/main" xmlns:r="http://schemas.openxmlformats.org/officeDocument/2006/relationships" xmlns:p="http://schemas.openxmlformats.org/presentationml/2006/main">
-  <p:cSld name="Slide 4">
+  <p:cSld name="Slide 5">
     <p:bg>
       <p:bgPr>
         <a:solidFill>
@@ -5057,9 +6173,9 @@
 </p:sld>
 </file>
 
-<file path=ppt/slides/slide5.xml><?xml version="1.0" encoding="utf-8"?>
+<file path=ppt/slides/slide6.xml><?xml version="1.0" encoding="utf-8"?>
 <p:sld xmlns:a="http://schemas.openxmlformats.org/drawingml/2006/main" xmlns:r="http://schemas.openxmlformats.org/officeDocument/2006/relationships" xmlns:p="http://schemas.openxmlformats.org/presentationml/2006/main">
-  <p:cSld name="Slide 5">
+  <p:cSld name="Slide 6">
     <p:bg>
       <p:bgPr>
         <a:solidFill>
@@ -5159,34 +6275,9 @@
           </a:p>
         </p:txBody>
       </p:sp>
-      <p:sp>
-        <p:nvSpPr>
-          <p:cNvPr id="4" name="Shape 2"/>
-          <p:cNvSpPr/>
-          <p:nvPr/>
-        </p:nvSpPr>
-        <p:spPr>
-          <a:xfrm>
-            <a:off x="548640" y="1874520"/>
-            <a:ext cx="868680" cy="868680"/>
-          </a:xfrm>
-          <a:prstGeom prst="ellipse">
-            <a:avLst/>
-          </a:prstGeom>
-          <a:solidFill>
-            <a:srgbClr val="C8963E"/>
-          </a:solidFill>
-          <a:ln w="12700">
-            <a:solidFill>
-              <a:srgbClr val="C8963E"/>
-            </a:solidFill>
-            <a:prstDash val="solid"/>
-          </a:ln>
-        </p:spPr>
-      </p:sp>
       <p:pic>
         <p:nvPicPr>
-          <p:cNvPr id="5" name="Image 0" descr="preencoded.png">    </p:cNvPr>
+          <p:cNvPr id="4" name="Image 0" descr="Brown butter">    </p:cNvPr>
           <p:cNvPicPr>
             <a:picLocks noChangeAspect="1"/>
           </p:cNvPicPr>
@@ -5200,17 +6291,17 @@
         </p:blipFill>
         <p:spPr>
           <a:xfrm>
-            <a:off x="765810" y="2091690"/>
-            <a:ext cx="434340" cy="434340"/>
-          </a:xfrm>
-          <a:prstGeom prst="rect">
+            <a:off x="548640" y="1828800"/>
+            <a:ext cx="960120" cy="960120"/>
+          </a:xfrm>
+          <a:prstGeom prst="ellipse">
             <a:avLst/>
           </a:prstGeom>
         </p:spPr>
       </p:pic>
       <p:sp>
         <p:nvSpPr>
-          <p:cNvPr id="6" name="Text 3"/>
+          <p:cNvPr id="5" name="Text 2"/>
           <p:cNvSpPr txBox="1"/>
           <p:nvPr/>
         </p:nvSpPr>
@@ -5263,7 +6354,7 @@
       </p:sp>
       <p:sp>
         <p:nvSpPr>
-          <p:cNvPr id="7" name="Text 4"/>
+          <p:cNvPr id="6" name="Text 3"/>
           <p:cNvSpPr txBox="1"/>
           <p:nvPr/>
         </p:nvSpPr>
@@ -5300,34 +6391,9 @@
           </a:p>
         </p:txBody>
       </p:sp>
-      <p:sp>
-        <p:nvSpPr>
-          <p:cNvPr id="8" name="Shape 5"/>
-          <p:cNvSpPr/>
-          <p:nvPr/>
-        </p:nvSpPr>
-        <p:spPr>
-          <a:xfrm>
-            <a:off x="6217920" y="1874520"/>
-            <a:ext cx="868680" cy="868680"/>
-          </a:xfrm>
-          <a:prstGeom prst="ellipse">
-            <a:avLst/>
-          </a:prstGeom>
-          <a:solidFill>
-            <a:srgbClr val="C8963E"/>
-          </a:solidFill>
-          <a:ln w="12700">
-            <a:solidFill>
-              <a:srgbClr val="C8963E"/>
-            </a:solidFill>
-            <a:prstDash val="solid"/>
-          </a:ln>
-        </p:spPr>
-      </p:sp>
       <p:pic>
         <p:nvPicPr>
-          <p:cNvPr id="9" name="Image 1" descr="preencoded.png">    </p:cNvPr>
+          <p:cNvPr id="7" name="Image 1" descr="Almond flour">    </p:cNvPr>
           <p:cNvPicPr>
             <a:picLocks noChangeAspect="1"/>
           </p:cNvPicPr>
@@ -5341,17 +6407,17 @@
         </p:blipFill>
         <p:spPr>
           <a:xfrm>
-            <a:off x="6435090" y="2091690"/>
-            <a:ext cx="434340" cy="434340"/>
-          </a:xfrm>
-          <a:prstGeom prst="rect">
+            <a:off x="6217920" y="1828800"/>
+            <a:ext cx="960120" cy="960120"/>
+          </a:xfrm>
+          <a:prstGeom prst="ellipse">
             <a:avLst/>
           </a:prstGeom>
         </p:spPr>
       </p:pic>
       <p:sp>
         <p:nvSpPr>
-          <p:cNvPr id="10" name="Text 6"/>
+          <p:cNvPr id="8" name="Text 4"/>
           <p:cNvSpPr txBox="1"/>
           <p:nvPr/>
         </p:nvSpPr>
@@ -5404,7 +6470,7 @@
       </p:sp>
       <p:sp>
         <p:nvSpPr>
-          <p:cNvPr id="11" name="Text 7"/>
+          <p:cNvPr id="9" name="Text 5"/>
           <p:cNvSpPr txBox="1"/>
           <p:nvPr/>
         </p:nvSpPr>
@@ -5441,34 +6507,9 @@
           </a:p>
         </p:txBody>
       </p:sp>
-      <p:sp>
-        <p:nvSpPr>
-          <p:cNvPr id="12" name="Shape 8"/>
-          <p:cNvSpPr/>
-          <p:nvPr/>
-        </p:nvSpPr>
-        <p:spPr>
-          <a:xfrm>
-            <a:off x="548640" y="3383280"/>
-            <a:ext cx="868680" cy="868680"/>
-          </a:xfrm>
-          <a:prstGeom prst="ellipse">
-            <a:avLst/>
-          </a:prstGeom>
-          <a:solidFill>
-            <a:srgbClr val="C8963E"/>
-          </a:solidFill>
-          <a:ln w="12700">
-            <a:solidFill>
-              <a:srgbClr val="C8963E"/>
-            </a:solidFill>
-            <a:prstDash val="solid"/>
-          </a:ln>
-        </p:spPr>
-      </p:sp>
       <p:pic>
         <p:nvPicPr>
-          <p:cNvPr id="13" name="Image 2" descr="preencoded.png">    </p:cNvPr>
+          <p:cNvPr id="10" name="Image 2" descr="Plain flour">    </p:cNvPr>
           <p:cNvPicPr>
             <a:picLocks noChangeAspect="1"/>
           </p:cNvPicPr>
@@ -5482,17 +6523,17 @@
         </p:blipFill>
         <p:spPr>
           <a:xfrm>
-            <a:off x="765810" y="3600450"/>
-            <a:ext cx="434340" cy="434340"/>
-          </a:xfrm>
-          <a:prstGeom prst="rect">
+            <a:off x="548640" y="3337560"/>
+            <a:ext cx="960120" cy="960120"/>
+          </a:xfrm>
+          <a:prstGeom prst="ellipse">
             <a:avLst/>
           </a:prstGeom>
         </p:spPr>
       </p:pic>
       <p:sp>
         <p:nvSpPr>
-          <p:cNvPr id="14" name="Text 9"/>
+          <p:cNvPr id="11" name="Text 6"/>
           <p:cNvSpPr txBox="1"/>
           <p:nvPr/>
         </p:nvSpPr>
@@ -5545,7 +6586,7 @@
       </p:sp>
       <p:sp>
         <p:nvSpPr>
-          <p:cNvPr id="15" name="Text 10"/>
+          <p:cNvPr id="12" name="Text 7"/>
           <p:cNvSpPr txBox="1"/>
           <p:nvPr/>
         </p:nvSpPr>
@@ -5582,34 +6623,9 @@
           </a:p>
         </p:txBody>
       </p:sp>
-      <p:sp>
-        <p:nvSpPr>
-          <p:cNvPr id="16" name="Shape 11"/>
-          <p:cNvSpPr/>
-          <p:nvPr/>
-        </p:nvSpPr>
-        <p:spPr>
-          <a:xfrm>
-            <a:off x="6217920" y="3383280"/>
-            <a:ext cx="868680" cy="868680"/>
-          </a:xfrm>
-          <a:prstGeom prst="ellipse">
-            <a:avLst/>
-          </a:prstGeom>
-          <a:solidFill>
-            <a:srgbClr val="C8963E"/>
-          </a:solidFill>
-          <a:ln w="12700">
-            <a:solidFill>
-              <a:srgbClr val="C8963E"/>
-            </a:solidFill>
-            <a:prstDash val="solid"/>
-          </a:ln>
-        </p:spPr>
-      </p:sp>
       <p:pic>
         <p:nvPicPr>
-          <p:cNvPr id="17" name="Image 3" descr="preencoded.png">    </p:cNvPr>
+          <p:cNvPr id="13" name="Image 3" descr="Powdered sugar">    </p:cNvPr>
           <p:cNvPicPr>
             <a:picLocks noChangeAspect="1"/>
           </p:cNvPicPr>
@@ -5623,17 +6639,17 @@
         </p:blipFill>
         <p:spPr>
           <a:xfrm>
-            <a:off x="6435090" y="3600450"/>
-            <a:ext cx="434340" cy="434340"/>
-          </a:xfrm>
-          <a:prstGeom prst="rect">
+            <a:off x="6217920" y="3337560"/>
+            <a:ext cx="960120" cy="960120"/>
+          </a:xfrm>
+          <a:prstGeom prst="ellipse">
             <a:avLst/>
           </a:prstGeom>
         </p:spPr>
       </p:pic>
       <p:sp>
         <p:nvSpPr>
-          <p:cNvPr id="18" name="Text 12"/>
+          <p:cNvPr id="14" name="Text 8"/>
           <p:cNvSpPr txBox="1"/>
           <p:nvPr/>
         </p:nvSpPr>
@@ -5686,7 +6702,7 @@
       </p:sp>
       <p:sp>
         <p:nvSpPr>
-          <p:cNvPr id="19" name="Text 13"/>
+          <p:cNvPr id="15" name="Text 9"/>
           <p:cNvSpPr txBox="1"/>
           <p:nvPr/>
         </p:nvSpPr>
@@ -5723,34 +6739,9 @@
           </a:p>
         </p:txBody>
       </p:sp>
-      <p:sp>
-        <p:nvSpPr>
-          <p:cNvPr id="20" name="Shape 14"/>
-          <p:cNvSpPr/>
-          <p:nvPr/>
-        </p:nvSpPr>
-        <p:spPr>
-          <a:xfrm>
-            <a:off x="548640" y="4892040"/>
-            <a:ext cx="868680" cy="868680"/>
-          </a:xfrm>
-          <a:prstGeom prst="ellipse">
-            <a:avLst/>
-          </a:prstGeom>
-          <a:solidFill>
-            <a:srgbClr val="C8963E"/>
-          </a:solidFill>
-          <a:ln w="12700">
-            <a:solidFill>
-              <a:srgbClr val="C8963E"/>
-            </a:solidFill>
-            <a:prstDash val="solid"/>
-          </a:ln>
-        </p:spPr>
-      </p:sp>
       <p:pic>
         <p:nvPicPr>
-          <p:cNvPr id="21" name="Image 4" descr="preencoded.png">    </p:cNvPr>
+          <p:cNvPr id="16" name="Image 4" descr="Egg whites">    </p:cNvPr>
           <p:cNvPicPr>
             <a:picLocks noChangeAspect="1"/>
           </p:cNvPicPr>
@@ -5764,17 +6755,17 @@
         </p:blipFill>
         <p:spPr>
           <a:xfrm>
-            <a:off x="765810" y="5109210"/>
-            <a:ext cx="434340" cy="434340"/>
-          </a:xfrm>
-          <a:prstGeom prst="rect">
+            <a:off x="548640" y="4846320"/>
+            <a:ext cx="960120" cy="960120"/>
+          </a:xfrm>
+          <a:prstGeom prst="ellipse">
             <a:avLst/>
           </a:prstGeom>
         </p:spPr>
       </p:pic>
       <p:sp>
         <p:nvSpPr>
-          <p:cNvPr id="22" name="Text 15"/>
+          <p:cNvPr id="17" name="Text 10"/>
           <p:cNvSpPr txBox="1"/>
           <p:nvPr/>
         </p:nvSpPr>
@@ -5827,7 +6818,7 @@
       </p:sp>
       <p:sp>
         <p:nvSpPr>
-          <p:cNvPr id="23" name="Text 16"/>
+          <p:cNvPr id="18" name="Text 11"/>
           <p:cNvSpPr txBox="1"/>
           <p:nvPr/>
         </p:nvSpPr>
@@ -5864,34 +6855,9 @@
           </a:p>
         </p:txBody>
       </p:sp>
-      <p:sp>
-        <p:nvSpPr>
-          <p:cNvPr id="24" name="Shape 17"/>
-          <p:cNvSpPr/>
-          <p:nvPr/>
-        </p:nvSpPr>
-        <p:spPr>
-          <a:xfrm>
-            <a:off x="6217920" y="4892040"/>
-            <a:ext cx="868680" cy="868680"/>
-          </a:xfrm>
-          <a:prstGeom prst="ellipse">
-            <a:avLst/>
-          </a:prstGeom>
-          <a:solidFill>
-            <a:srgbClr val="C8963E"/>
-          </a:solidFill>
-          <a:ln w="12700">
-            <a:solidFill>
-              <a:srgbClr val="C8963E"/>
-            </a:solidFill>
-            <a:prstDash val="solid"/>
-          </a:ln>
-        </p:spPr>
-      </p:sp>
       <p:pic>
         <p:nvPicPr>
-          <p:cNvPr id="25" name="Image 5" descr="preencoded.png">    </p:cNvPr>
+          <p:cNvPr id="19" name="Image 5" descr="Salt &amp; vanilla">    </p:cNvPr>
           <p:cNvPicPr>
             <a:picLocks noChangeAspect="1"/>
           </p:cNvPicPr>
@@ -5905,17 +6871,17 @@
         </p:blipFill>
         <p:spPr>
           <a:xfrm>
-            <a:off x="6435090" y="5109210"/>
-            <a:ext cx="434340" cy="434340"/>
-          </a:xfrm>
-          <a:prstGeom prst="rect">
+            <a:off x="6217920" y="4846320"/>
+            <a:ext cx="960120" cy="960120"/>
+          </a:xfrm>
+          <a:prstGeom prst="ellipse">
             <a:avLst/>
           </a:prstGeom>
         </p:spPr>
       </p:pic>
       <p:sp>
         <p:nvSpPr>
-          <p:cNvPr id="26" name="Text 18"/>
+          <p:cNvPr id="20" name="Text 12"/>
           <p:cNvSpPr txBox="1"/>
           <p:nvPr/>
         </p:nvSpPr>
@@ -5968,7 +6934,7 @@
       </p:sp>
       <p:sp>
         <p:nvSpPr>
-          <p:cNvPr id="27" name="Text 19"/>
+          <p:cNvPr id="21" name="Text 13"/>
           <p:cNvSpPr txBox="1"/>
           <p:nvPr/>
         </p:nvSpPr>
@@ -6013,9 +6979,9 @@
 </p:sld>
 </file>
 
-<file path=ppt/slides/slide6.xml><?xml version="1.0" encoding="utf-8"?>
+<file path=ppt/slides/slide7.xml><?xml version="1.0" encoding="utf-8"?>
 <p:sld xmlns:a="http://schemas.openxmlformats.org/drawingml/2006/main" xmlns:r="http://schemas.openxmlformats.org/officeDocument/2006/relationships" xmlns:p="http://schemas.openxmlformats.org/presentationml/2006/main">
-  <p:cSld name="Slide 6">
+  <p:cSld name="Slide 7">
     <p:bg>
       <p:bgPr>
         <a:solidFill>
@@ -6142,198 +7108,33 @@
           </a:ln>
         </p:spPr>
       </p:sp>
-      <p:sp>
-        <p:nvSpPr>
-          <p:cNvPr id="5" name="Shape 3"/>
-          <p:cNvSpPr/>
-          <p:nvPr/>
-        </p:nvSpPr>
-        <p:spPr>
-          <a:xfrm>
-            <a:off x="914400" y="2148840"/>
-            <a:ext cx="3200400" cy="1737360"/>
-          </a:xfrm>
-          <a:prstGeom prst="roundRect">
-            <a:avLst>
-              <a:gd name="adj" fmla="val 5263"/>
-            </a:avLst>
-          </a:prstGeom>
-          <a:solidFill>
-            <a:srgbClr val="5A3A28"/>
-          </a:solidFill>
-          <a:ln w="12700">
-            <a:solidFill>
-              <a:srgbClr val="C8963E"/>
-            </a:solidFill>
-            <a:prstDash val="solid"/>
-          </a:ln>
-        </p:spPr>
-      </p:sp>
-      <p:sp>
-        <p:nvSpPr>
-          <p:cNvPr id="6" name="Shape 4"/>
-          <p:cNvSpPr/>
-          <p:nvPr/>
-        </p:nvSpPr>
-        <p:spPr>
-          <a:xfrm>
-            <a:off x="1097280" y="2286000"/>
-            <a:ext cx="1371600" cy="411480"/>
-          </a:xfrm>
-          <a:prstGeom prst="roundRect">
-            <a:avLst>
-              <a:gd name="adj" fmla="val 11111"/>
-            </a:avLst>
-          </a:prstGeom>
-          <a:solidFill>
-            <a:srgbClr val="C8963E"/>
-          </a:solidFill>
-          <a:ln w="12700">
-            <a:solidFill>
-              <a:srgbClr val="8A5A2B"/>
-            </a:solidFill>
-            <a:prstDash val="solid"/>
-          </a:ln>
-        </p:spPr>
-      </p:sp>
-      <p:sp>
-        <p:nvSpPr>
-          <p:cNvPr id="7" name="Shape 5"/>
-          <p:cNvSpPr/>
-          <p:nvPr/>
-        </p:nvSpPr>
-        <p:spPr>
-          <a:xfrm>
-            <a:off x="2560320" y="2286000"/>
-            <a:ext cx="1371600" cy="411480"/>
-          </a:xfrm>
-          <a:prstGeom prst="roundRect">
-            <a:avLst>
-              <a:gd name="adj" fmla="val 11111"/>
-            </a:avLst>
-          </a:prstGeom>
-          <a:solidFill>
-            <a:srgbClr val="C8963E"/>
-          </a:solidFill>
-          <a:ln w="12700">
-            <a:solidFill>
-              <a:srgbClr val="8A5A2B"/>
-            </a:solidFill>
-            <a:prstDash val="solid"/>
-          </a:ln>
-        </p:spPr>
-      </p:sp>
-      <p:sp>
-        <p:nvSpPr>
-          <p:cNvPr id="8" name="Shape 6"/>
-          <p:cNvSpPr/>
-          <p:nvPr/>
-        </p:nvSpPr>
-        <p:spPr>
-          <a:xfrm>
-            <a:off x="1097280" y="2807208"/>
-            <a:ext cx="1371600" cy="411480"/>
-          </a:xfrm>
-          <a:prstGeom prst="roundRect">
-            <a:avLst>
-              <a:gd name="adj" fmla="val 11111"/>
-            </a:avLst>
-          </a:prstGeom>
-          <a:solidFill>
-            <a:srgbClr val="C8963E"/>
-          </a:solidFill>
-          <a:ln w="12700">
-            <a:solidFill>
-              <a:srgbClr val="8A5A2B"/>
-            </a:solidFill>
-            <a:prstDash val="solid"/>
-          </a:ln>
-        </p:spPr>
-      </p:sp>
-      <p:sp>
-        <p:nvSpPr>
-          <p:cNvPr id="9" name="Shape 7"/>
-          <p:cNvSpPr/>
-          <p:nvPr/>
-        </p:nvSpPr>
-        <p:spPr>
-          <a:xfrm>
-            <a:off x="2560320" y="2807208"/>
-            <a:ext cx="1371600" cy="411480"/>
-          </a:xfrm>
-          <a:prstGeom prst="roundRect">
-            <a:avLst>
-              <a:gd name="adj" fmla="val 11111"/>
-            </a:avLst>
-          </a:prstGeom>
-          <a:solidFill>
-            <a:srgbClr val="C8963E"/>
-          </a:solidFill>
-          <a:ln w="12700">
-            <a:solidFill>
-              <a:srgbClr val="8A5A2B"/>
-            </a:solidFill>
-            <a:prstDash val="solid"/>
-          </a:ln>
-        </p:spPr>
-      </p:sp>
-      <p:sp>
-        <p:nvSpPr>
-          <p:cNvPr id="10" name="Shape 8"/>
-          <p:cNvSpPr/>
-          <p:nvPr/>
-        </p:nvSpPr>
-        <p:spPr>
-          <a:xfrm>
-            <a:off x="1097280" y="3328416"/>
-            <a:ext cx="1371600" cy="411480"/>
-          </a:xfrm>
-          <a:prstGeom prst="roundRect">
-            <a:avLst>
-              <a:gd name="adj" fmla="val 11111"/>
-            </a:avLst>
-          </a:prstGeom>
-          <a:solidFill>
-            <a:srgbClr val="C8963E"/>
-          </a:solidFill>
-          <a:ln w="12700">
-            <a:solidFill>
-              <a:srgbClr val="8A5A2B"/>
-            </a:solidFill>
-            <a:prstDash val="solid"/>
-          </a:ln>
-        </p:spPr>
-      </p:sp>
-      <p:sp>
-        <p:nvSpPr>
-          <p:cNvPr id="11" name="Shape 9"/>
-          <p:cNvSpPr/>
-          <p:nvPr/>
-        </p:nvSpPr>
-        <p:spPr>
-          <a:xfrm>
-            <a:off x="2560320" y="3328416"/>
-            <a:ext cx="1371600" cy="411480"/>
-          </a:xfrm>
-          <a:prstGeom prst="roundRect">
-            <a:avLst>
-              <a:gd name="adj" fmla="val 11111"/>
-            </a:avLst>
-          </a:prstGeom>
-          <a:solidFill>
-            <a:srgbClr val="C8963E"/>
-          </a:solidFill>
-          <a:ln w="12700">
-            <a:solidFill>
-              <a:srgbClr val="8A5A2B"/>
-            </a:solidFill>
-            <a:prstDash val="solid"/>
-          </a:ln>
-        </p:spPr>
-      </p:sp>
-      <p:sp>
-        <p:nvSpPr>
-          <p:cNvPr id="12" name="Text 10"/>
+      <p:pic>
+        <p:nvPicPr>
+          <p:cNvPr id="5" name="Image 0" descr="financier mould">    </p:cNvPr>
+          <p:cNvPicPr>
+            <a:picLocks noChangeAspect="1"/>
+          </p:cNvPicPr>
+          <p:nvPr/>
+        </p:nvPicPr>
+        <p:blipFill>
+          <a:blip r:embed="rId1"/>
+          <a:stretch>
+            <a:fillRect/>
+          </a:stretch>
+        </p:blipFill>
+        <p:spPr>
+          <a:xfrm>
+            <a:off x="914400" y="2103120"/>
+            <a:ext cx="3200400" cy="1828800"/>
+          </a:xfrm>
+          <a:prstGeom prst="rect">
+            <a:avLst/>
+          </a:prstGeom>
+        </p:spPr>
+      </p:pic>
+      <p:sp>
+        <p:nvSpPr>
+          <p:cNvPr id="6" name="Text 3"/>
           <p:cNvSpPr txBox="1"/>
           <p:nvPr/>
         </p:nvSpPr>
@@ -6372,7 +7173,7 @@
       </p:sp>
       <p:sp>
         <p:nvSpPr>
-          <p:cNvPr id="13" name="Text 11"/>
+          <p:cNvPr id="7" name="Text 4"/>
           <p:cNvSpPr txBox="1"/>
           <p:nvPr/>
         </p:nvSpPr>
@@ -6411,7 +7212,7 @@
       </p:sp>
       <p:sp>
         <p:nvSpPr>
-          <p:cNvPr id="14" name="Shape 12"/>
+          <p:cNvPr id="8" name="Shape 5"/>
           <p:cNvSpPr/>
           <p:nvPr/>
         </p:nvSpPr>
@@ -6436,14 +7237,14 @@
       </p:sp>
       <p:pic>
         <p:nvPicPr>
-          <p:cNvPr id="15" name="Image 0" descr="preencoded.png">    </p:cNvPr>
+          <p:cNvPr id="9" name="Image 1" descr="preencoded.png">    </p:cNvPr>
           <p:cNvPicPr>
             <a:picLocks noChangeAspect="1"/>
           </p:cNvPicPr>
           <p:nvPr/>
         </p:nvPicPr>
         <p:blipFill>
-          <a:blip r:embed="rId1"/>
+          <a:blip r:embed="rId2"/>
           <a:stretch>
             <a:fillRect/>
           </a:stretch>
@@ -6460,7 +7261,7 @@
       </p:pic>
       <p:sp>
         <p:nvSpPr>
-          <p:cNvPr id="16" name="Text 13"/>
+          <p:cNvPr id="10" name="Text 6"/>
           <p:cNvSpPr txBox="1"/>
           <p:nvPr/>
         </p:nvSpPr>
@@ -6499,7 +7300,7 @@
       </p:sp>
       <p:sp>
         <p:nvSpPr>
-          <p:cNvPr id="17" name="Text 14"/>
+          <p:cNvPr id="11" name="Text 7"/>
           <p:cNvSpPr txBox="1"/>
           <p:nvPr/>
         </p:nvSpPr>
@@ -6538,7 +7339,7 @@
       </p:sp>
       <p:sp>
         <p:nvSpPr>
-          <p:cNvPr id="18" name="Shape 15"/>
+          <p:cNvPr id="12" name="Shape 8"/>
           <p:cNvSpPr/>
           <p:nvPr/>
         </p:nvSpPr>
@@ -6563,14 +7364,14 @@
       </p:sp>
       <p:pic>
         <p:nvPicPr>
-          <p:cNvPr id="19" name="Image 1" descr="preencoded.png">    </p:cNvPr>
+          <p:cNvPr id="13" name="Image 2" descr="preencoded.png">    </p:cNvPr>
           <p:cNvPicPr>
             <a:picLocks noChangeAspect="1"/>
           </p:cNvPicPr>
           <p:nvPr/>
         </p:nvPicPr>
         <p:blipFill>
-          <a:blip r:embed="rId2"/>
+          <a:blip r:embed="rId3"/>
           <a:stretch>
             <a:fillRect/>
           </a:stretch>
@@ -6587,7 +7388,7 @@
       </p:pic>
       <p:sp>
         <p:nvSpPr>
-          <p:cNvPr id="20" name="Text 16"/>
+          <p:cNvPr id="14" name="Text 9"/>
           <p:cNvSpPr txBox="1"/>
           <p:nvPr/>
         </p:nvSpPr>
@@ -6626,7 +7427,7 @@
       </p:sp>
       <p:sp>
         <p:nvSpPr>
-          <p:cNvPr id="21" name="Text 17"/>
+          <p:cNvPr id="15" name="Text 10"/>
           <p:cNvSpPr txBox="1"/>
           <p:nvPr/>
         </p:nvSpPr>
@@ -6665,7 +7466,7 @@
       </p:sp>
       <p:sp>
         <p:nvSpPr>
-          <p:cNvPr id="22" name="Shape 18"/>
+          <p:cNvPr id="16" name="Shape 11"/>
           <p:cNvSpPr/>
           <p:nvPr/>
         </p:nvSpPr>
@@ -6690,14 +7491,14 @@
       </p:sp>
       <p:pic>
         <p:nvPicPr>
-          <p:cNvPr id="23" name="Image 2" descr="preencoded.png">    </p:cNvPr>
+          <p:cNvPr id="17" name="Image 3" descr="preencoded.png">    </p:cNvPr>
           <p:cNvPicPr>
             <a:picLocks noChangeAspect="1"/>
           </p:cNvPicPr>
           <p:nvPr/>
         </p:nvPicPr>
         <p:blipFill>
-          <a:blip r:embed="rId3"/>
+          <a:blip r:embed="rId4"/>
           <a:stretch>
             <a:fillRect/>
           </a:stretch>
@@ -6714,7 +7515,7 @@
       </p:pic>
       <p:sp>
         <p:nvSpPr>
-          <p:cNvPr id="24" name="Text 19"/>
+          <p:cNvPr id="18" name="Text 12"/>
           <p:cNvSpPr txBox="1"/>
           <p:nvPr/>
         </p:nvSpPr>
@@ -6753,7 +7554,7 @@
       </p:sp>
       <p:sp>
         <p:nvSpPr>
-          <p:cNvPr id="25" name="Text 20"/>
+          <p:cNvPr id="19" name="Text 13"/>
           <p:cNvSpPr txBox="1"/>
           <p:nvPr/>
         </p:nvSpPr>
@@ -6792,7 +7593,7 @@
       </p:sp>
       <p:sp>
         <p:nvSpPr>
-          <p:cNvPr id="26" name="Shape 21"/>
+          <p:cNvPr id="20" name="Shape 14"/>
           <p:cNvSpPr/>
           <p:nvPr/>
         </p:nvSpPr>
@@ -6817,14 +7618,14 @@
       </p:sp>
       <p:pic>
         <p:nvPicPr>
-          <p:cNvPr id="27" name="Image 3" descr="preencoded.png">    </p:cNvPr>
+          <p:cNvPr id="21" name="Image 4" descr="preencoded.png">    </p:cNvPr>
           <p:cNvPicPr>
             <a:picLocks noChangeAspect="1"/>
           </p:cNvPicPr>
           <p:nvPr/>
         </p:nvPicPr>
         <p:blipFill>
-          <a:blip r:embed="rId4"/>
+          <a:blip r:embed="rId5"/>
           <a:stretch>
             <a:fillRect/>
           </a:stretch>
@@ -6841,7 +7642,7 @@
       </p:pic>
       <p:sp>
         <p:nvSpPr>
-          <p:cNvPr id="28" name="Text 22"/>
+          <p:cNvPr id="22" name="Text 15"/>
           <p:cNvSpPr txBox="1"/>
           <p:nvPr/>
         </p:nvSpPr>
@@ -6880,7 +7681,7 @@
       </p:sp>
       <p:sp>
         <p:nvSpPr>
-          <p:cNvPr id="29" name="Text 23"/>
+          <p:cNvPr id="23" name="Text 16"/>
           <p:cNvSpPr txBox="1"/>
           <p:nvPr/>
         </p:nvSpPr>
@@ -6919,7 +7720,7 @@
       </p:sp>
       <p:sp>
         <p:nvSpPr>
-          <p:cNvPr id="30" name="Shape 24"/>
+          <p:cNvPr id="24" name="Shape 17"/>
           <p:cNvSpPr/>
           <p:nvPr/>
         </p:nvSpPr>
@@ -6944,14 +7745,14 @@
       </p:sp>
       <p:pic>
         <p:nvPicPr>
-          <p:cNvPr id="31" name="Image 4" descr="preencoded.png">    </p:cNvPr>
+          <p:cNvPr id="25" name="Image 5" descr="preencoded.png">    </p:cNvPr>
           <p:cNvPicPr>
             <a:picLocks noChangeAspect="1"/>
           </p:cNvPicPr>
           <p:nvPr/>
         </p:nvPicPr>
         <p:blipFill>
-          <a:blip r:embed="rId5"/>
+          <a:blip r:embed="rId6"/>
           <a:stretch>
             <a:fillRect/>
           </a:stretch>
@@ -6968,7 +7769,7 @@
       </p:pic>
       <p:sp>
         <p:nvSpPr>
-          <p:cNvPr id="32" name="Text 25"/>
+          <p:cNvPr id="26" name="Text 18"/>
           <p:cNvSpPr txBox="1"/>
           <p:nvPr/>
         </p:nvSpPr>
@@ -7007,7 +7808,7 @@
       </p:sp>
       <p:sp>
         <p:nvSpPr>
-          <p:cNvPr id="33" name="Text 26"/>
+          <p:cNvPr id="27" name="Text 19"/>
           <p:cNvSpPr txBox="1"/>
           <p:nvPr/>
         </p:nvSpPr>
@@ -7046,7 +7847,7 @@
       </p:sp>
       <p:sp>
         <p:nvSpPr>
-          <p:cNvPr id="34" name="Shape 27"/>
+          <p:cNvPr id="28" name="Shape 20"/>
           <p:cNvSpPr/>
           <p:nvPr/>
         </p:nvSpPr>
@@ -7071,14 +7872,14 @@
       </p:sp>
       <p:pic>
         <p:nvPicPr>
-          <p:cNvPr id="35" name="Image 5" descr="preencoded.png">    </p:cNvPr>
+          <p:cNvPr id="29" name="Image 6" descr="preencoded.png">    </p:cNvPr>
           <p:cNvPicPr>
             <a:picLocks noChangeAspect="1"/>
           </p:cNvPicPr>
           <p:nvPr/>
         </p:nvPicPr>
         <p:blipFill>
-          <a:blip r:embed="rId6"/>
+          <a:blip r:embed="rId7"/>
           <a:stretch>
             <a:fillRect/>
           </a:stretch>
@@ -7095,7 +7896,7 @@
       </p:pic>
       <p:sp>
         <p:nvSpPr>
-          <p:cNvPr id="36" name="Text 28"/>
+          <p:cNvPr id="30" name="Text 21"/>
           <p:cNvSpPr txBox="1"/>
           <p:nvPr/>
         </p:nvSpPr>
@@ -7134,7 +7935,7 @@
       </p:sp>
       <p:sp>
         <p:nvSpPr>
-          <p:cNvPr id="37" name="Text 29"/>
+          <p:cNvPr id="31" name="Text 22"/>
           <p:cNvSpPr txBox="1"/>
           <p:nvPr/>
         </p:nvSpPr>
@@ -7173,7 +7974,7 @@
       </p:sp>
       <p:sp>
         <p:nvSpPr>
-          <p:cNvPr id="38" name="Shape 30"/>
+          <p:cNvPr id="32" name="Shape 23"/>
           <p:cNvSpPr/>
           <p:nvPr/>
         </p:nvSpPr>
@@ -7198,14 +7999,14 @@
       </p:sp>
       <p:pic>
         <p:nvPicPr>
-          <p:cNvPr id="39" name="Image 6" descr="preencoded.png">    </p:cNvPr>
+          <p:cNvPr id="33" name="Image 7" descr="preencoded.png">    </p:cNvPr>
           <p:cNvPicPr>
             <a:picLocks noChangeAspect="1"/>
           </p:cNvPicPr>
           <p:nvPr/>
         </p:nvPicPr>
         <p:blipFill>
-          <a:blip r:embed="rId7"/>
+          <a:blip r:embed="rId8"/>
           <a:stretch>
             <a:fillRect/>
           </a:stretch>
@@ -7222,7 +8023,7 @@
       </p:pic>
       <p:sp>
         <p:nvSpPr>
-          <p:cNvPr id="40" name="Text 31"/>
+          <p:cNvPr id="34" name="Text 24"/>
           <p:cNvSpPr txBox="1"/>
           <p:nvPr/>
         </p:nvSpPr>
@@ -7261,7 +8062,7 @@
       </p:sp>
       <p:sp>
         <p:nvSpPr>
-          <p:cNvPr id="41" name="Text 32"/>
+          <p:cNvPr id="35" name="Text 25"/>
           <p:cNvSpPr txBox="1"/>
           <p:nvPr/>
         </p:nvSpPr>
@@ -7300,7 +8101,7 @@
       </p:sp>
       <p:sp>
         <p:nvSpPr>
-          <p:cNvPr id="42" name="Shape 33"/>
+          <p:cNvPr id="36" name="Shape 26"/>
           <p:cNvSpPr/>
           <p:nvPr/>
         </p:nvSpPr>
@@ -7325,14 +8126,14 @@
       </p:sp>
       <p:pic>
         <p:nvPicPr>
-          <p:cNvPr id="43" name="Image 7" descr="preencoded.png">    </p:cNvPr>
+          <p:cNvPr id="37" name="Image 8" descr="preencoded.png">    </p:cNvPr>
           <p:cNvPicPr>
             <a:picLocks noChangeAspect="1"/>
           </p:cNvPicPr>
           <p:nvPr/>
         </p:nvPicPr>
         <p:blipFill>
-          <a:blip r:embed="rId8"/>
+          <a:blip r:embed="rId9"/>
           <a:stretch>
             <a:fillRect/>
           </a:stretch>
@@ -7349,7 +8150,7 @@
       </p:pic>
       <p:sp>
         <p:nvSpPr>
-          <p:cNvPr id="44" name="Text 34"/>
+          <p:cNvPr id="38" name="Text 27"/>
           <p:cNvSpPr txBox="1"/>
           <p:nvPr/>
         </p:nvSpPr>
@@ -7388,7 +8189,7 @@
       </p:sp>
       <p:sp>
         <p:nvSpPr>
-          <p:cNvPr id="45" name="Text 35"/>
+          <p:cNvPr id="39" name="Text 28"/>
           <p:cNvSpPr txBox="1"/>
           <p:nvPr/>
         </p:nvSpPr>
@@ -7422,888 +8223,6 @@
               <a:t>Bake at 200°C, then cool</a:t>
             </a:r>
             <a:endParaRPr lang="en-US" sz="1300" dirty="0"/>
-          </a:p>
-        </p:txBody>
-      </p:sp>
-    </p:spTree>
-  </p:cSld>
-  <p:clrMapOvr>
-    <a:masterClrMapping/>
-  </p:clrMapOvr>
-</p:sld>
-</file>
-
-<file path=ppt/slides/slide7.xml><?xml version="1.0" encoding="utf-8"?>
-<p:sld xmlns:a="http://schemas.openxmlformats.org/drawingml/2006/main" xmlns:r="http://schemas.openxmlformats.org/officeDocument/2006/relationships" xmlns:p="http://schemas.openxmlformats.org/presentationml/2006/main">
-  <p:cSld name="Slide 7">
-    <p:bg>
-      <p:bgPr>
-        <a:solidFill>
-          <a:srgbClr val="FFFFFF"/>
-        </a:solidFill>
-      </p:bgPr>
-    </p:bg>
-    <p:spTree>
-      <p:nvGrpSpPr>
-        <p:cNvPr id="1" name=""/>
-        <p:cNvGrpSpPr/>
-        <p:nvPr/>
-      </p:nvGrpSpPr>
-      <p:grpSpPr>
-        <a:xfrm>
-          <a:off x="0" y="0"/>
-          <a:ext cx="0" cy="0"/>
-          <a:chOff x="0" y="0"/>
-          <a:chExt cx="0" cy="0"/>
-        </a:xfrm>
-      </p:grpSpPr>
-      <p:sp>
-        <p:nvSpPr>
-          <p:cNvPr id="2" name="Text 0"/>
-          <p:cNvSpPr txBox="1"/>
-          <p:nvPr/>
-        </p:nvSpPr>
-        <p:spPr>
-          <a:xfrm>
-            <a:off x="548640" y="365760"/>
-            <a:ext cx="11064240" cy="731520"/>
-          </a:xfrm>
-          <a:prstGeom prst="rect">
-            <a:avLst/>
-          </a:prstGeom>
-          <a:noFill/>
-          <a:ln/>
-        </p:spPr>
-        <p:txBody>
-          <a:bodyPr wrap="square" lIns="0" tIns="0" rIns="0" bIns="0" rtlCol="0" anchor="ctr"/>
-          <a:lstStyle/>
-          <a:p>
-            <a:pPr indent="0" marL="0">
-              <a:buNone/>
-            </a:pPr>
-            <a:r>
-              <a:rPr lang="en-US" sz="3800" b="1" dirty="0">
-                <a:solidFill>
-                  <a:srgbClr val="3B2418"/>
-                </a:solidFill>
-                <a:latin typeface="Cambria" pitchFamily="34" charset="0"/>
-                <a:ea typeface="Cambria" pitchFamily="34" charset="-122"/>
-                <a:cs typeface="Cambria" pitchFamily="34" charset="-120"/>
-              </a:rPr>
-              <a:t>How to Make Them (1/2)</a:t>
-            </a:r>
-            <a:endParaRPr lang="en-US" sz="3800" dirty="0"/>
-          </a:p>
-        </p:txBody>
-      </p:sp>
-      <p:sp>
-        <p:nvSpPr>
-          <p:cNvPr id="3" name="Text 1"/>
-          <p:cNvSpPr txBox="1"/>
-          <p:nvPr/>
-        </p:nvSpPr>
-        <p:spPr>
-          <a:xfrm>
-            <a:off x="548640" y="1051560"/>
-            <a:ext cx="11064240" cy="411480"/>
-          </a:xfrm>
-          <a:prstGeom prst="rect">
-            <a:avLst/>
-          </a:prstGeom>
-          <a:noFill/>
-          <a:ln/>
-        </p:spPr>
-        <p:txBody>
-          <a:bodyPr wrap="square" lIns="0" tIns="0" rIns="0" bIns="0" rtlCol="0" anchor="ctr"/>
-          <a:lstStyle/>
-          <a:p>
-            <a:pPr indent="0" marL="0">
-              <a:buNone/>
-            </a:pPr>
-            <a:r>
-              <a:rPr lang="en-US" sz="1600" i="1" dirty="0">
-                <a:solidFill>
-                  <a:srgbClr val="6E5A4B"/>
-                </a:solidFill>
-                <a:latin typeface="Calibri" pitchFamily="34" charset="0"/>
-                <a:ea typeface="Calibri" pitchFamily="34" charset="-122"/>
-                <a:cs typeface="Calibri" pitchFamily="34" charset="-120"/>
-              </a:rPr>
-              <a:t>Steps 1–4: brown butter and batter base</a:t>
-            </a:r>
-            <a:endParaRPr lang="en-US" sz="1600" dirty="0"/>
-          </a:p>
-        </p:txBody>
-      </p:sp>
-      <p:sp>
-        <p:nvSpPr>
-          <p:cNvPr id="4" name="Shape 2"/>
-          <p:cNvSpPr/>
-          <p:nvPr/>
-        </p:nvSpPr>
-        <p:spPr>
-          <a:xfrm>
-            <a:off x="548640" y="1783080"/>
-            <a:ext cx="2606040" cy="4480560"/>
-          </a:xfrm>
-          <a:prstGeom prst="roundRect">
-            <a:avLst>
-              <a:gd name="adj" fmla="val 4211"/>
-            </a:avLst>
-          </a:prstGeom>
-          <a:solidFill>
-            <a:srgbClr val="F6EEE2"/>
-          </a:solidFill>
-          <a:ln w="12700">
-            <a:solidFill>
-              <a:srgbClr val="F6EEE2"/>
-            </a:solidFill>
-            <a:prstDash val="solid"/>
-          </a:ln>
-        </p:spPr>
-      </p:sp>
-      <p:sp>
-        <p:nvSpPr>
-          <p:cNvPr id="5" name="Shape 3"/>
-          <p:cNvSpPr/>
-          <p:nvPr/>
-        </p:nvSpPr>
-        <p:spPr>
-          <a:xfrm>
-            <a:off x="777240" y="2057400"/>
-            <a:ext cx="731520" cy="731520"/>
-          </a:xfrm>
-          <a:prstGeom prst="ellipse">
-            <a:avLst/>
-          </a:prstGeom>
-          <a:solidFill>
-            <a:srgbClr val="3B2418"/>
-          </a:solidFill>
-          <a:ln w="12700">
-            <a:solidFill>
-              <a:srgbClr val="3B2418"/>
-            </a:solidFill>
-            <a:prstDash val="solid"/>
-          </a:ln>
-        </p:spPr>
-      </p:sp>
-      <p:sp>
-        <p:nvSpPr>
-          <p:cNvPr id="6" name="Text 4"/>
-          <p:cNvSpPr txBox="1"/>
-          <p:nvPr/>
-        </p:nvSpPr>
-        <p:spPr>
-          <a:xfrm>
-            <a:off x="777240" y="2057400"/>
-            <a:ext cx="731520" cy="731520"/>
-          </a:xfrm>
-          <a:prstGeom prst="rect">
-            <a:avLst/>
-          </a:prstGeom>
-          <a:noFill/>
-          <a:ln/>
-        </p:spPr>
-        <p:txBody>
-          <a:bodyPr wrap="square" lIns="0" tIns="0" rIns="0" bIns="0" rtlCol="0" anchor="ctr"/>
-          <a:lstStyle/>
-          <a:p>
-            <a:pPr algn="ctr" indent="0" marL="0">
-              <a:buNone/>
-            </a:pPr>
-            <a:r>
-              <a:rPr lang="en-US" sz="2600" b="1" dirty="0">
-                <a:solidFill>
-                  <a:srgbClr val="C8963E"/>
-                </a:solidFill>
-                <a:latin typeface="Cambria" pitchFamily="34" charset="0"/>
-                <a:ea typeface="Cambria" pitchFamily="34" charset="-122"/>
-                <a:cs typeface="Cambria" pitchFamily="34" charset="-120"/>
-              </a:rPr>
-              <a:t>1</a:t>
-            </a:r>
-            <a:endParaRPr lang="en-US" sz="2600" dirty="0"/>
-          </a:p>
-        </p:txBody>
-      </p:sp>
-      <p:pic>
-        <p:nvPicPr>
-          <p:cNvPr id="7" name="Image 0" descr="preencoded.png">    </p:cNvPr>
-          <p:cNvPicPr>
-            <a:picLocks noChangeAspect="1"/>
-          </p:cNvPicPr>
-          <p:nvPr/>
-        </p:nvPicPr>
-        <p:blipFill>
-          <a:blip r:embed="rId1"/>
-          <a:stretch>
-            <a:fillRect/>
-          </a:stretch>
-        </p:blipFill>
-        <p:spPr>
-          <a:xfrm>
-            <a:off x="2240280" y="2148840"/>
-            <a:ext cx="594360" cy="594360"/>
-          </a:xfrm>
-          <a:prstGeom prst="rect">
-            <a:avLst/>
-          </a:prstGeom>
-        </p:spPr>
-      </p:pic>
-      <p:sp>
-        <p:nvSpPr>
-          <p:cNvPr id="8" name="Text 5"/>
-          <p:cNvSpPr txBox="1"/>
-          <p:nvPr/>
-        </p:nvSpPr>
-        <p:spPr>
-          <a:xfrm>
-            <a:off x="777240" y="2971800"/>
-            <a:ext cx="2194560" cy="731520"/>
-          </a:xfrm>
-          <a:prstGeom prst="rect">
-            <a:avLst/>
-          </a:prstGeom>
-          <a:noFill/>
-          <a:ln/>
-        </p:spPr>
-        <p:txBody>
-          <a:bodyPr wrap="square" lIns="0" tIns="0" rIns="0" bIns="0" rtlCol="0" anchor="t"/>
-          <a:lstStyle/>
-          <a:p>
-            <a:pPr indent="0" marL="0">
-              <a:buNone/>
-            </a:pPr>
-            <a:r>
-              <a:rPr lang="en-US" sz="1800" b="1" dirty="0">
-                <a:solidFill>
-                  <a:srgbClr val="3B2418"/>
-                </a:solidFill>
-                <a:latin typeface="Cambria" pitchFamily="34" charset="0"/>
-                <a:ea typeface="Cambria" pitchFamily="34" charset="-122"/>
-                <a:cs typeface="Cambria" pitchFamily="34" charset="-120"/>
-              </a:rPr>
-              <a:t>Brown the butter</a:t>
-            </a:r>
-            <a:endParaRPr lang="en-US" sz="1800" dirty="0"/>
-          </a:p>
-        </p:txBody>
-      </p:sp>
-      <p:sp>
-        <p:nvSpPr>
-          <p:cNvPr id="9" name="Text 6"/>
-          <p:cNvSpPr txBox="1"/>
-          <p:nvPr/>
-        </p:nvSpPr>
-        <p:spPr>
-          <a:xfrm>
-            <a:off x="777240" y="3749040"/>
-            <a:ext cx="2194560" cy="2377440"/>
-          </a:xfrm>
-          <a:prstGeom prst="rect">
-            <a:avLst/>
-          </a:prstGeom>
-          <a:noFill/>
-          <a:ln/>
-        </p:spPr>
-        <p:txBody>
-          <a:bodyPr wrap="square" lIns="0" tIns="0" rIns="0" bIns="0" rtlCol="0" anchor="t"/>
-          <a:lstStyle/>
-          <a:p>
-            <a:pPr indent="0" marL="0">
-              <a:buNone/>
-            </a:pPr>
-            <a:r>
-              <a:rPr lang="en-US" sz="1400" dirty="0">
-                <a:solidFill>
-                  <a:srgbClr val="2A1D15"/>
-                </a:solidFill>
-                <a:latin typeface="Calibri" pitchFamily="34" charset="0"/>
-                <a:ea typeface="Calibri" pitchFamily="34" charset="-122"/>
-                <a:cs typeface="Calibri" pitchFamily="34" charset="-120"/>
-              </a:rPr>
-              <a:t>Melt the butter in a small pan over medium heat. Keep cooking 5–7 min, swirling, until it foams, smells nutty and turns golden-brown. Strain and let cool until just warm.</a:t>
-            </a:r>
-            <a:endParaRPr lang="en-US" sz="1400" dirty="0"/>
-          </a:p>
-        </p:txBody>
-      </p:sp>
-      <p:sp>
-        <p:nvSpPr>
-          <p:cNvPr id="10" name="Shape 7"/>
-          <p:cNvSpPr/>
-          <p:nvPr/>
-        </p:nvSpPr>
-        <p:spPr>
-          <a:xfrm>
-            <a:off x="3383280" y="1783080"/>
-            <a:ext cx="2606040" cy="4480560"/>
-          </a:xfrm>
-          <a:prstGeom prst="roundRect">
-            <a:avLst>
-              <a:gd name="adj" fmla="val 4211"/>
-            </a:avLst>
-          </a:prstGeom>
-          <a:solidFill>
-            <a:srgbClr val="F6EEE2"/>
-          </a:solidFill>
-          <a:ln w="12700">
-            <a:solidFill>
-              <a:srgbClr val="F6EEE2"/>
-            </a:solidFill>
-            <a:prstDash val="solid"/>
-          </a:ln>
-        </p:spPr>
-      </p:sp>
-      <p:sp>
-        <p:nvSpPr>
-          <p:cNvPr id="11" name="Shape 8"/>
-          <p:cNvSpPr/>
-          <p:nvPr/>
-        </p:nvSpPr>
-        <p:spPr>
-          <a:xfrm>
-            <a:off x="3611880" y="2057400"/>
-            <a:ext cx="731520" cy="731520"/>
-          </a:xfrm>
-          <a:prstGeom prst="ellipse">
-            <a:avLst/>
-          </a:prstGeom>
-          <a:solidFill>
-            <a:srgbClr val="3B2418"/>
-          </a:solidFill>
-          <a:ln w="12700">
-            <a:solidFill>
-              <a:srgbClr val="3B2418"/>
-            </a:solidFill>
-            <a:prstDash val="solid"/>
-          </a:ln>
-        </p:spPr>
-      </p:sp>
-      <p:sp>
-        <p:nvSpPr>
-          <p:cNvPr id="12" name="Text 9"/>
-          <p:cNvSpPr txBox="1"/>
-          <p:nvPr/>
-        </p:nvSpPr>
-        <p:spPr>
-          <a:xfrm>
-            <a:off x="3611880" y="2057400"/>
-            <a:ext cx="731520" cy="731520"/>
-          </a:xfrm>
-          <a:prstGeom prst="rect">
-            <a:avLst/>
-          </a:prstGeom>
-          <a:noFill/>
-          <a:ln/>
-        </p:spPr>
-        <p:txBody>
-          <a:bodyPr wrap="square" lIns="0" tIns="0" rIns="0" bIns="0" rtlCol="0" anchor="ctr"/>
-          <a:lstStyle/>
-          <a:p>
-            <a:pPr algn="ctr" indent="0" marL="0">
-              <a:buNone/>
-            </a:pPr>
-            <a:r>
-              <a:rPr lang="en-US" sz="2600" b="1" dirty="0">
-                <a:solidFill>
-                  <a:srgbClr val="C8963E"/>
-                </a:solidFill>
-                <a:latin typeface="Cambria" pitchFamily="34" charset="0"/>
-                <a:ea typeface="Cambria" pitchFamily="34" charset="-122"/>
-                <a:cs typeface="Cambria" pitchFamily="34" charset="-120"/>
-              </a:rPr>
-              <a:t>2</a:t>
-            </a:r>
-            <a:endParaRPr lang="en-US" sz="2600" dirty="0"/>
-          </a:p>
-        </p:txBody>
-      </p:sp>
-      <p:pic>
-        <p:nvPicPr>
-          <p:cNvPr id="13" name="Image 1" descr="preencoded.png">    </p:cNvPr>
-          <p:cNvPicPr>
-            <a:picLocks noChangeAspect="1"/>
-          </p:cNvPicPr>
-          <p:nvPr/>
-        </p:nvPicPr>
-        <p:blipFill>
-          <a:blip r:embed="rId2"/>
-          <a:stretch>
-            <a:fillRect/>
-          </a:stretch>
-        </p:blipFill>
-        <p:spPr>
-          <a:xfrm>
-            <a:off x="5074920" y="2148840"/>
-            <a:ext cx="594360" cy="594360"/>
-          </a:xfrm>
-          <a:prstGeom prst="rect">
-            <a:avLst/>
-          </a:prstGeom>
-        </p:spPr>
-      </p:pic>
-      <p:sp>
-        <p:nvSpPr>
-          <p:cNvPr id="14" name="Text 10"/>
-          <p:cNvSpPr txBox="1"/>
-          <p:nvPr/>
-        </p:nvSpPr>
-        <p:spPr>
-          <a:xfrm>
-            <a:off x="3611880" y="2971800"/>
-            <a:ext cx="2194560" cy="731520"/>
-          </a:xfrm>
-          <a:prstGeom prst="rect">
-            <a:avLst/>
-          </a:prstGeom>
-          <a:noFill/>
-          <a:ln/>
-        </p:spPr>
-        <p:txBody>
-          <a:bodyPr wrap="square" lIns="0" tIns="0" rIns="0" bIns="0" rtlCol="0" anchor="t"/>
-          <a:lstStyle/>
-          <a:p>
-            <a:pPr indent="0" marL="0">
-              <a:buNone/>
-            </a:pPr>
-            <a:r>
-              <a:rPr lang="en-US" sz="1800" b="1" dirty="0">
-                <a:solidFill>
-                  <a:srgbClr val="3B2418"/>
-                </a:solidFill>
-                <a:latin typeface="Cambria" pitchFamily="34" charset="0"/>
-                <a:ea typeface="Cambria" pitchFamily="34" charset="-122"/>
-                <a:cs typeface="Cambria" pitchFamily="34" charset="-120"/>
-              </a:rPr>
-              <a:t>Prepare the oven &amp; moulds</a:t>
-            </a:r>
-            <a:endParaRPr lang="en-US" sz="1800" dirty="0"/>
-          </a:p>
-        </p:txBody>
-      </p:sp>
-      <p:sp>
-        <p:nvSpPr>
-          <p:cNvPr id="15" name="Text 11"/>
-          <p:cNvSpPr txBox="1"/>
-          <p:nvPr/>
-        </p:nvSpPr>
-        <p:spPr>
-          <a:xfrm>
-            <a:off x="3611880" y="3749040"/>
-            <a:ext cx="2194560" cy="2377440"/>
-          </a:xfrm>
-          <a:prstGeom prst="rect">
-            <a:avLst/>
-          </a:prstGeom>
-          <a:noFill/>
-          <a:ln/>
-        </p:spPr>
-        <p:txBody>
-          <a:bodyPr wrap="square" lIns="0" tIns="0" rIns="0" bIns="0" rtlCol="0" anchor="t"/>
-          <a:lstStyle/>
-          <a:p>
-            <a:pPr indent="0" marL="0">
-              <a:buNone/>
-            </a:pPr>
-            <a:r>
-              <a:rPr lang="en-US" sz="1400" dirty="0">
-                <a:solidFill>
-                  <a:srgbClr val="2A1D15"/>
-                </a:solidFill>
-                <a:latin typeface="Calibri" pitchFamily="34" charset="0"/>
-                <a:ea typeface="Calibri" pitchFamily="34" charset="-122"/>
-                <a:cs typeface="Calibri" pitchFamily="34" charset="-120"/>
-              </a:rPr>
-              <a:t>Preheat to 200°C / 400°F. Brush the moulds with soft butter so the cakes release easily.</a:t>
-            </a:r>
-            <a:endParaRPr lang="en-US" sz="1400" dirty="0"/>
-          </a:p>
-        </p:txBody>
-      </p:sp>
-      <p:sp>
-        <p:nvSpPr>
-          <p:cNvPr id="16" name="Shape 12"/>
-          <p:cNvSpPr/>
-          <p:nvPr/>
-        </p:nvSpPr>
-        <p:spPr>
-          <a:xfrm>
-            <a:off x="6217920" y="1783080"/>
-            <a:ext cx="2606040" cy="4480560"/>
-          </a:xfrm>
-          <a:prstGeom prst="roundRect">
-            <a:avLst>
-              <a:gd name="adj" fmla="val 4211"/>
-            </a:avLst>
-          </a:prstGeom>
-          <a:solidFill>
-            <a:srgbClr val="F6EEE2"/>
-          </a:solidFill>
-          <a:ln w="12700">
-            <a:solidFill>
-              <a:srgbClr val="F6EEE2"/>
-            </a:solidFill>
-            <a:prstDash val="solid"/>
-          </a:ln>
-        </p:spPr>
-      </p:sp>
-      <p:sp>
-        <p:nvSpPr>
-          <p:cNvPr id="17" name="Shape 13"/>
-          <p:cNvSpPr/>
-          <p:nvPr/>
-        </p:nvSpPr>
-        <p:spPr>
-          <a:xfrm>
-            <a:off x="6446520" y="2057400"/>
-            <a:ext cx="731520" cy="731520"/>
-          </a:xfrm>
-          <a:prstGeom prst="ellipse">
-            <a:avLst/>
-          </a:prstGeom>
-          <a:solidFill>
-            <a:srgbClr val="3B2418"/>
-          </a:solidFill>
-          <a:ln w="12700">
-            <a:solidFill>
-              <a:srgbClr val="3B2418"/>
-            </a:solidFill>
-            <a:prstDash val="solid"/>
-          </a:ln>
-        </p:spPr>
-      </p:sp>
-      <p:sp>
-        <p:nvSpPr>
-          <p:cNvPr id="18" name="Text 14"/>
-          <p:cNvSpPr txBox="1"/>
-          <p:nvPr/>
-        </p:nvSpPr>
-        <p:spPr>
-          <a:xfrm>
-            <a:off x="6446520" y="2057400"/>
-            <a:ext cx="731520" cy="731520"/>
-          </a:xfrm>
-          <a:prstGeom prst="rect">
-            <a:avLst/>
-          </a:prstGeom>
-          <a:noFill/>
-          <a:ln/>
-        </p:spPr>
-        <p:txBody>
-          <a:bodyPr wrap="square" lIns="0" tIns="0" rIns="0" bIns="0" rtlCol="0" anchor="ctr"/>
-          <a:lstStyle/>
-          <a:p>
-            <a:pPr algn="ctr" indent="0" marL="0">
-              <a:buNone/>
-            </a:pPr>
-            <a:r>
-              <a:rPr lang="en-US" sz="2600" b="1" dirty="0">
-                <a:solidFill>
-                  <a:srgbClr val="C8963E"/>
-                </a:solidFill>
-                <a:latin typeface="Cambria" pitchFamily="34" charset="0"/>
-                <a:ea typeface="Cambria" pitchFamily="34" charset="-122"/>
-                <a:cs typeface="Cambria" pitchFamily="34" charset="-120"/>
-              </a:rPr>
-              <a:t>3</a:t>
-            </a:r>
-            <a:endParaRPr lang="en-US" sz="2600" dirty="0"/>
-          </a:p>
-        </p:txBody>
-      </p:sp>
-      <p:pic>
-        <p:nvPicPr>
-          <p:cNvPr id="19" name="Image 2" descr="preencoded.png">    </p:cNvPr>
-          <p:cNvPicPr>
-            <a:picLocks noChangeAspect="1"/>
-          </p:cNvPicPr>
-          <p:nvPr/>
-        </p:nvPicPr>
-        <p:blipFill>
-          <a:blip r:embed="rId3"/>
-          <a:stretch>
-            <a:fillRect/>
-          </a:stretch>
-        </p:blipFill>
-        <p:spPr>
-          <a:xfrm>
-            <a:off x="7909560" y="2148840"/>
-            <a:ext cx="594360" cy="594360"/>
-          </a:xfrm>
-          <a:prstGeom prst="rect">
-            <a:avLst/>
-          </a:prstGeom>
-        </p:spPr>
-      </p:pic>
-      <p:sp>
-        <p:nvSpPr>
-          <p:cNvPr id="20" name="Text 15"/>
-          <p:cNvSpPr txBox="1"/>
-          <p:nvPr/>
-        </p:nvSpPr>
-        <p:spPr>
-          <a:xfrm>
-            <a:off x="6446520" y="2971800"/>
-            <a:ext cx="2194560" cy="731520"/>
-          </a:xfrm>
-          <a:prstGeom prst="rect">
-            <a:avLst/>
-          </a:prstGeom>
-          <a:noFill/>
-          <a:ln/>
-        </p:spPr>
-        <p:txBody>
-          <a:bodyPr wrap="square" lIns="0" tIns="0" rIns="0" bIns="0" rtlCol="0" anchor="t"/>
-          <a:lstStyle/>
-          <a:p>
-            <a:pPr indent="0" marL="0">
-              <a:buNone/>
-            </a:pPr>
-            <a:r>
-              <a:rPr lang="en-US" sz="1800" b="1" dirty="0">
-                <a:solidFill>
-                  <a:srgbClr val="3B2418"/>
-                </a:solidFill>
-                <a:latin typeface="Cambria" pitchFamily="34" charset="0"/>
-                <a:ea typeface="Cambria" pitchFamily="34" charset="-122"/>
-                <a:cs typeface="Cambria" pitchFamily="34" charset="-120"/>
-              </a:rPr>
-              <a:t>Mix the dry ingredients</a:t>
-            </a:r>
-            <a:endParaRPr lang="en-US" sz="1800" dirty="0"/>
-          </a:p>
-        </p:txBody>
-      </p:sp>
-      <p:sp>
-        <p:nvSpPr>
-          <p:cNvPr id="21" name="Text 16"/>
-          <p:cNvSpPr txBox="1"/>
-          <p:nvPr/>
-        </p:nvSpPr>
-        <p:spPr>
-          <a:xfrm>
-            <a:off x="6446520" y="3749040"/>
-            <a:ext cx="2194560" cy="2377440"/>
-          </a:xfrm>
-          <a:prstGeom prst="rect">
-            <a:avLst/>
-          </a:prstGeom>
-          <a:noFill/>
-          <a:ln/>
-        </p:spPr>
-        <p:txBody>
-          <a:bodyPr wrap="square" lIns="0" tIns="0" rIns="0" bIns="0" rtlCol="0" anchor="t"/>
-          <a:lstStyle/>
-          <a:p>
-            <a:pPr indent="0" marL="0">
-              <a:buNone/>
-            </a:pPr>
-            <a:r>
-              <a:rPr lang="en-US" sz="1400" dirty="0">
-                <a:solidFill>
-                  <a:srgbClr val="2A1D15"/>
-                </a:solidFill>
-                <a:latin typeface="Calibri" pitchFamily="34" charset="0"/>
-                <a:ea typeface="Calibri" pitchFamily="34" charset="-122"/>
-                <a:cs typeface="Calibri" pitchFamily="34" charset="-120"/>
-              </a:rPr>
-              <a:t>Sift the almond flour, plain flour, powdered sugar and salt into a bowl to remove lumps.</a:t>
-            </a:r>
-            <a:endParaRPr lang="en-US" sz="1400" dirty="0"/>
-          </a:p>
-        </p:txBody>
-      </p:sp>
-      <p:sp>
-        <p:nvSpPr>
-          <p:cNvPr id="22" name="Shape 17"/>
-          <p:cNvSpPr/>
-          <p:nvPr/>
-        </p:nvSpPr>
-        <p:spPr>
-          <a:xfrm>
-            <a:off x="9052560" y="1783080"/>
-            <a:ext cx="2606040" cy="4480560"/>
-          </a:xfrm>
-          <a:prstGeom prst="roundRect">
-            <a:avLst>
-              <a:gd name="adj" fmla="val 4211"/>
-            </a:avLst>
-          </a:prstGeom>
-          <a:solidFill>
-            <a:srgbClr val="F6EEE2"/>
-          </a:solidFill>
-          <a:ln w="12700">
-            <a:solidFill>
-              <a:srgbClr val="F6EEE2"/>
-            </a:solidFill>
-            <a:prstDash val="solid"/>
-          </a:ln>
-        </p:spPr>
-      </p:sp>
-      <p:sp>
-        <p:nvSpPr>
-          <p:cNvPr id="23" name="Shape 18"/>
-          <p:cNvSpPr/>
-          <p:nvPr/>
-        </p:nvSpPr>
-        <p:spPr>
-          <a:xfrm>
-            <a:off x="9281160" y="2057400"/>
-            <a:ext cx="731520" cy="731520"/>
-          </a:xfrm>
-          <a:prstGeom prst="ellipse">
-            <a:avLst/>
-          </a:prstGeom>
-          <a:solidFill>
-            <a:srgbClr val="3B2418"/>
-          </a:solidFill>
-          <a:ln w="12700">
-            <a:solidFill>
-              <a:srgbClr val="3B2418"/>
-            </a:solidFill>
-            <a:prstDash val="solid"/>
-          </a:ln>
-        </p:spPr>
-      </p:sp>
-      <p:sp>
-        <p:nvSpPr>
-          <p:cNvPr id="24" name="Text 19"/>
-          <p:cNvSpPr txBox="1"/>
-          <p:nvPr/>
-        </p:nvSpPr>
-        <p:spPr>
-          <a:xfrm>
-            <a:off x="9281160" y="2057400"/>
-            <a:ext cx="731520" cy="731520"/>
-          </a:xfrm>
-          <a:prstGeom prst="rect">
-            <a:avLst/>
-          </a:prstGeom>
-          <a:noFill/>
-          <a:ln/>
-        </p:spPr>
-        <p:txBody>
-          <a:bodyPr wrap="square" lIns="0" tIns="0" rIns="0" bIns="0" rtlCol="0" anchor="ctr"/>
-          <a:lstStyle/>
-          <a:p>
-            <a:pPr algn="ctr" indent="0" marL="0">
-              <a:buNone/>
-            </a:pPr>
-            <a:r>
-              <a:rPr lang="en-US" sz="2600" b="1" dirty="0">
-                <a:solidFill>
-                  <a:srgbClr val="C8963E"/>
-                </a:solidFill>
-                <a:latin typeface="Cambria" pitchFamily="34" charset="0"/>
-                <a:ea typeface="Cambria" pitchFamily="34" charset="-122"/>
-                <a:cs typeface="Cambria" pitchFamily="34" charset="-120"/>
-              </a:rPr>
-              <a:t>4</a:t>
-            </a:r>
-            <a:endParaRPr lang="en-US" sz="2600" dirty="0"/>
-          </a:p>
-        </p:txBody>
-      </p:sp>
-      <p:pic>
-        <p:nvPicPr>
-          <p:cNvPr id="25" name="Image 3" descr="preencoded.png">    </p:cNvPr>
-          <p:cNvPicPr>
-            <a:picLocks noChangeAspect="1"/>
-          </p:cNvPicPr>
-          <p:nvPr/>
-        </p:nvPicPr>
-        <p:blipFill>
-          <a:blip r:embed="rId4"/>
-          <a:stretch>
-            <a:fillRect/>
-          </a:stretch>
-        </p:blipFill>
-        <p:spPr>
-          <a:xfrm>
-            <a:off x="10744200" y="2148840"/>
-            <a:ext cx="594360" cy="594360"/>
-          </a:xfrm>
-          <a:prstGeom prst="rect">
-            <a:avLst/>
-          </a:prstGeom>
-        </p:spPr>
-      </p:pic>
-      <p:sp>
-        <p:nvSpPr>
-          <p:cNvPr id="26" name="Text 20"/>
-          <p:cNvSpPr txBox="1"/>
-          <p:nvPr/>
-        </p:nvSpPr>
-        <p:spPr>
-          <a:xfrm>
-            <a:off x="9281160" y="2971800"/>
-            <a:ext cx="2194560" cy="731520"/>
-          </a:xfrm>
-          <a:prstGeom prst="rect">
-            <a:avLst/>
-          </a:prstGeom>
-          <a:noFill/>
-          <a:ln/>
-        </p:spPr>
-        <p:txBody>
-          <a:bodyPr wrap="square" lIns="0" tIns="0" rIns="0" bIns="0" rtlCol="0" anchor="t"/>
-          <a:lstStyle/>
-          <a:p>
-            <a:pPr indent="0" marL="0">
-              <a:buNone/>
-            </a:pPr>
-            <a:r>
-              <a:rPr lang="en-US" sz="1800" b="1" dirty="0">
-                <a:solidFill>
-                  <a:srgbClr val="3B2418"/>
-                </a:solidFill>
-                <a:latin typeface="Cambria" pitchFamily="34" charset="0"/>
-                <a:ea typeface="Cambria" pitchFamily="34" charset="-122"/>
-                <a:cs typeface="Cambria" pitchFamily="34" charset="-120"/>
-              </a:rPr>
-              <a:t>Add the egg whites</a:t>
-            </a:r>
-            <a:endParaRPr lang="en-US" sz="1800" dirty="0"/>
-          </a:p>
-        </p:txBody>
-      </p:sp>
-      <p:sp>
-        <p:nvSpPr>
-          <p:cNvPr id="27" name="Text 21"/>
-          <p:cNvSpPr txBox="1"/>
-          <p:nvPr/>
-        </p:nvSpPr>
-        <p:spPr>
-          <a:xfrm>
-            <a:off x="9281160" y="3749040"/>
-            <a:ext cx="2194560" cy="2377440"/>
-          </a:xfrm>
-          <a:prstGeom prst="rect">
-            <a:avLst/>
-          </a:prstGeom>
-          <a:noFill/>
-          <a:ln/>
-        </p:spPr>
-        <p:txBody>
-          <a:bodyPr wrap="square" lIns="0" tIns="0" rIns="0" bIns="0" rtlCol="0" anchor="t"/>
-          <a:lstStyle/>
-          <a:p>
-            <a:pPr indent="0" marL="0">
-              <a:buNone/>
-            </a:pPr>
-            <a:r>
-              <a:rPr lang="en-US" sz="1400" dirty="0">
-                <a:solidFill>
-                  <a:srgbClr val="2A1D15"/>
-                </a:solidFill>
-                <a:latin typeface="Calibri" pitchFamily="34" charset="0"/>
-                <a:ea typeface="Calibri" pitchFamily="34" charset="-122"/>
-                <a:cs typeface="Calibri" pitchFamily="34" charset="-120"/>
-              </a:rPr>
-              <a:t>Pour in the egg whites and stir with a whisk until smooth. Don't beat them to foam — just combine.</a:t>
-            </a:r>
-            <a:endParaRPr lang="en-US" sz="1400" dirty="0"/>
           </a:p>
         </p:txBody>
       </p:sp>
@@ -8372,7 +8291,7 @@
                 <a:ea typeface="Cambria" pitchFamily="34" charset="-122"/>
                 <a:cs typeface="Cambria" pitchFamily="34" charset="-120"/>
               </a:rPr>
-              <a:t>How to Make Them (2/2)</a:t>
+              <a:t>How to Make Them (1/2)</a:t>
             </a:r>
             <a:endParaRPr lang="en-US" sz="3800" dirty="0"/>
           </a:p>
@@ -8411,7 +8330,7 @@
                 <a:ea typeface="Calibri" pitchFamily="34" charset="-122"/>
                 <a:cs typeface="Calibri" pitchFamily="34" charset="-120"/>
               </a:rPr>
-              <a:t>Steps 5–8: finish, fill and bake</a:t>
+              <a:t>Steps 1–4: brown butter and batter base</a:t>
             </a:r>
             <a:endParaRPr lang="en-US" sz="1600" dirty="0"/>
           </a:p>
@@ -8502,7 +8421,7 @@
                 <a:ea typeface="Cambria" pitchFamily="34" charset="-122"/>
                 <a:cs typeface="Cambria" pitchFamily="34" charset="-120"/>
               </a:rPr>
-              <a:t>5</a:t>
+              <a:t>1</a:t>
             </a:r>
             <a:endParaRPr lang="en-US" sz="2600" dirty="0"/>
           </a:p>
@@ -8565,7 +8484,7 @@
                 <a:ea typeface="Cambria" pitchFamily="34" charset="-122"/>
                 <a:cs typeface="Cambria" pitchFamily="34" charset="-120"/>
               </a:rPr>
-              <a:t>Add the brown butter</a:t>
+              <a:t>Brown the butter</a:t>
             </a:r>
             <a:endParaRPr lang="en-US" sz="1800" dirty="0"/>
           </a:p>
@@ -8604,7 +8523,7 @@
                 <a:ea typeface="Calibri" pitchFamily="34" charset="-122"/>
                 <a:cs typeface="Calibri" pitchFamily="34" charset="-120"/>
               </a:rPr>
-              <a:t>Slowly pour in the warm brown butter (and vanilla), whisking until the batter is glossy.</a:t>
+              <a:t>Melt the butter in a small pan over medium heat. Keep cooking 5–7 min, swirling, until it foams, smells nutty and turns golden-brown. Strain and let cool until just warm.</a:t>
             </a:r>
             <a:endParaRPr lang="en-US" sz="1400" dirty="0"/>
           </a:p>
@@ -8695,7 +8614,7 @@
                 <a:ea typeface="Cambria" pitchFamily="34" charset="-122"/>
                 <a:cs typeface="Cambria" pitchFamily="34" charset="-120"/>
               </a:rPr>
-              <a:t>6</a:t>
+              <a:t>2</a:t>
             </a:r>
             <a:endParaRPr lang="en-US" sz="2600" dirty="0"/>
           </a:p>
@@ -8758,7 +8677,7 @@
                 <a:ea typeface="Cambria" pitchFamily="34" charset="-122"/>
                 <a:cs typeface="Cambria" pitchFamily="34" charset="-120"/>
               </a:rPr>
-              <a:t>Rest the batter</a:t>
+              <a:t>Prepare the oven &amp; moulds</a:t>
             </a:r>
             <a:endParaRPr lang="en-US" sz="1800" dirty="0"/>
           </a:p>
@@ -8797,7 +8716,7 @@
                 <a:ea typeface="Calibri" pitchFamily="34" charset="-122"/>
                 <a:cs typeface="Calibri" pitchFamily="34" charset="-120"/>
               </a:rPr>
-              <a:t>Chill for 30 minutes (or up to overnight). This gives a better rise and texture.</a:t>
+              <a:t>Preheat to 200°C / 400°F. Brush the moulds with soft butter so the cakes release easily.</a:t>
             </a:r>
             <a:endParaRPr lang="en-US" sz="1400" dirty="0"/>
           </a:p>
@@ -8888,7 +8807,7 @@
                 <a:ea typeface="Cambria" pitchFamily="34" charset="-122"/>
                 <a:cs typeface="Cambria" pitchFamily="34" charset="-120"/>
               </a:rPr>
-              <a:t>7</a:t>
+              <a:t>3</a:t>
             </a:r>
             <a:endParaRPr lang="en-US" sz="2600" dirty="0"/>
           </a:p>
@@ -8951,7 +8870,7 @@
                 <a:ea typeface="Cambria" pitchFamily="34" charset="-122"/>
                 <a:cs typeface="Cambria" pitchFamily="34" charset="-120"/>
               </a:rPr>
-              <a:t>Fill &amp; top</a:t>
+              <a:t>Mix the dry ingredients</a:t>
             </a:r>
             <a:endParaRPr lang="en-US" sz="1800" dirty="0"/>
           </a:p>
@@ -8990,7 +8909,7 @@
                 <a:ea typeface="Calibri" pitchFamily="34" charset="-122"/>
                 <a:cs typeface="Calibri" pitchFamily="34" charset="-120"/>
               </a:rPr>
-              <a:t>Spoon or pipe the batter into the moulds about ¾ full. Add flaked almonds or a raspberry if you like.</a:t>
+              <a:t>Sift the almond flour, plain flour, powdered sugar and salt into a bowl to remove lumps.</a:t>
             </a:r>
             <a:endParaRPr lang="en-US" sz="1400" dirty="0"/>
           </a:p>
@@ -9081,7 +9000,7 @@
                 <a:ea typeface="Cambria" pitchFamily="34" charset="-122"/>
                 <a:cs typeface="Cambria" pitchFamily="34" charset="-120"/>
               </a:rPr>
-              <a:t>8</a:t>
+              <a:t>4</a:t>
             </a:r>
             <a:endParaRPr lang="en-US" sz="2600" dirty="0"/>
           </a:p>
@@ -9144,7 +9063,7 @@
                 <a:ea typeface="Cambria" pitchFamily="34" charset="-122"/>
                 <a:cs typeface="Cambria" pitchFamily="34" charset="-120"/>
               </a:rPr>
-              <a:t>Bake &amp; cool</a:t>
+              <a:t>Add the egg whites</a:t>
             </a:r>
             <a:endParaRPr lang="en-US" sz="1800" dirty="0"/>
           </a:p>
@@ -9183,7 +9102,7 @@
                 <a:ea typeface="Calibri" pitchFamily="34" charset="-122"/>
                 <a:cs typeface="Calibri" pitchFamily="34" charset="-120"/>
               </a:rPr>
-              <a:t>Bake 12–15 min until the edges are golden and the tops spring back. Cool 5 min, then unmould onto a rack.</a:t>
+              <a:t>Pour in the egg whites and stir with a whisk until smooth. Don't beat them to foam — just combine.</a:t>
             </a:r>
             <a:endParaRPr lang="en-US" sz="1400" dirty="0"/>
           </a:p>
@@ -9254,7 +9173,7 @@
                 <a:ea typeface="Cambria" pitchFamily="34" charset="-122"/>
                 <a:cs typeface="Cambria" pitchFamily="34" charset="-120"/>
               </a:rPr>
-              <a:t>Tips &amp; Variations</a:t>
+              <a:t>How to Make Them (2/2)</a:t>
             </a:r>
             <a:endParaRPr lang="en-US" sz="3800" dirty="0"/>
           </a:p>
@@ -9262,18 +9181,57 @@
       </p:sp>
       <p:sp>
         <p:nvSpPr>
-          <p:cNvPr id="3" name="Shape 1"/>
+          <p:cNvPr id="3" name="Text 1"/>
+          <p:cNvSpPr txBox="1"/>
+          <p:nvPr/>
+        </p:nvSpPr>
+        <p:spPr>
+          <a:xfrm>
+            <a:off x="548640" y="1051560"/>
+            <a:ext cx="11064240" cy="411480"/>
+          </a:xfrm>
+          <a:prstGeom prst="rect">
+            <a:avLst/>
+          </a:prstGeom>
+          <a:noFill/>
+          <a:ln/>
+        </p:spPr>
+        <p:txBody>
+          <a:bodyPr wrap="square" lIns="0" tIns="0" rIns="0" bIns="0" rtlCol="0" anchor="ctr"/>
+          <a:lstStyle/>
+          <a:p>
+            <a:pPr indent="0" marL="0">
+              <a:buNone/>
+            </a:pPr>
+            <a:r>
+              <a:rPr lang="en-US" sz="1600" i="1" dirty="0">
+                <a:solidFill>
+                  <a:srgbClr val="6E5A4B"/>
+                </a:solidFill>
+                <a:latin typeface="Calibri" pitchFamily="34" charset="0"/>
+                <a:ea typeface="Calibri" pitchFamily="34" charset="-122"/>
+                <a:cs typeface="Calibri" pitchFamily="34" charset="-120"/>
+              </a:rPr>
+              <a:t>Steps 5–8: finish, fill and bake</a:t>
+            </a:r>
+            <a:endParaRPr lang="en-US" sz="1600" dirty="0"/>
+          </a:p>
+        </p:txBody>
+      </p:sp>
+      <p:sp>
+        <p:nvSpPr>
+          <p:cNvPr id="4" name="Shape 2"/>
           <p:cNvSpPr/>
           <p:nvPr/>
         </p:nvSpPr>
         <p:spPr>
           <a:xfrm>
-            <a:off x="548640" y="1371600"/>
-            <a:ext cx="5303520" cy="4846320"/>
+            <a:off x="548640" y="1783080"/>
+            <a:ext cx="2606040" cy="4480560"/>
           </a:xfrm>
           <a:prstGeom prst="roundRect">
             <a:avLst>
-              <a:gd name="adj" fmla="val 2264"/>
+              <a:gd name="adj" fmla="val 4211"/>
             </a:avLst>
           </a:prstGeom>
           <a:solidFill>
@@ -9289,14 +9247,14 @@
       </p:sp>
       <p:sp>
         <p:nvSpPr>
-          <p:cNvPr id="4" name="Shape 2"/>
+          <p:cNvPr id="5" name="Shape 3"/>
           <p:cNvSpPr/>
           <p:nvPr/>
         </p:nvSpPr>
         <p:spPr>
           <a:xfrm>
-            <a:off x="868680" y="1645920"/>
-            <a:ext cx="685800" cy="685800"/>
+            <a:off x="777240" y="2057400"/>
+            <a:ext cx="731520" cy="731520"/>
           </a:xfrm>
           <a:prstGeom prst="ellipse">
             <a:avLst/>
@@ -9312,9 +9270,48 @@
           </a:ln>
         </p:spPr>
       </p:sp>
+      <p:sp>
+        <p:nvSpPr>
+          <p:cNvPr id="6" name="Text 4"/>
+          <p:cNvSpPr txBox="1"/>
+          <p:nvPr/>
+        </p:nvSpPr>
+        <p:spPr>
+          <a:xfrm>
+            <a:off x="777240" y="2057400"/>
+            <a:ext cx="731520" cy="731520"/>
+          </a:xfrm>
+          <a:prstGeom prst="rect">
+            <a:avLst/>
+          </a:prstGeom>
+          <a:noFill/>
+          <a:ln/>
+        </p:spPr>
+        <p:txBody>
+          <a:bodyPr wrap="square" lIns="0" tIns="0" rIns="0" bIns="0" rtlCol="0" anchor="ctr"/>
+          <a:lstStyle/>
+          <a:p>
+            <a:pPr algn="ctr" indent="0" marL="0">
+              <a:buNone/>
+            </a:pPr>
+            <a:r>
+              <a:rPr lang="en-US" sz="2600" b="1" dirty="0">
+                <a:solidFill>
+                  <a:srgbClr val="C8963E"/>
+                </a:solidFill>
+                <a:latin typeface="Cambria" pitchFamily="34" charset="0"/>
+                <a:ea typeface="Cambria" pitchFamily="34" charset="-122"/>
+                <a:cs typeface="Cambria" pitchFamily="34" charset="-120"/>
+              </a:rPr>
+              <a:t>5</a:t>
+            </a:r>
+            <a:endParaRPr lang="en-US" sz="2600" dirty="0"/>
+          </a:p>
+        </p:txBody>
+      </p:sp>
       <p:pic>
         <p:nvPicPr>
-          <p:cNvPr id="5" name="Image 0" descr="preencoded.png">    </p:cNvPr>
+          <p:cNvPr id="7" name="Image 0" descr="preencoded.png">    </p:cNvPr>
           <p:cNvPicPr>
             <a:picLocks noChangeAspect="1"/>
           </p:cNvPicPr>
@@ -9328,8 +9325,8 @@
         </p:blipFill>
         <p:spPr>
           <a:xfrm>
-            <a:off x="1040130" y="1817370"/>
-            <a:ext cx="342900" cy="342900"/>
+            <a:off x="2240280" y="2148840"/>
+            <a:ext cx="594360" cy="594360"/>
           </a:xfrm>
           <a:prstGeom prst="rect">
             <a:avLst/>
@@ -9338,30 +9335,30 @@
       </p:pic>
       <p:sp>
         <p:nvSpPr>
-          <p:cNvPr id="6" name="Text 3"/>
-          <p:cNvSpPr txBox="1"/>
-          <p:nvPr/>
-        </p:nvSpPr>
-        <p:spPr>
-          <a:xfrm>
-            <a:off x="1737360" y="1645920"/>
-            <a:ext cx="3840480" cy="685800"/>
-          </a:xfrm>
-          <a:prstGeom prst="rect">
-            <a:avLst/>
-          </a:prstGeom>
-          <a:noFill/>
-          <a:ln/>
-        </p:spPr>
-        <p:txBody>
-          <a:bodyPr wrap="square" lIns="0" tIns="0" rIns="0" bIns="0" rtlCol="0" anchor="ctr"/>
-          <a:lstStyle/>
-          <a:p>
-            <a:pPr indent="0" marL="0">
-              <a:buNone/>
-            </a:pPr>
-            <a:r>
-              <a:rPr lang="en-US" sz="2200" b="1" dirty="0">
+          <p:cNvPr id="8" name="Text 5"/>
+          <p:cNvSpPr txBox="1"/>
+          <p:nvPr/>
+        </p:nvSpPr>
+        <p:spPr>
+          <a:xfrm>
+            <a:off x="777240" y="2971800"/>
+            <a:ext cx="2194560" cy="731520"/>
+          </a:xfrm>
+          <a:prstGeom prst="rect">
+            <a:avLst/>
+          </a:prstGeom>
+          <a:noFill/>
+          <a:ln/>
+        </p:spPr>
+        <p:txBody>
+          <a:bodyPr wrap="square" lIns="0" tIns="0" rIns="0" bIns="0" rtlCol="0" anchor="t"/>
+          <a:lstStyle/>
+          <a:p>
+            <a:pPr indent="0" marL="0">
+              <a:buNone/>
+            </a:pPr>
+            <a:r>
+              <a:rPr lang="en-US" sz="1800" b="1" dirty="0">
                 <a:solidFill>
                   <a:srgbClr val="3B2418"/>
                 </a:solidFill>
@@ -9369,22 +9366,22 @@
                 <a:ea typeface="Cambria" pitchFamily="34" charset="-122"/>
                 <a:cs typeface="Cambria" pitchFamily="34" charset="-120"/>
               </a:rPr>
-              <a:t>Baker's tips</a:t>
-            </a:r>
-            <a:endParaRPr lang="en-US" sz="2200" dirty="0"/>
-          </a:p>
-        </p:txBody>
-      </p:sp>
-      <p:sp>
-        <p:nvSpPr>
-          <p:cNvPr id="7" name="Text 4"/>
-          <p:cNvSpPr txBox="1"/>
-          <p:nvPr/>
-        </p:nvSpPr>
-        <p:spPr>
-          <a:xfrm>
-            <a:off x="868680" y="2560320"/>
-            <a:ext cx="4663440" cy="3474720"/>
+              <a:t>Add the brown butter</a:t>
+            </a:r>
+            <a:endParaRPr lang="en-US" sz="1800" dirty="0"/>
+          </a:p>
+        </p:txBody>
+      </p:sp>
+      <p:sp>
+        <p:nvSpPr>
+          <p:cNvPr id="9" name="Text 6"/>
+          <p:cNvSpPr txBox="1"/>
+          <p:nvPr/>
+        </p:nvSpPr>
+        <p:spPr>
+          <a:xfrm>
+            <a:off x="777240" y="3749040"/>
+            <a:ext cx="2194560" cy="2377440"/>
           </a:xfrm>
           <a:prstGeom prst="rect">
             <a:avLst/>
@@ -9396,15 +9393,11 @@
           <a:bodyPr wrap="square" lIns="0" tIns="0" rIns="0" bIns="0" rtlCol="0" anchor="t"/>
           <a:lstStyle/>
           <a:p>
-            <a:pPr marL="342900" indent="-342900">
-              <a:spcAft>
-                <a:spcPts val="1000"/>
-              </a:spcAft>
-              <a:buSzPct val="100000"/>
-              <a:buChar char="•"/>
-            </a:pPr>
-            <a:r>
-              <a:rPr lang="en-US" sz="1500" dirty="0">
+            <a:pPr indent="0" marL="0">
+              <a:buNone/>
+            </a:pPr>
+            <a:r>
+              <a:rPr lang="en-US" sz="1400" dirty="0">
                 <a:solidFill>
                   <a:srgbClr val="2A1D15"/>
                 </a:solidFill>
@@ -9412,103 +9405,106 @@
                 <a:ea typeface="Calibri" pitchFamily="34" charset="-122"/>
                 <a:cs typeface="Calibri" pitchFamily="34" charset="-120"/>
               </a:rPr>
-              <a:t>Watch the butter closely — it goes from brown to burnt in seconds.</a:t>
-            </a:r>
-            <a:endParaRPr lang="en-US" sz="1500" dirty="0"/>
-          </a:p>
-          <a:p>
-            <a:pPr marL="342900" indent="-342900">
-              <a:spcAft>
-                <a:spcPts val="1000"/>
-              </a:spcAft>
-              <a:buSzPct val="100000"/>
-              <a:buChar char="•"/>
-            </a:pPr>
-            <a:r>
-              <a:rPr lang="en-US" sz="1500" dirty="0">
-                <a:solidFill>
-                  <a:srgbClr val="2A1D15"/>
-                </a:solidFill>
-                <a:latin typeface="Calibri" pitchFamily="34" charset="0"/>
-                <a:ea typeface="Calibri" pitchFamily="34" charset="-122"/>
-                <a:cs typeface="Calibri" pitchFamily="34" charset="-120"/>
-              </a:rPr>
-              <a:t>Leftover yolks? Use them for crème brûlée or custard.</a:t>
-            </a:r>
-            <a:endParaRPr lang="en-US" sz="1500" dirty="0"/>
-          </a:p>
-          <a:p>
-            <a:pPr marL="342900" indent="-342900">
-              <a:spcAft>
-                <a:spcPts val="1000"/>
-              </a:spcAft>
-              <a:buSzPct val="100000"/>
-              <a:buChar char="•"/>
-            </a:pPr>
-            <a:r>
-              <a:rPr lang="en-US" sz="1500" dirty="0">
-                <a:solidFill>
-                  <a:srgbClr val="2A1D15"/>
-                </a:solidFill>
-                <a:latin typeface="Calibri" pitchFamily="34" charset="0"/>
-                <a:ea typeface="Calibri" pitchFamily="34" charset="-122"/>
-                <a:cs typeface="Calibri" pitchFamily="34" charset="-120"/>
-              </a:rPr>
-              <a:t>Don't overfill the moulds; the cakes puff up in the oven.</a:t>
-            </a:r>
-            <a:endParaRPr lang="en-US" sz="1500" dirty="0"/>
-          </a:p>
-          <a:p>
-            <a:pPr marL="342900" indent="-342900">
-              <a:spcAft>
-                <a:spcPts val="1000"/>
-              </a:spcAft>
-              <a:buSzPct val="100000"/>
-              <a:buChar char="•"/>
-            </a:pPr>
-            <a:r>
-              <a:rPr lang="en-US" sz="1500" dirty="0">
-                <a:solidFill>
-                  <a:srgbClr val="2A1D15"/>
-                </a:solidFill>
-                <a:latin typeface="Calibri" pitchFamily="34" charset="0"/>
-                <a:ea typeface="Calibri" pitchFamily="34" charset="-122"/>
-                <a:cs typeface="Calibri" pitchFamily="34" charset="-120"/>
-              </a:rPr>
-              <a:t>Store in an airtight box for 2–3 days, or freeze for a month.</a:t>
-            </a:r>
-            <a:endParaRPr lang="en-US" sz="1500" dirty="0"/>
-          </a:p>
-        </p:txBody>
-      </p:sp>
-      <p:sp>
-        <p:nvSpPr>
-          <p:cNvPr id="8" name="Shape 5"/>
+              <a:t>Slowly pour in the warm brown butter (and vanilla), whisking until the batter is glossy.</a:t>
+            </a:r>
+            <a:endParaRPr lang="en-US" sz="1400" dirty="0"/>
+          </a:p>
+        </p:txBody>
+      </p:sp>
+      <p:sp>
+        <p:nvSpPr>
+          <p:cNvPr id="10" name="Shape 7"/>
           <p:cNvSpPr/>
           <p:nvPr/>
         </p:nvSpPr>
         <p:spPr>
           <a:xfrm>
-            <a:off x="6309360" y="1463040"/>
-            <a:ext cx="822960" cy="822960"/>
-          </a:xfrm>
-          <a:prstGeom prst="ellipse">
-            <a:avLst/>
+            <a:off x="3383280" y="1783080"/>
+            <a:ext cx="2606040" cy="4480560"/>
+          </a:xfrm>
+          <a:prstGeom prst="roundRect">
+            <a:avLst>
+              <a:gd name="adj" fmla="val 4211"/>
+            </a:avLst>
           </a:prstGeom>
           <a:solidFill>
-            <a:srgbClr val="C8963E"/>
+            <a:srgbClr val="F6EEE2"/>
           </a:solidFill>
           <a:ln w="12700">
             <a:solidFill>
-              <a:srgbClr val="C8963E"/>
+              <a:srgbClr val="F6EEE2"/>
             </a:solidFill>
             <a:prstDash val="solid"/>
           </a:ln>
         </p:spPr>
       </p:sp>
+      <p:sp>
+        <p:nvSpPr>
+          <p:cNvPr id="11" name="Shape 8"/>
+          <p:cNvSpPr/>
+          <p:nvPr/>
+        </p:nvSpPr>
+        <p:spPr>
+          <a:xfrm>
+            <a:off x="3611880" y="2057400"/>
+            <a:ext cx="731520" cy="731520"/>
+          </a:xfrm>
+          <a:prstGeom prst="ellipse">
+            <a:avLst/>
+          </a:prstGeom>
+          <a:solidFill>
+            <a:srgbClr val="3B2418"/>
+          </a:solidFill>
+          <a:ln w="12700">
+            <a:solidFill>
+              <a:srgbClr val="3B2418"/>
+            </a:solidFill>
+            <a:prstDash val="solid"/>
+          </a:ln>
+        </p:spPr>
+      </p:sp>
+      <p:sp>
+        <p:nvSpPr>
+          <p:cNvPr id="12" name="Text 9"/>
+          <p:cNvSpPr txBox="1"/>
+          <p:nvPr/>
+        </p:nvSpPr>
+        <p:spPr>
+          <a:xfrm>
+            <a:off x="3611880" y="2057400"/>
+            <a:ext cx="731520" cy="731520"/>
+          </a:xfrm>
+          <a:prstGeom prst="rect">
+            <a:avLst/>
+          </a:prstGeom>
+          <a:noFill/>
+          <a:ln/>
+        </p:spPr>
+        <p:txBody>
+          <a:bodyPr wrap="square" lIns="0" tIns="0" rIns="0" bIns="0" rtlCol="0" anchor="ctr"/>
+          <a:lstStyle/>
+          <a:p>
+            <a:pPr algn="ctr" indent="0" marL="0">
+              <a:buNone/>
+            </a:pPr>
+            <a:r>
+              <a:rPr lang="en-US" sz="2600" b="1" dirty="0">
+                <a:solidFill>
+                  <a:srgbClr val="C8963E"/>
+                </a:solidFill>
+                <a:latin typeface="Cambria" pitchFamily="34" charset="0"/>
+                <a:ea typeface="Cambria" pitchFamily="34" charset="-122"/>
+                <a:cs typeface="Cambria" pitchFamily="34" charset="-120"/>
+              </a:rPr>
+              <a:t>6</a:t>
+            </a:r>
+            <a:endParaRPr lang="en-US" sz="2600" dirty="0"/>
+          </a:p>
+        </p:txBody>
+      </p:sp>
       <p:pic>
         <p:nvPicPr>
-          <p:cNvPr id="9" name="Image 1" descr="preencoded.png">    </p:cNvPr>
+          <p:cNvPr id="13" name="Image 1" descr="preencoded.png">    </p:cNvPr>
           <p:cNvPicPr>
             <a:picLocks noChangeAspect="1"/>
           </p:cNvPicPr>
@@ -9522,8 +9518,8 @@
         </p:blipFill>
         <p:spPr>
           <a:xfrm>
-            <a:off x="6515100" y="1668780"/>
-            <a:ext cx="411480" cy="411480"/>
+            <a:off x="5074920" y="2148840"/>
+            <a:ext cx="594360" cy="594360"/>
           </a:xfrm>
           <a:prstGeom prst="rect">
             <a:avLst/>
@@ -9532,30 +9528,30 @@
       </p:pic>
       <p:sp>
         <p:nvSpPr>
-          <p:cNvPr id="10" name="Text 6"/>
-          <p:cNvSpPr txBox="1"/>
-          <p:nvPr/>
-        </p:nvSpPr>
-        <p:spPr>
-          <a:xfrm>
-            <a:off x="7315200" y="1444752"/>
-            <a:ext cx="4297680" cy="411480"/>
-          </a:xfrm>
-          <a:prstGeom prst="rect">
-            <a:avLst/>
-          </a:prstGeom>
-          <a:noFill/>
-          <a:ln/>
-        </p:spPr>
-        <p:txBody>
-          <a:bodyPr wrap="square" lIns="0" tIns="0" rIns="0" bIns="0" rtlCol="0" anchor="ctr"/>
-          <a:lstStyle/>
-          <a:p>
-            <a:pPr indent="0" marL="0">
-              <a:buNone/>
-            </a:pPr>
-            <a:r>
-              <a:rPr lang="en-US" sz="1900" b="1" dirty="0">
+          <p:cNvPr id="14" name="Text 10"/>
+          <p:cNvSpPr txBox="1"/>
+          <p:nvPr/>
+        </p:nvSpPr>
+        <p:spPr>
+          <a:xfrm>
+            <a:off x="3611880" y="2971800"/>
+            <a:ext cx="2194560" cy="731520"/>
+          </a:xfrm>
+          <a:prstGeom prst="rect">
+            <a:avLst/>
+          </a:prstGeom>
+          <a:noFill/>
+          <a:ln/>
+        </p:spPr>
+        <p:txBody>
+          <a:bodyPr wrap="square" lIns="0" tIns="0" rIns="0" bIns="0" rtlCol="0" anchor="t"/>
+          <a:lstStyle/>
+          <a:p>
+            <a:pPr indent="0" marL="0">
+              <a:buNone/>
+            </a:pPr>
+            <a:r>
+              <a:rPr lang="en-US" sz="1800" b="1" dirty="0">
                 <a:solidFill>
                   <a:srgbClr val="3B2418"/>
                 </a:solidFill>
@@ -9563,31 +9559,31 @@
                 <a:ea typeface="Cambria" pitchFamily="34" charset="-122"/>
                 <a:cs typeface="Cambria" pitchFamily="34" charset="-120"/>
               </a:rPr>
-              <a:t>Raspberry</a:t>
-            </a:r>
-            <a:endParaRPr lang="en-US" sz="1900" dirty="0"/>
-          </a:p>
-        </p:txBody>
-      </p:sp>
-      <p:sp>
-        <p:nvSpPr>
-          <p:cNvPr id="11" name="Text 7"/>
-          <p:cNvSpPr txBox="1"/>
-          <p:nvPr/>
-        </p:nvSpPr>
-        <p:spPr>
-          <a:xfrm>
-            <a:off x="7315200" y="1847088"/>
-            <a:ext cx="4297680" cy="457200"/>
-          </a:xfrm>
-          <a:prstGeom prst="rect">
-            <a:avLst/>
-          </a:prstGeom>
-          <a:noFill/>
-          <a:ln/>
-        </p:spPr>
-        <p:txBody>
-          <a:bodyPr wrap="square" lIns="0" tIns="0" rIns="0" bIns="0" rtlCol="0" anchor="ctr"/>
+              <a:t>Rest the batter</a:t>
+            </a:r>
+            <a:endParaRPr lang="en-US" sz="1800" dirty="0"/>
+          </a:p>
+        </p:txBody>
+      </p:sp>
+      <p:sp>
+        <p:nvSpPr>
+          <p:cNvPr id="15" name="Text 11"/>
+          <p:cNvSpPr txBox="1"/>
+          <p:nvPr/>
+        </p:nvSpPr>
+        <p:spPr>
+          <a:xfrm>
+            <a:off x="3611880" y="3749040"/>
+            <a:ext cx="2194560" cy="2377440"/>
+          </a:xfrm>
+          <a:prstGeom prst="rect">
+            <a:avLst/>
+          </a:prstGeom>
+          <a:noFill/>
+          <a:ln/>
+        </p:spPr>
+        <p:txBody>
+          <a:bodyPr wrap="square" lIns="0" tIns="0" rIns="0" bIns="0" rtlCol="0" anchor="t"/>
           <a:lstStyle/>
           <a:p>
             <a:pPr indent="0" marL="0">
@@ -9596,13 +9592,13 @@
             <a:r>
               <a:rPr lang="en-US" sz="1400" dirty="0">
                 <a:solidFill>
-                  <a:srgbClr val="6E5A4B"/>
+                  <a:srgbClr val="2A1D15"/>
                 </a:solidFill>
                 <a:latin typeface="Calibri" pitchFamily="34" charset="0"/>
                 <a:ea typeface="Calibri" pitchFamily="34" charset="-122"/>
                 <a:cs typeface="Calibri" pitchFamily="34" charset="-120"/>
               </a:rPr>
-              <a:t>A fresh raspberry pressed into each cake</a:t>
+              <a:t>Chill for 30 minutes (or up to overnight). This gives a better rise and texture.</a:t>
             </a:r>
             <a:endParaRPr lang="en-US" sz="1400" dirty="0"/>
           </a:p>
@@ -9610,32 +9606,98 @@
       </p:sp>
       <p:sp>
         <p:nvSpPr>
-          <p:cNvPr id="12" name="Shape 8"/>
+          <p:cNvPr id="16" name="Shape 12"/>
           <p:cNvSpPr/>
           <p:nvPr/>
         </p:nvSpPr>
         <p:spPr>
           <a:xfrm>
-            <a:off x="6309360" y="2697480"/>
-            <a:ext cx="822960" cy="822960"/>
-          </a:xfrm>
-          <a:prstGeom prst="ellipse">
-            <a:avLst/>
+            <a:off x="6217920" y="1783080"/>
+            <a:ext cx="2606040" cy="4480560"/>
+          </a:xfrm>
+          <a:prstGeom prst="roundRect">
+            <a:avLst>
+              <a:gd name="adj" fmla="val 4211"/>
+            </a:avLst>
           </a:prstGeom>
           <a:solidFill>
-            <a:srgbClr val="C8963E"/>
+            <a:srgbClr val="F6EEE2"/>
           </a:solidFill>
           <a:ln w="12700">
             <a:solidFill>
-              <a:srgbClr val="C8963E"/>
+              <a:srgbClr val="F6EEE2"/>
             </a:solidFill>
             <a:prstDash val="solid"/>
           </a:ln>
         </p:spPr>
       </p:sp>
+      <p:sp>
+        <p:nvSpPr>
+          <p:cNvPr id="17" name="Shape 13"/>
+          <p:cNvSpPr/>
+          <p:nvPr/>
+        </p:nvSpPr>
+        <p:spPr>
+          <a:xfrm>
+            <a:off x="6446520" y="2057400"/>
+            <a:ext cx="731520" cy="731520"/>
+          </a:xfrm>
+          <a:prstGeom prst="ellipse">
+            <a:avLst/>
+          </a:prstGeom>
+          <a:solidFill>
+            <a:srgbClr val="3B2418"/>
+          </a:solidFill>
+          <a:ln w="12700">
+            <a:solidFill>
+              <a:srgbClr val="3B2418"/>
+            </a:solidFill>
+            <a:prstDash val="solid"/>
+          </a:ln>
+        </p:spPr>
+      </p:sp>
+      <p:sp>
+        <p:nvSpPr>
+          <p:cNvPr id="18" name="Text 14"/>
+          <p:cNvSpPr txBox="1"/>
+          <p:nvPr/>
+        </p:nvSpPr>
+        <p:spPr>
+          <a:xfrm>
+            <a:off x="6446520" y="2057400"/>
+            <a:ext cx="731520" cy="731520"/>
+          </a:xfrm>
+          <a:prstGeom prst="rect">
+            <a:avLst/>
+          </a:prstGeom>
+          <a:noFill/>
+          <a:ln/>
+        </p:spPr>
+        <p:txBody>
+          <a:bodyPr wrap="square" lIns="0" tIns="0" rIns="0" bIns="0" rtlCol="0" anchor="ctr"/>
+          <a:lstStyle/>
+          <a:p>
+            <a:pPr algn="ctr" indent="0" marL="0">
+              <a:buNone/>
+            </a:pPr>
+            <a:r>
+              <a:rPr lang="en-US" sz="2600" b="1" dirty="0">
+                <a:solidFill>
+                  <a:srgbClr val="C8963E"/>
+                </a:solidFill>
+                <a:latin typeface="Cambria" pitchFamily="34" charset="0"/>
+                <a:ea typeface="Cambria" pitchFamily="34" charset="-122"/>
+                <a:cs typeface="Cambria" pitchFamily="34" charset="-120"/>
+              </a:rPr>
+              <a:t>7</a:t>
+            </a:r>
+            <a:endParaRPr lang="en-US" sz="2600" dirty="0"/>
+          </a:p>
+        </p:txBody>
+      </p:sp>
       <p:pic>
         <p:nvPicPr>
-          <p:cNvPr id="13" name="Image 2" descr="preencoded.png">    </p:cNvPr>
+          <p:cNvPr id="19" name="Image 2" descr="preencoded.png">    </p:cNvPr>
           <p:cNvPicPr>
             <a:picLocks noChangeAspect="1"/>
           </p:cNvPicPr>
@@ -9649,8 +9711,8 @@
         </p:blipFill>
         <p:spPr>
           <a:xfrm>
-            <a:off x="6515100" y="2903220"/>
-            <a:ext cx="411480" cy="411480"/>
+            <a:off x="7909560" y="2148840"/>
+            <a:ext cx="594360" cy="594360"/>
           </a:xfrm>
           <a:prstGeom prst="rect">
             <a:avLst/>
@@ -9659,30 +9721,30 @@
       </p:pic>
       <p:sp>
         <p:nvSpPr>
-          <p:cNvPr id="14" name="Text 9"/>
-          <p:cNvSpPr txBox="1"/>
-          <p:nvPr/>
-        </p:nvSpPr>
-        <p:spPr>
-          <a:xfrm>
-            <a:off x="7315200" y="2679192"/>
-            <a:ext cx="4297680" cy="411480"/>
-          </a:xfrm>
-          <a:prstGeom prst="rect">
-            <a:avLst/>
-          </a:prstGeom>
-          <a:noFill/>
-          <a:ln/>
-        </p:spPr>
-        <p:txBody>
-          <a:bodyPr wrap="square" lIns="0" tIns="0" rIns="0" bIns="0" rtlCol="0" anchor="ctr"/>
-          <a:lstStyle/>
-          <a:p>
-            <a:pPr indent="0" marL="0">
-              <a:buNone/>
-            </a:pPr>
-            <a:r>
-              <a:rPr lang="en-US" sz="1900" b="1" dirty="0">
+          <p:cNvPr id="20" name="Text 15"/>
+          <p:cNvSpPr txBox="1"/>
+          <p:nvPr/>
+        </p:nvSpPr>
+        <p:spPr>
+          <a:xfrm>
+            <a:off x="6446520" y="2971800"/>
+            <a:ext cx="2194560" cy="731520"/>
+          </a:xfrm>
+          <a:prstGeom prst="rect">
+            <a:avLst/>
+          </a:prstGeom>
+          <a:noFill/>
+          <a:ln/>
+        </p:spPr>
+        <p:txBody>
+          <a:bodyPr wrap="square" lIns="0" tIns="0" rIns="0" bIns="0" rtlCol="0" anchor="t"/>
+          <a:lstStyle/>
+          <a:p>
+            <a:pPr indent="0" marL="0">
+              <a:buNone/>
+            </a:pPr>
+            <a:r>
+              <a:rPr lang="en-US" sz="1800" b="1" dirty="0">
                 <a:solidFill>
                   <a:srgbClr val="3B2418"/>
                 </a:solidFill>
@@ -9690,31 +9752,31 @@
                 <a:ea typeface="Cambria" pitchFamily="34" charset="-122"/>
                 <a:cs typeface="Cambria" pitchFamily="34" charset="-120"/>
               </a:rPr>
-              <a:t>Chocolate</a:t>
-            </a:r>
-            <a:endParaRPr lang="en-US" sz="1900" dirty="0"/>
-          </a:p>
-        </p:txBody>
-      </p:sp>
-      <p:sp>
-        <p:nvSpPr>
-          <p:cNvPr id="15" name="Text 10"/>
-          <p:cNvSpPr txBox="1"/>
-          <p:nvPr/>
-        </p:nvSpPr>
-        <p:spPr>
-          <a:xfrm>
-            <a:off x="7315200" y="3081528"/>
-            <a:ext cx="4297680" cy="457200"/>
-          </a:xfrm>
-          <a:prstGeom prst="rect">
-            <a:avLst/>
-          </a:prstGeom>
-          <a:noFill/>
-          <a:ln/>
-        </p:spPr>
-        <p:txBody>
-          <a:bodyPr wrap="square" lIns="0" tIns="0" rIns="0" bIns="0" rtlCol="0" anchor="ctr"/>
+              <a:t>Fill &amp; top</a:t>
+            </a:r>
+            <a:endParaRPr lang="en-US" sz="1800" dirty="0"/>
+          </a:p>
+        </p:txBody>
+      </p:sp>
+      <p:sp>
+        <p:nvSpPr>
+          <p:cNvPr id="21" name="Text 16"/>
+          <p:cNvSpPr txBox="1"/>
+          <p:nvPr/>
+        </p:nvSpPr>
+        <p:spPr>
+          <a:xfrm>
+            <a:off x="6446520" y="3749040"/>
+            <a:ext cx="2194560" cy="2377440"/>
+          </a:xfrm>
+          <a:prstGeom prst="rect">
+            <a:avLst/>
+          </a:prstGeom>
+          <a:noFill/>
+          <a:ln/>
+        </p:spPr>
+        <p:txBody>
+          <a:bodyPr wrap="square" lIns="0" tIns="0" rIns="0" bIns="0" rtlCol="0" anchor="t"/>
           <a:lstStyle/>
           <a:p>
             <a:pPr indent="0" marL="0">
@@ -9723,13 +9785,13 @@
             <a:r>
               <a:rPr lang="en-US" sz="1400" dirty="0">
                 <a:solidFill>
-                  <a:srgbClr val="6E5A4B"/>
+                  <a:srgbClr val="2A1D15"/>
                 </a:solidFill>
                 <a:latin typeface="Calibri" pitchFamily="34" charset="0"/>
                 <a:ea typeface="Calibri" pitchFamily="34" charset="-122"/>
                 <a:cs typeface="Calibri" pitchFamily="34" charset="-120"/>
               </a:rPr>
-              <a:t>Add cocoa powder or chocolate chips</a:t>
+              <a:t>Spoon or pipe the batter into the moulds about ¾ full. Add flaked almonds or a raspberry if you like.</a:t>
             </a:r>
             <a:endParaRPr lang="en-US" sz="1400" dirty="0"/>
           </a:p>
@@ -9737,32 +9799,98 @@
       </p:sp>
       <p:sp>
         <p:nvSpPr>
-          <p:cNvPr id="16" name="Shape 11"/>
+          <p:cNvPr id="22" name="Shape 17"/>
           <p:cNvSpPr/>
           <p:nvPr/>
         </p:nvSpPr>
         <p:spPr>
           <a:xfrm>
-            <a:off x="6309360" y="3931920"/>
-            <a:ext cx="822960" cy="822960"/>
-          </a:xfrm>
-          <a:prstGeom prst="ellipse">
-            <a:avLst/>
+            <a:off x="9052560" y="1783080"/>
+            <a:ext cx="2606040" cy="4480560"/>
+          </a:xfrm>
+          <a:prstGeom prst="roundRect">
+            <a:avLst>
+              <a:gd name="adj" fmla="val 4211"/>
+            </a:avLst>
           </a:prstGeom>
           <a:solidFill>
-            <a:srgbClr val="C8963E"/>
+            <a:srgbClr val="F6EEE2"/>
           </a:solidFill>
           <a:ln w="12700">
             <a:solidFill>
-              <a:srgbClr val="C8963E"/>
+              <a:srgbClr val="F6EEE2"/>
             </a:solidFill>
             <a:prstDash val="solid"/>
           </a:ln>
         </p:spPr>
       </p:sp>
+      <p:sp>
+        <p:nvSpPr>
+          <p:cNvPr id="23" name="Shape 18"/>
+          <p:cNvSpPr/>
+          <p:nvPr/>
+        </p:nvSpPr>
+        <p:spPr>
+          <a:xfrm>
+            <a:off x="9281160" y="2057400"/>
+            <a:ext cx="731520" cy="731520"/>
+          </a:xfrm>
+          <a:prstGeom prst="ellipse">
+            <a:avLst/>
+          </a:prstGeom>
+          <a:solidFill>
+            <a:srgbClr val="3B2418"/>
+          </a:solidFill>
+          <a:ln w="12700">
+            <a:solidFill>
+              <a:srgbClr val="3B2418"/>
+            </a:solidFill>
+            <a:prstDash val="solid"/>
+          </a:ln>
+        </p:spPr>
+      </p:sp>
+      <p:sp>
+        <p:nvSpPr>
+          <p:cNvPr id="24" name="Text 19"/>
+          <p:cNvSpPr txBox="1"/>
+          <p:nvPr/>
+        </p:nvSpPr>
+        <p:spPr>
+          <a:xfrm>
+            <a:off x="9281160" y="2057400"/>
+            <a:ext cx="731520" cy="731520"/>
+          </a:xfrm>
+          <a:prstGeom prst="rect">
+            <a:avLst/>
+          </a:prstGeom>
+          <a:noFill/>
+          <a:ln/>
+        </p:spPr>
+        <p:txBody>
+          <a:bodyPr wrap="square" lIns="0" tIns="0" rIns="0" bIns="0" rtlCol="0" anchor="ctr"/>
+          <a:lstStyle/>
+          <a:p>
+            <a:pPr algn="ctr" indent="0" marL="0">
+              <a:buNone/>
+            </a:pPr>
+            <a:r>
+              <a:rPr lang="en-US" sz="2600" b="1" dirty="0">
+                <a:solidFill>
+                  <a:srgbClr val="C8963E"/>
+                </a:solidFill>
+                <a:latin typeface="Cambria" pitchFamily="34" charset="0"/>
+                <a:ea typeface="Cambria" pitchFamily="34" charset="-122"/>
+                <a:cs typeface="Cambria" pitchFamily="34" charset="-120"/>
+              </a:rPr>
+              <a:t>8</a:t>
+            </a:r>
+            <a:endParaRPr lang="en-US" sz="2600" dirty="0"/>
+          </a:p>
+        </p:txBody>
+      </p:sp>
       <p:pic>
         <p:nvPicPr>
-          <p:cNvPr id="17" name="Image 3" descr="preencoded.png">    </p:cNvPr>
+          <p:cNvPr id="25" name="Image 3" descr="preencoded.png">    </p:cNvPr>
           <p:cNvPicPr>
             <a:picLocks noChangeAspect="1"/>
           </p:cNvPicPr>
@@ -9776,8 +9904,8 @@
         </p:blipFill>
         <p:spPr>
           <a:xfrm>
-            <a:off x="6515100" y="4137660"/>
-            <a:ext cx="411480" cy="411480"/>
+            <a:off x="10744200" y="2148840"/>
+            <a:ext cx="594360" cy="594360"/>
           </a:xfrm>
           <a:prstGeom prst="rect">
             <a:avLst/>
@@ -9786,30 +9914,30 @@
       </p:pic>
       <p:sp>
         <p:nvSpPr>
-          <p:cNvPr id="18" name="Text 12"/>
-          <p:cNvSpPr txBox="1"/>
-          <p:nvPr/>
-        </p:nvSpPr>
-        <p:spPr>
-          <a:xfrm>
-            <a:off x="7315200" y="3913632"/>
-            <a:ext cx="4297680" cy="411480"/>
-          </a:xfrm>
-          <a:prstGeom prst="rect">
-            <a:avLst/>
-          </a:prstGeom>
-          <a:noFill/>
-          <a:ln/>
-        </p:spPr>
-        <p:txBody>
-          <a:bodyPr wrap="square" lIns="0" tIns="0" rIns="0" bIns="0" rtlCol="0" anchor="ctr"/>
-          <a:lstStyle/>
-          <a:p>
-            <a:pPr indent="0" marL="0">
-              <a:buNone/>
-            </a:pPr>
-            <a:r>
-              <a:rPr lang="en-US" sz="1900" b="1" dirty="0">
+          <p:cNvPr id="26" name="Text 20"/>
+          <p:cNvSpPr txBox="1"/>
+          <p:nvPr/>
+        </p:nvSpPr>
+        <p:spPr>
+          <a:xfrm>
+            <a:off x="9281160" y="2971800"/>
+            <a:ext cx="2194560" cy="731520"/>
+          </a:xfrm>
+          <a:prstGeom prst="rect">
+            <a:avLst/>
+          </a:prstGeom>
+          <a:noFill/>
+          <a:ln/>
+        </p:spPr>
+        <p:txBody>
+          <a:bodyPr wrap="square" lIns="0" tIns="0" rIns="0" bIns="0" rtlCol="0" anchor="t"/>
+          <a:lstStyle/>
+          <a:p>
+            <a:pPr indent="0" marL="0">
+              <a:buNone/>
+            </a:pPr>
+            <a:r>
+              <a:rPr lang="en-US" sz="1800" b="1" dirty="0">
                 <a:solidFill>
                   <a:srgbClr val="3B2418"/>
                 </a:solidFill>
@@ -9817,31 +9945,31 @@
                 <a:ea typeface="Cambria" pitchFamily="34" charset="-122"/>
                 <a:cs typeface="Cambria" pitchFamily="34" charset="-120"/>
               </a:rPr>
-              <a:t>Pistachio or matcha</a:t>
-            </a:r>
-            <a:endParaRPr lang="en-US" sz="1900" dirty="0"/>
-          </a:p>
-        </p:txBody>
-      </p:sp>
-      <p:sp>
-        <p:nvSpPr>
-          <p:cNvPr id="19" name="Text 13"/>
-          <p:cNvSpPr txBox="1"/>
-          <p:nvPr/>
-        </p:nvSpPr>
-        <p:spPr>
-          <a:xfrm>
-            <a:off x="7315200" y="4315968"/>
-            <a:ext cx="4297680" cy="457200"/>
-          </a:xfrm>
-          <a:prstGeom prst="rect">
-            <a:avLst/>
-          </a:prstGeom>
-          <a:noFill/>
-          <a:ln/>
-        </p:spPr>
-        <p:txBody>
-          <a:bodyPr wrap="square" lIns="0" tIns="0" rIns="0" bIns="0" rtlCol="0" anchor="ctr"/>
+              <a:t>Bake &amp; cool</a:t>
+            </a:r>
+            <a:endParaRPr lang="en-US" sz="1800" dirty="0"/>
+          </a:p>
+        </p:txBody>
+      </p:sp>
+      <p:sp>
+        <p:nvSpPr>
+          <p:cNvPr id="27" name="Text 21"/>
+          <p:cNvSpPr txBox="1"/>
+          <p:nvPr/>
+        </p:nvSpPr>
+        <p:spPr>
+          <a:xfrm>
+            <a:off x="9281160" y="3749040"/>
+            <a:ext cx="2194560" cy="2377440"/>
+          </a:xfrm>
+          <a:prstGeom prst="rect">
+            <a:avLst/>
+          </a:prstGeom>
+          <a:noFill/>
+          <a:ln/>
+        </p:spPr>
+        <p:txBody>
+          <a:bodyPr wrap="square" lIns="0" tIns="0" rIns="0" bIns="0" rtlCol="0" anchor="t"/>
           <a:lstStyle/>
           <a:p>
             <a:pPr indent="0" marL="0">
@@ -9850,140 +9978,13 @@
             <a:r>
               <a:rPr lang="en-US" sz="1400" dirty="0">
                 <a:solidFill>
-                  <a:srgbClr val="6E5A4B"/>
+                  <a:srgbClr val="2A1D15"/>
                 </a:solidFill>
                 <a:latin typeface="Calibri" pitchFamily="34" charset="0"/>
                 <a:ea typeface="Calibri" pitchFamily="34" charset="-122"/>
                 <a:cs typeface="Calibri" pitchFamily="34" charset="-120"/>
               </a:rPr>
-              <a:t>Swap some almond flour for pistachio or add matcha</a:t>
-            </a:r>
-            <a:endParaRPr lang="en-US" sz="1400" dirty="0"/>
-          </a:p>
-        </p:txBody>
-      </p:sp>
-      <p:sp>
-        <p:nvSpPr>
-          <p:cNvPr id="20" name="Shape 14"/>
-          <p:cNvSpPr/>
-          <p:nvPr/>
-        </p:nvSpPr>
-        <p:spPr>
-          <a:xfrm>
-            <a:off x="6309360" y="5166360"/>
-            <a:ext cx="822960" cy="822960"/>
-          </a:xfrm>
-          <a:prstGeom prst="ellipse">
-            <a:avLst/>
-          </a:prstGeom>
-          <a:solidFill>
-            <a:srgbClr val="C8963E"/>
-          </a:solidFill>
-          <a:ln w="12700">
-            <a:solidFill>
-              <a:srgbClr val="C8963E"/>
-            </a:solidFill>
-            <a:prstDash val="solid"/>
-          </a:ln>
-        </p:spPr>
-      </p:sp>
-      <p:pic>
-        <p:nvPicPr>
-          <p:cNvPr id="21" name="Image 4" descr="preencoded.png">    </p:cNvPr>
-          <p:cNvPicPr>
-            <a:picLocks noChangeAspect="1"/>
-          </p:cNvPicPr>
-          <p:nvPr/>
-        </p:nvPicPr>
-        <p:blipFill>
-          <a:blip r:embed="rId5"/>
-          <a:stretch>
-            <a:fillRect/>
-          </a:stretch>
-        </p:blipFill>
-        <p:spPr>
-          <a:xfrm>
-            <a:off x="6515100" y="5372100"/>
-            <a:ext cx="411480" cy="411480"/>
-          </a:xfrm>
-          <a:prstGeom prst="rect">
-            <a:avLst/>
-          </a:prstGeom>
-        </p:spPr>
-      </p:pic>
-      <p:sp>
-        <p:nvSpPr>
-          <p:cNvPr id="22" name="Text 15"/>
-          <p:cNvSpPr txBox="1"/>
-          <p:nvPr/>
-        </p:nvSpPr>
-        <p:spPr>
-          <a:xfrm>
-            <a:off x="7315200" y="5148072"/>
-            <a:ext cx="4297680" cy="411480"/>
-          </a:xfrm>
-          <a:prstGeom prst="rect">
-            <a:avLst/>
-          </a:prstGeom>
-          <a:noFill/>
-          <a:ln/>
-        </p:spPr>
-        <p:txBody>
-          <a:bodyPr wrap="square" lIns="0" tIns="0" rIns="0" bIns="0" rtlCol="0" anchor="ctr"/>
-          <a:lstStyle/>
-          <a:p>
-            <a:pPr indent="0" marL="0">
-              <a:buNone/>
-            </a:pPr>
-            <a:r>
-              <a:rPr lang="en-US" sz="1900" b="1" dirty="0">
-                <a:solidFill>
-                  <a:srgbClr val="3B2418"/>
-                </a:solidFill>
-                <a:latin typeface="Cambria" pitchFamily="34" charset="0"/>
-                <a:ea typeface="Cambria" pitchFamily="34" charset="-122"/>
-                <a:cs typeface="Cambria" pitchFamily="34" charset="-120"/>
-              </a:rPr>
-              <a:t>Citrus</a:t>
-            </a:r>
-            <a:endParaRPr lang="en-US" sz="1900" dirty="0"/>
-          </a:p>
-        </p:txBody>
-      </p:sp>
-      <p:sp>
-        <p:nvSpPr>
-          <p:cNvPr id="23" name="Text 16"/>
-          <p:cNvSpPr txBox="1"/>
-          <p:nvPr/>
-        </p:nvSpPr>
-        <p:spPr>
-          <a:xfrm>
-            <a:off x="7315200" y="5550408"/>
-            <a:ext cx="4297680" cy="457200"/>
-          </a:xfrm>
-          <a:prstGeom prst="rect">
-            <a:avLst/>
-          </a:prstGeom>
-          <a:noFill/>
-          <a:ln/>
-        </p:spPr>
-        <p:txBody>
-          <a:bodyPr wrap="square" lIns="0" tIns="0" rIns="0" bIns="0" rtlCol="0" anchor="ctr"/>
-          <a:lstStyle/>
-          <a:p>
-            <a:pPr indent="0" marL="0">
-              <a:buNone/>
-            </a:pPr>
-            <a:r>
-              <a:rPr lang="en-US" sz="1400" dirty="0">
-                <a:solidFill>
-                  <a:srgbClr val="6E5A4B"/>
-                </a:solidFill>
-                <a:latin typeface="Calibri" pitchFamily="34" charset="0"/>
-                <a:ea typeface="Calibri" pitchFamily="34" charset="-122"/>
-                <a:cs typeface="Calibri" pitchFamily="34" charset="-120"/>
-              </a:rPr>
-              <a:t>Add lemon or orange zest to the batter</a:t>
+              <a:t>Bake 12–15 min until the edges are golden and the tops spring back. Cool 5 min, then unmould onto a rack.</a:t>
             </a:r>
             <a:endParaRPr lang="en-US" sz="1400" dirty="0"/>
           </a:p>
